--- a/presentations/SRE_Nidaan_Demo_Deck.pptx
+++ b/presentations/SRE_Nidaan_Demo_Deck.pptx
@@ -14,7 +14,6 @@
     <p:sldId id="262" r:id="rId13"/>
     <p:sldId id="263" r:id="rId14"/>
     <p:sldId id="264" r:id="rId15"/>
-    <p:sldId id="265" r:id="rId16"/>
   </p:sldIdLst>
   <p:sldSz cx="12191695" cy="6858000" type="screen4x3"/>
   <p:notesSz cx="6858000" cy="9144000"/>
@@ -3112,7 +3111,7 @@
             <a:avLst/>
           </a:prstGeom>
           <a:solidFill>
-            <a:srgbClr val="F5F9FF"/>
+            <a:srgbClr val="F2F7FF"/>
           </a:solidFill>
           <a:ln>
             <a:noFill/>
@@ -3142,14 +3141,143 @@
       </p:sp>
       <p:sp>
         <p:nvSpPr>
-          <p:cNvPr id="3" name="TextBox 2"/>
+          <p:cNvPr id="3" name="Rectangle 2"/>
+          <p:cNvSpPr/>
+          <p:nvPr/>
+        </p:nvSpPr>
+        <p:spPr>
+          <a:xfrm>
+            <a:off x="0" y="0"/>
+            <a:ext cx="12191695" cy="256032"/>
+          </a:xfrm>
+          <a:prstGeom prst="rect">
+            <a:avLst/>
+          </a:prstGeom>
+          <a:solidFill>
+            <a:srgbClr val="185FCB"/>
+          </a:solidFill>
+          <a:ln>
+            <a:noFill/>
+          </a:ln>
+        </p:spPr>
+        <p:style>
+          <a:lnRef idx="1">
+            <a:schemeClr val="accent1"/>
+          </a:lnRef>
+          <a:fillRef idx="3">
+            <a:schemeClr val="accent1"/>
+          </a:fillRef>
+          <a:effectRef idx="2">
+            <a:schemeClr val="accent1"/>
+          </a:effectRef>
+          <a:fontRef idx="minor">
+            <a:schemeClr val="lt1"/>
+          </a:fontRef>
+        </p:style>
+        <p:txBody>
+          <a:bodyPr rtlCol="0" anchor="ctr"/>
+          <a:lstStyle/>
+          <a:p>
+            <a:pPr algn="ctr"/>
+          </a:p>
+        </p:txBody>
+      </p:sp>
+      <p:sp>
+        <p:nvSpPr>
+          <p:cNvPr id="4" name="Oval 3"/>
+          <p:cNvSpPr/>
+          <p:nvPr/>
+        </p:nvSpPr>
+        <p:spPr>
+          <a:xfrm>
+            <a:off x="-1097280" y="-914400"/>
+            <a:ext cx="3474720" cy="2926080"/>
+          </a:xfrm>
+          <a:prstGeom prst="ellipse">
+            <a:avLst/>
+          </a:prstGeom>
+          <a:solidFill>
+            <a:srgbClr val="E7F0FF"/>
+          </a:solidFill>
+          <a:ln>
+            <a:noFill/>
+          </a:ln>
+        </p:spPr>
+        <p:style>
+          <a:lnRef idx="1">
+            <a:schemeClr val="accent1"/>
+          </a:lnRef>
+          <a:fillRef idx="3">
+            <a:schemeClr val="accent1"/>
+          </a:fillRef>
+          <a:effectRef idx="2">
+            <a:schemeClr val="accent1"/>
+          </a:effectRef>
+          <a:fontRef idx="minor">
+            <a:schemeClr val="lt1"/>
+          </a:fontRef>
+        </p:style>
+        <p:txBody>
+          <a:bodyPr rtlCol="0" anchor="ctr"/>
+          <a:lstStyle/>
+          <a:p>
+            <a:pPr algn="ctr"/>
+          </a:p>
+        </p:txBody>
+      </p:sp>
+      <p:sp>
+        <p:nvSpPr>
+          <p:cNvPr id="5" name="Oval 4"/>
+          <p:cNvSpPr/>
+          <p:nvPr/>
+        </p:nvSpPr>
+        <p:spPr>
+          <a:xfrm>
+            <a:off x="9875520" y="-731520"/>
+            <a:ext cx="2926080" cy="2560320"/>
+          </a:xfrm>
+          <a:prstGeom prst="ellipse">
+            <a:avLst/>
+          </a:prstGeom>
+          <a:solidFill>
+            <a:srgbClr val="E3F7F4"/>
+          </a:solidFill>
+          <a:ln>
+            <a:noFill/>
+          </a:ln>
+        </p:spPr>
+        <p:style>
+          <a:lnRef idx="1">
+            <a:schemeClr val="accent1"/>
+          </a:lnRef>
+          <a:fillRef idx="3">
+            <a:schemeClr val="accent1"/>
+          </a:fillRef>
+          <a:effectRef idx="2">
+            <a:schemeClr val="accent1"/>
+          </a:effectRef>
+          <a:fontRef idx="minor">
+            <a:schemeClr val="lt1"/>
+          </a:fontRef>
+        </p:style>
+        <p:txBody>
+          <a:bodyPr rtlCol="0" anchor="ctr"/>
+          <a:lstStyle/>
+          <a:p>
+            <a:pPr algn="ctr"/>
+          </a:p>
+        </p:txBody>
+      </p:sp>
+      <p:sp>
+        <p:nvSpPr>
+          <p:cNvPr id="6" name="TextBox 5"/>
           <p:cNvSpPr txBox="1"/>
           <p:nvPr/>
         </p:nvSpPr>
         <p:spPr>
           <a:xfrm>
-            <a:off x="640080" y="457200"/>
-            <a:ext cx="10881360" cy="1371600"/>
+            <a:off x="658368" y="420624"/>
+            <a:ext cx="8138160" cy="658368"/>
           </a:xfrm>
           <a:prstGeom prst="rect">
             <a:avLst/>
@@ -3162,10 +3290,11 @@
           </a:bodyPr>
           <a:lstStyle/>
           <a:p>
-            <a:r>
-              <a:rPr sz="3600" b="1">
-                <a:solidFill>
-                  <a:srgbClr val="14243A"/>
+            <a:pPr algn="l"/>
+            <a:r>
+              <a:rPr sz="3500" b="1">
+                <a:solidFill>
+                  <a:srgbClr val="13233A"/>
                 </a:solidFill>
                 <a:latin typeface="Calibri"/>
               </a:rPr>
@@ -3176,14 +3305,14 @@
       </p:sp>
       <p:sp>
         <p:nvSpPr>
-          <p:cNvPr id="4" name="TextBox 3"/>
+          <p:cNvPr id="7" name="TextBox 6"/>
           <p:cNvSpPr txBox="1"/>
           <p:nvPr/>
         </p:nvSpPr>
         <p:spPr>
           <a:xfrm>
-            <a:off x="685800" y="1417320"/>
-            <a:ext cx="10789920" cy="1097280"/>
+            <a:off x="685800" y="1115568"/>
+            <a:ext cx="9692640" cy="457200"/>
           </a:xfrm>
           <a:prstGeom prst="rect">
             <a:avLst/>
@@ -3196,10 +3325,11 @@
           </a:bodyPr>
           <a:lstStyle/>
           <a:p>
-            <a:r>
-              <a:rPr sz="1800" b="0">
-                <a:solidFill>
-                  <a:srgbClr val="4D607A"/>
+            <a:pPr algn="l"/>
+            <a:r>
+              <a:rPr sz="1700" b="0">
+                <a:solidFill>
+                  <a:srgbClr val="4E6380"/>
                 </a:solidFill>
                 <a:latin typeface="Calibri"/>
               </a:rPr>
@@ -3210,14 +3340,59 @@
       </p:sp>
       <p:sp>
         <p:nvSpPr>
-          <p:cNvPr id="5" name="TextBox 4"/>
+          <p:cNvPr id="8" name="Rounded Rectangle 7"/>
+          <p:cNvSpPr/>
+          <p:nvPr/>
+        </p:nvSpPr>
+        <p:spPr>
+          <a:xfrm>
+            <a:off x="9464040" y="484632"/>
+            <a:ext cx="2011680" cy="438912"/>
+          </a:xfrm>
+          <a:prstGeom prst="roundRect">
+            <a:avLst/>
+          </a:prstGeom>
+          <a:solidFill>
+            <a:srgbClr val="E7F0FF"/>
+          </a:solidFill>
+          <a:ln>
+            <a:solidFill>
+              <a:srgbClr val="C4D5E9"/>
+            </a:solidFill>
+          </a:ln>
+        </p:spPr>
+        <p:style>
+          <a:lnRef idx="1">
+            <a:schemeClr val="accent1"/>
+          </a:lnRef>
+          <a:fillRef idx="3">
+            <a:schemeClr val="accent1"/>
+          </a:fillRef>
+          <a:effectRef idx="2">
+            <a:schemeClr val="accent1"/>
+          </a:effectRef>
+          <a:fontRef idx="minor">
+            <a:schemeClr val="lt1"/>
+          </a:fontRef>
+        </p:style>
+        <p:txBody>
+          <a:bodyPr rtlCol="0" anchor="ctr"/>
+          <a:lstStyle/>
+          <a:p>
+            <a:pPr algn="ctr"/>
+          </a:p>
+        </p:txBody>
+      </p:sp>
+      <p:sp>
+        <p:nvSpPr>
+          <p:cNvPr id="9" name="TextBox 8"/>
           <p:cNvSpPr txBox="1"/>
           <p:nvPr/>
         </p:nvSpPr>
         <p:spPr>
           <a:xfrm>
-            <a:off x="822960" y="2148840"/>
-            <a:ext cx="10698480" cy="548640"/>
+            <a:off x="9619488" y="548640"/>
+            <a:ext cx="1737360" cy="274320"/>
           </a:xfrm>
           <a:prstGeom prst="rect">
             <a:avLst/>
@@ -3230,28 +3405,29 @@
           </a:bodyPr>
           <a:lstStyle/>
           <a:p>
-            <a:r>
-              <a:rPr sz="2400" b="1">
-                <a:solidFill>
-                  <a:srgbClr val="2166CF"/>
-                </a:solidFill>
-                <a:latin typeface="Calibri"/>
-              </a:rPr>
-              <a:t>One-line intent</a:t>
-            </a:r>
-          </a:p>
-        </p:txBody>
-      </p:sp>
-      <p:sp>
-        <p:nvSpPr>
-          <p:cNvPr id="6" name="Rounded Rectangle 5"/>
+            <a:pPr algn="ctr"/>
+            <a:r>
+              <a:rPr sz="1100" b="1">
+                <a:solidFill>
+                  <a:srgbClr val="185FCB"/>
+                </a:solidFill>
+                <a:latin typeface="Calibri"/>
+              </a:rPr>
+              <a:t>DEMO DECK</a:t>
+            </a:r>
+          </a:p>
+        </p:txBody>
+      </p:sp>
+      <p:sp>
+        <p:nvSpPr>
+          <p:cNvPr id="10" name="Rounded Rectangle 9"/>
           <p:cNvSpPr/>
           <p:nvPr/>
         </p:nvSpPr>
         <p:spPr>
           <a:xfrm>
-            <a:off x="731520" y="2651760"/>
-            <a:ext cx="10789920" cy="2103120"/>
+            <a:off x="658368" y="1828800"/>
+            <a:ext cx="7223760" cy="4023360"/>
           </a:xfrm>
           <a:prstGeom prst="roundRect">
             <a:avLst/>
@@ -3261,7 +3437,7 @@
           </a:solidFill>
           <a:ln>
             <a:solidFill>
-              <a:srgbClr val="C2D3E8"/>
+              <a:srgbClr val="C4D5E9"/>
             </a:solidFill>
           </a:ln>
         </p:spPr>
@@ -3284,22 +3460,83 @@
           <a:lstStyle/>
           <a:p>
             <a:pPr algn="ctr"/>
-            <a:r>
-              <a:rPr sz="1800" b="0">
-                <a:solidFill>
-                  <a:srgbClr val="14243A"/>
-                </a:solidFill>
-                <a:latin typeface="Calibri"/>
-              </a:rPr>
-              <a:t>When incidents get noisy, help teams answer:</a:t>
-            </a:r>
-          </a:p>
-          <a:p>
-            <a:pPr/>
-            <a:r>
-              <a:rPr sz="1800" b="0">
-                <a:solidFill>
-                  <a:srgbClr val="14243A"/>
+          </a:p>
+        </p:txBody>
+      </p:sp>
+      <p:sp>
+        <p:nvSpPr>
+          <p:cNvPr id="11" name="TextBox 10"/>
+          <p:cNvSpPr txBox="1"/>
+          <p:nvPr/>
+        </p:nvSpPr>
+        <p:spPr>
+          <a:xfrm>
+            <a:off x="886968" y="1993392"/>
+            <a:ext cx="6766560" cy="457200"/>
+          </a:xfrm>
+          <a:prstGeom prst="rect">
+            <a:avLst/>
+          </a:prstGeom>
+          <a:noFill/>
+        </p:spPr>
+        <p:txBody>
+          <a:bodyPr wrap="none">
+            <a:spAutoFit/>
+          </a:bodyPr>
+          <a:lstStyle/>
+          <a:p>
+            <a:pPr algn="l"/>
+            <a:r>
+              <a:rPr sz="2000" b="1">
+                <a:solidFill>
+                  <a:srgbClr val="13233A"/>
+                </a:solidFill>
+                <a:latin typeface="Calibri"/>
+              </a:rPr>
+              <a:t>What this project is trying to solve</a:t>
+            </a:r>
+          </a:p>
+        </p:txBody>
+      </p:sp>
+      <p:sp>
+        <p:nvSpPr>
+          <p:cNvPr id="12" name="TextBox 11"/>
+          <p:cNvSpPr txBox="1"/>
+          <p:nvPr/>
+        </p:nvSpPr>
+        <p:spPr>
+          <a:xfrm>
+            <a:off x="886968" y="2487168"/>
+            <a:ext cx="6766560" cy="3200400"/>
+          </a:xfrm>
+          <a:prstGeom prst="rect">
+            <a:avLst/>
+          </a:prstGeom>
+          <a:noFill/>
+        </p:spPr>
+        <p:txBody>
+          <a:bodyPr wrap="none">
+            <a:spAutoFit/>
+          </a:bodyPr>
+          <a:lstStyle/>
+          <a:p>
+            <a:pPr algn="l"/>
+            <a:r>
+              <a:rPr sz="1500" b="0">
+                <a:solidFill>
+                  <a:srgbClr val="13233A"/>
+                </a:solidFill>
+                <a:latin typeface="Calibri"/>
+              </a:rPr>
+              <a:t>When incidents get noisy, responders repeatedly ask:</a:t>
+            </a:r>
+          </a:p>
+          <a:p>
+            <a:pPr algn="l"/>
+            <a:r>
+              <a:rPr sz="1500" b="0">
+                <a:solidFill>
+                  <a:srgbClr val="13233A"/>
                 </a:solidFill>
                 <a:latin typeface="Calibri"/>
               </a:rPr>
@@ -3307,11 +3544,11 @@
             </a:r>
           </a:p>
           <a:p>
-            <a:pPr/>
-            <a:r>
-              <a:rPr sz="1800" b="0">
-                <a:solidFill>
-                  <a:srgbClr val="14243A"/>
+            <a:pPr algn="l"/>
+            <a:r>
+              <a:rPr sz="1500" b="0">
+                <a:solidFill>
+                  <a:srgbClr val="13233A"/>
                 </a:solidFill>
                 <a:latin typeface="Calibri"/>
               </a:rPr>
@@ -3319,56 +3556,55 @@
             </a:r>
           </a:p>
           <a:p>
-            <a:pPr/>
-            <a:r>
-              <a:rPr sz="1800" b="0">
-                <a:solidFill>
-                  <a:srgbClr val="14243A"/>
+            <a:pPr algn="l"/>
+            <a:r>
+              <a:rPr sz="1500" b="0">
+                <a:solidFill>
+                  <a:srgbClr val="13233A"/>
                 </a:solidFill>
                 <a:latin typeface="Calibri"/>
               </a:rPr>
               <a:t>• What should we definitely not touch?</a:t>
             </a:r>
           </a:p>
-        </p:txBody>
-      </p:sp>
-    </p:spTree>
-  </p:cSld>
-  <p:clrMapOvr>
-    <a:masterClrMapping/>
-  </p:clrMapOvr>
-</p:sld>
-</file>
-
-<file path=ppt/slides/slide10.xml><?xml version="1.0" encoding="utf-8"?>
-<p:sld xmlns:a="http://schemas.openxmlformats.org/drawingml/2006/main" xmlns:p="http://schemas.openxmlformats.org/presentationml/2006/main" xmlns:r="http://schemas.openxmlformats.org/officeDocument/2006/relationships">
-  <p:cSld>
-    <p:spTree>
-      <p:nvGrpSpPr>
-        <p:cNvPr id="1" name=""/>
-        <p:cNvGrpSpPr/>
-        <p:nvPr/>
-      </p:nvGrpSpPr>
-      <p:grpSpPr/>
-      <p:sp>
-        <p:nvSpPr>
-          <p:cNvPr id="2" name="Rectangle 1"/>
+          <a:p>
+            <a:pPr algn="l"/>
+          </a:p>
+          <a:p>
+            <a:pPr algn="l"/>
+            <a:r>
+              <a:rPr sz="1500" b="0">
+                <a:solidFill>
+                  <a:srgbClr val="13233A"/>
+                </a:solidFill>
+                <a:latin typeface="Calibri"/>
+              </a:rPr>
+              <a:t>SRE Nidaan is designed to make that reasoning explicit, structured, and safer.</a:t>
+            </a:r>
+          </a:p>
+        </p:txBody>
+      </p:sp>
+      <p:sp>
+        <p:nvSpPr>
+          <p:cNvPr id="13" name="Rounded Rectangle 12"/>
           <p:cNvSpPr/>
           <p:nvPr/>
         </p:nvSpPr>
         <p:spPr>
           <a:xfrm>
-            <a:off x="0" y="0"/>
-            <a:ext cx="12191695" cy="6858000"/>
-          </a:xfrm>
-          <a:prstGeom prst="rect">
+            <a:off x="8138160" y="1828800"/>
+            <a:ext cx="3383280" cy="4023360"/>
+          </a:xfrm>
+          <a:prstGeom prst="roundRect">
             <a:avLst/>
           </a:prstGeom>
           <a:solidFill>
-            <a:srgbClr val="F5F9FF"/>
+            <a:srgbClr val="E7F0FF"/>
           </a:solidFill>
           <a:ln>
-            <a:noFill/>
+            <a:solidFill>
+              <a:srgbClr val="C4D5E9"/>
+            </a:solidFill>
           </a:ln>
         </p:spPr>
         <p:style>
@@ -3395,14 +3631,14 @@
       </p:sp>
       <p:sp>
         <p:nvSpPr>
-          <p:cNvPr id="3" name="TextBox 2"/>
+          <p:cNvPr id="14" name="TextBox 13"/>
           <p:cNvSpPr txBox="1"/>
           <p:nvPr/>
         </p:nvSpPr>
         <p:spPr>
           <a:xfrm>
-            <a:off x="640080" y="457200"/>
-            <a:ext cx="10881360" cy="1371600"/>
+            <a:off x="8366760" y="1993392"/>
+            <a:ext cx="2926080" cy="457200"/>
           </a:xfrm>
           <a:prstGeom prst="rect">
             <a:avLst/>
@@ -3415,28 +3651,29 @@
           </a:bodyPr>
           <a:lstStyle/>
           <a:p>
-            <a:r>
-              <a:rPr sz="3600" b="1">
-                <a:solidFill>
-                  <a:srgbClr val="14243A"/>
-                </a:solidFill>
-                <a:latin typeface="Calibri"/>
-              </a:rPr>
-              <a:t>Links</a:t>
-            </a:r>
-          </a:p>
-        </p:txBody>
-      </p:sp>
-      <p:sp>
-        <p:nvSpPr>
-          <p:cNvPr id="4" name="TextBox 3"/>
+            <a:pPr algn="l"/>
+            <a:r>
+              <a:rPr sz="2000" b="1">
+                <a:solidFill>
+                  <a:srgbClr val="185FCB"/>
+                </a:solidFill>
+                <a:latin typeface="Calibri"/>
+              </a:rPr>
+              <a:t>Demo focus</a:t>
+            </a:r>
+          </a:p>
+        </p:txBody>
+      </p:sp>
+      <p:sp>
+        <p:nvSpPr>
+          <p:cNvPr id="15" name="TextBox 14"/>
           <p:cNvSpPr txBox="1"/>
           <p:nvPr/>
         </p:nvSpPr>
         <p:spPr>
           <a:xfrm>
-            <a:off x="685800" y="1417320"/>
-            <a:ext cx="10789920" cy="1097280"/>
+            <a:off x="8366760" y="2487168"/>
+            <a:ext cx="2926080" cy="3200400"/>
           </a:xfrm>
           <a:prstGeom prst="rect">
             <a:avLst/>
@@ -3449,114 +3686,66 @@
           </a:bodyPr>
           <a:lstStyle/>
           <a:p>
-            <a:r>
-              <a:rPr sz="1800" b="0">
-                <a:solidFill>
-                  <a:srgbClr val="4D607A"/>
-                </a:solidFill>
-                <a:latin typeface="Calibri"/>
-              </a:rPr>
-              <a:t>Try it and review the code</a:t>
-            </a:r>
-          </a:p>
-        </p:txBody>
-      </p:sp>
-      <p:sp>
-        <p:nvSpPr>
-          <p:cNvPr id="5" name="TextBox 4"/>
-          <p:cNvSpPr txBox="1"/>
-          <p:nvPr/>
-        </p:nvSpPr>
-        <p:spPr>
-          <a:xfrm>
-            <a:off x="822960" y="2148840"/>
-            <a:ext cx="10698480" cy="548640"/>
-          </a:xfrm>
-          <a:prstGeom prst="rect">
-            <a:avLst/>
-          </a:prstGeom>
-          <a:noFill/>
-        </p:spPr>
-        <p:txBody>
-          <a:bodyPr wrap="none">
-            <a:spAutoFit/>
-          </a:bodyPr>
-          <a:lstStyle/>
-          <a:p>
-            <a:r>
-              <a:rPr sz="2400" b="1">
-                <a:solidFill>
-                  <a:srgbClr val="2166CF"/>
-                </a:solidFill>
-                <a:latin typeface="Calibri"/>
-              </a:rPr>
-              <a:t>Public endpoints</a:t>
-            </a:r>
-          </a:p>
-        </p:txBody>
-      </p:sp>
-      <p:sp>
-        <p:nvSpPr>
-          <p:cNvPr id="6" name="Rounded Rectangle 5"/>
-          <p:cNvSpPr/>
-          <p:nvPr/>
-        </p:nvSpPr>
-        <p:spPr>
-          <a:xfrm>
-            <a:off x="731520" y="2651760"/>
-            <a:ext cx="10789920" cy="2103120"/>
-          </a:xfrm>
-          <a:prstGeom prst="roundRect">
-            <a:avLst/>
-          </a:prstGeom>
-          <a:solidFill>
-            <a:srgbClr val="FFFFFF"/>
-          </a:solidFill>
-          <a:ln>
-            <a:solidFill>
-              <a:srgbClr val="C2D3E8"/>
-            </a:solidFill>
-          </a:ln>
-        </p:spPr>
-        <p:style>
-          <a:lnRef idx="1">
-            <a:schemeClr val="accent1"/>
-          </a:lnRef>
-          <a:fillRef idx="3">
-            <a:schemeClr val="accent1"/>
-          </a:fillRef>
-          <a:effectRef idx="2">
-            <a:schemeClr val="accent1"/>
-          </a:effectRef>
-          <a:fontRef idx="minor">
-            <a:schemeClr val="lt1"/>
-          </a:fontRef>
-        </p:style>
-        <p:txBody>
-          <a:bodyPr rtlCol="0" anchor="ctr"/>
-          <a:lstStyle/>
-          <a:p>
-            <a:pPr algn="ctr"/>
-            <a:r>
-              <a:rPr sz="1800" b="0">
-                <a:solidFill>
-                  <a:srgbClr val="14243A"/>
-                </a:solidFill>
-                <a:latin typeface="Calibri"/>
-              </a:rPr>
-              <a:t>Product: https://sre-nidaan-122722888597.us-east4.run.app</a:t>
-            </a:r>
-          </a:p>
-          <a:p>
-            <a:pPr/>
-            <a:r>
-              <a:rPr sz="1800" b="0">
-                <a:solidFill>
-                  <a:srgbClr val="14243A"/>
-                </a:solidFill>
-                <a:latin typeface="Calibri"/>
-              </a:rPr>
-              <a:t>GitHub: https://github.com/RitwijParmar/SRE-Nidaan</a:t>
+            <a:pPr algn="l"/>
+            <a:r>
+              <a:rPr sz="1500" b="0">
+                <a:solidFill>
+                  <a:srgbClr val="13233A"/>
+                </a:solidFill>
+                <a:latin typeface="Calibri"/>
+              </a:rPr>
+              <a:t>Live incident walkthrough</a:t>
+            </a:r>
+          </a:p>
+          <a:p>
+            <a:pPr algn="l"/>
+            <a:r>
+              <a:rPr sz="1500" b="0">
+                <a:solidFill>
+                  <a:srgbClr val="13233A"/>
+                </a:solidFill>
+                <a:latin typeface="Calibri"/>
+              </a:rPr>
+              <a:t>Architecture clarity</a:t>
+            </a:r>
+          </a:p>
+          <a:p>
+            <a:pPr algn="l"/>
+            <a:r>
+              <a:rPr sz="1500" b="0">
+                <a:solidFill>
+                  <a:srgbClr val="13233A"/>
+                </a:solidFill>
+                <a:latin typeface="Calibri"/>
+              </a:rPr>
+              <a:t>Safety gate flow</a:t>
+            </a:r>
+          </a:p>
+          <a:p>
+            <a:pPr algn="l"/>
+            <a:r>
+              <a:rPr sz="1500" b="0">
+                <a:solidFill>
+                  <a:srgbClr val="13233A"/>
+                </a:solidFill>
+                <a:latin typeface="Calibri"/>
+              </a:rPr>
+              <a:t>Model alignment stack</a:t>
+            </a:r>
+          </a:p>
+          <a:p>
+            <a:pPr algn="l"/>
+          </a:p>
+          <a:p>
+            <a:pPr algn="l"/>
+            <a:r>
+              <a:rPr sz="1500" b="0">
+                <a:solidFill>
+                  <a:srgbClr val="13233A"/>
+                </a:solidFill>
+                <a:latin typeface="Calibri"/>
+              </a:rPr>
+              <a:t>Early, imperfect but seems useful in practice.</a:t>
             </a:r>
           </a:p>
         </p:txBody>
@@ -3594,7 +3783,7 @@
             <a:avLst/>
           </a:prstGeom>
           <a:solidFill>
-            <a:srgbClr val="F5F9FF"/>
+            <a:srgbClr val="F2F7FF"/>
           </a:solidFill>
           <a:ln>
             <a:noFill/>
@@ -3624,14 +3813,143 @@
       </p:sp>
       <p:sp>
         <p:nvSpPr>
-          <p:cNvPr id="3" name="TextBox 2"/>
+          <p:cNvPr id="3" name="Rectangle 2"/>
+          <p:cNvSpPr/>
+          <p:nvPr/>
+        </p:nvSpPr>
+        <p:spPr>
+          <a:xfrm>
+            <a:off x="0" y="0"/>
+            <a:ext cx="12191695" cy="256032"/>
+          </a:xfrm>
+          <a:prstGeom prst="rect">
+            <a:avLst/>
+          </a:prstGeom>
+          <a:solidFill>
+            <a:srgbClr val="185FCB"/>
+          </a:solidFill>
+          <a:ln>
+            <a:noFill/>
+          </a:ln>
+        </p:spPr>
+        <p:style>
+          <a:lnRef idx="1">
+            <a:schemeClr val="accent1"/>
+          </a:lnRef>
+          <a:fillRef idx="3">
+            <a:schemeClr val="accent1"/>
+          </a:fillRef>
+          <a:effectRef idx="2">
+            <a:schemeClr val="accent1"/>
+          </a:effectRef>
+          <a:fontRef idx="minor">
+            <a:schemeClr val="lt1"/>
+          </a:fontRef>
+        </p:style>
+        <p:txBody>
+          <a:bodyPr rtlCol="0" anchor="ctr"/>
+          <a:lstStyle/>
+          <a:p>
+            <a:pPr algn="ctr"/>
+          </a:p>
+        </p:txBody>
+      </p:sp>
+      <p:sp>
+        <p:nvSpPr>
+          <p:cNvPr id="4" name="Oval 3"/>
+          <p:cNvSpPr/>
+          <p:nvPr/>
+        </p:nvSpPr>
+        <p:spPr>
+          <a:xfrm>
+            <a:off x="-1097280" y="-914400"/>
+            <a:ext cx="3474720" cy="2926080"/>
+          </a:xfrm>
+          <a:prstGeom prst="ellipse">
+            <a:avLst/>
+          </a:prstGeom>
+          <a:solidFill>
+            <a:srgbClr val="E7F0FF"/>
+          </a:solidFill>
+          <a:ln>
+            <a:noFill/>
+          </a:ln>
+        </p:spPr>
+        <p:style>
+          <a:lnRef idx="1">
+            <a:schemeClr val="accent1"/>
+          </a:lnRef>
+          <a:fillRef idx="3">
+            <a:schemeClr val="accent1"/>
+          </a:fillRef>
+          <a:effectRef idx="2">
+            <a:schemeClr val="accent1"/>
+          </a:effectRef>
+          <a:fontRef idx="minor">
+            <a:schemeClr val="lt1"/>
+          </a:fontRef>
+        </p:style>
+        <p:txBody>
+          <a:bodyPr rtlCol="0" anchor="ctr"/>
+          <a:lstStyle/>
+          <a:p>
+            <a:pPr algn="ctr"/>
+          </a:p>
+        </p:txBody>
+      </p:sp>
+      <p:sp>
+        <p:nvSpPr>
+          <p:cNvPr id="5" name="Oval 4"/>
+          <p:cNvSpPr/>
+          <p:nvPr/>
+        </p:nvSpPr>
+        <p:spPr>
+          <a:xfrm>
+            <a:off x="9875520" y="-731520"/>
+            <a:ext cx="2926080" cy="2560320"/>
+          </a:xfrm>
+          <a:prstGeom prst="ellipse">
+            <a:avLst/>
+          </a:prstGeom>
+          <a:solidFill>
+            <a:srgbClr val="E3F7F4"/>
+          </a:solidFill>
+          <a:ln>
+            <a:noFill/>
+          </a:ln>
+        </p:spPr>
+        <p:style>
+          <a:lnRef idx="1">
+            <a:schemeClr val="accent1"/>
+          </a:lnRef>
+          <a:fillRef idx="3">
+            <a:schemeClr val="accent1"/>
+          </a:fillRef>
+          <a:effectRef idx="2">
+            <a:schemeClr val="accent1"/>
+          </a:effectRef>
+          <a:fontRef idx="minor">
+            <a:schemeClr val="lt1"/>
+          </a:fontRef>
+        </p:style>
+        <p:txBody>
+          <a:bodyPr rtlCol="0" anchor="ctr"/>
+          <a:lstStyle/>
+          <a:p>
+            <a:pPr algn="ctr"/>
+          </a:p>
+        </p:txBody>
+      </p:sp>
+      <p:sp>
+        <p:nvSpPr>
+          <p:cNvPr id="6" name="TextBox 5"/>
           <p:cNvSpPr txBox="1"/>
           <p:nvPr/>
         </p:nvSpPr>
         <p:spPr>
           <a:xfrm>
-            <a:off x="640080" y="457200"/>
-            <a:ext cx="10881360" cy="1371600"/>
+            <a:off x="658368" y="420624"/>
+            <a:ext cx="8138160" cy="658368"/>
           </a:xfrm>
           <a:prstGeom prst="rect">
             <a:avLst/>
@@ -3644,28 +3962,29 @@
           </a:bodyPr>
           <a:lstStyle/>
           <a:p>
-            <a:r>
-              <a:rPr sz="3600" b="1">
-                <a:solidFill>
-                  <a:srgbClr val="14243A"/>
-                </a:solidFill>
-                <a:latin typeface="Calibri"/>
-              </a:rPr>
-              <a:t>Problem</a:t>
-            </a:r>
-          </a:p>
-        </p:txBody>
-      </p:sp>
-      <p:sp>
-        <p:nvSpPr>
-          <p:cNvPr id="4" name="TextBox 3"/>
+            <a:pPr algn="l"/>
+            <a:r>
+              <a:rPr sz="3500" b="1">
+                <a:solidFill>
+                  <a:srgbClr val="13233A"/>
+                </a:solidFill>
+                <a:latin typeface="Calibri"/>
+              </a:rPr>
+              <a:t>Why this matters</a:t>
+            </a:r>
+          </a:p>
+        </p:txBody>
+      </p:sp>
+      <p:sp>
+        <p:nvSpPr>
+          <p:cNvPr id="7" name="TextBox 6"/>
           <p:cNvSpPr txBox="1"/>
           <p:nvPr/>
         </p:nvSpPr>
         <p:spPr>
           <a:xfrm>
-            <a:off x="685800" y="1417320"/>
-            <a:ext cx="10789920" cy="1097280"/>
+            <a:off x="685800" y="1115568"/>
+            <a:ext cx="9692640" cy="457200"/>
           </a:xfrm>
           <a:prstGeom prst="rect">
             <a:avLst/>
@@ -3678,28 +3997,74 @@
           </a:bodyPr>
           <a:lstStyle/>
           <a:p>
-            <a:r>
-              <a:rPr sz="1800" b="0">
-                <a:solidFill>
-                  <a:srgbClr val="4D607A"/>
-                </a:solidFill>
-                <a:latin typeface="Calibri"/>
-              </a:rPr>
-              <a:t>Why standard LLM behavior is risky in incidents</a:t>
-            </a:r>
-          </a:p>
-        </p:txBody>
-      </p:sp>
-      <p:sp>
-        <p:nvSpPr>
-          <p:cNvPr id="5" name="TextBox 4"/>
+            <a:pPr algn="l"/>
+            <a:r>
+              <a:rPr sz="1700" b="0">
+                <a:solidFill>
+                  <a:srgbClr val="4E6380"/>
+                </a:solidFill>
+                <a:latin typeface="Calibri"/>
+              </a:rPr>
+              <a:t>Incident pressure punishes vague answers</a:t>
+            </a:r>
+          </a:p>
+        </p:txBody>
+      </p:sp>
+      <p:sp>
+        <p:nvSpPr>
+          <p:cNvPr id="8" name="Rounded Rectangle 7"/>
+          <p:cNvSpPr/>
+          <p:nvPr/>
+        </p:nvSpPr>
+        <p:spPr>
+          <a:xfrm>
+            <a:off x="9464040" y="484632"/>
+            <a:ext cx="2011680" cy="438912"/>
+          </a:xfrm>
+          <a:prstGeom prst="roundRect">
+            <a:avLst/>
+          </a:prstGeom>
+          <a:solidFill>
+            <a:srgbClr val="E7F0FF"/>
+          </a:solidFill>
+          <a:ln>
+            <a:solidFill>
+              <a:srgbClr val="C4D5E9"/>
+            </a:solidFill>
+          </a:ln>
+        </p:spPr>
+        <p:style>
+          <a:lnRef idx="1">
+            <a:schemeClr val="accent1"/>
+          </a:lnRef>
+          <a:fillRef idx="3">
+            <a:schemeClr val="accent1"/>
+          </a:fillRef>
+          <a:effectRef idx="2">
+            <a:schemeClr val="accent1"/>
+          </a:effectRef>
+          <a:fontRef idx="minor">
+            <a:schemeClr val="lt1"/>
+          </a:fontRef>
+        </p:style>
+        <p:txBody>
+          <a:bodyPr rtlCol="0" anchor="ctr"/>
+          <a:lstStyle/>
+          <a:p>
+            <a:pPr algn="ctr"/>
+          </a:p>
+        </p:txBody>
+      </p:sp>
+      <p:sp>
+        <p:nvSpPr>
+          <p:cNvPr id="9" name="TextBox 8"/>
           <p:cNvSpPr txBox="1"/>
           <p:nvPr/>
         </p:nvSpPr>
         <p:spPr>
           <a:xfrm>
-            <a:off x="822960" y="1920240"/>
-            <a:ext cx="10698480" cy="548640"/>
+            <a:off x="9619488" y="548640"/>
+            <a:ext cx="1737360" cy="274320"/>
           </a:xfrm>
           <a:prstGeom prst="rect">
             <a:avLst/>
@@ -3712,28 +4077,29 @@
           </a:bodyPr>
           <a:lstStyle/>
           <a:p>
-            <a:r>
-              <a:rPr sz="2400" b="1">
-                <a:solidFill>
-                  <a:srgbClr val="2166CF"/>
-                </a:solidFill>
-                <a:latin typeface="Calibri"/>
-              </a:rPr>
-              <a:t>Observed gaps</a:t>
-            </a:r>
-          </a:p>
-        </p:txBody>
-      </p:sp>
-      <p:sp>
-        <p:nvSpPr>
-          <p:cNvPr id="6" name="Rounded Rectangle 5"/>
+            <a:pPr algn="ctr"/>
+            <a:r>
+              <a:rPr sz="1100" b="1">
+                <a:solidFill>
+                  <a:srgbClr val="185FCB"/>
+                </a:solidFill>
+                <a:latin typeface="Calibri"/>
+              </a:rPr>
+              <a:t>CONTEXT</a:t>
+            </a:r>
+          </a:p>
+        </p:txBody>
+      </p:sp>
+      <p:sp>
+        <p:nvSpPr>
+          <p:cNvPr id="10" name="Rounded Rectangle 9"/>
           <p:cNvSpPr/>
           <p:nvPr/>
         </p:nvSpPr>
         <p:spPr>
           <a:xfrm>
-            <a:off x="731520" y="2423160"/>
-            <a:ext cx="10789920" cy="2103120"/>
+            <a:off x="822960" y="1828800"/>
+            <a:ext cx="5303520" cy="4114800"/>
           </a:xfrm>
           <a:prstGeom prst="roundRect">
             <a:avLst/>
@@ -3743,7 +4109,7 @@
           </a:solidFill>
           <a:ln>
             <a:solidFill>
-              <a:srgbClr val="C2D3E8"/>
+              <a:srgbClr val="C4D5E9"/>
             </a:solidFill>
           </a:ln>
         </p:spPr>
@@ -3766,50 +4132,262 @@
           <a:lstStyle/>
           <a:p>
             <a:pPr algn="ctr"/>
-            <a:r>
-              <a:rPr sz="1800" b="0">
-                <a:solidFill>
-                  <a:srgbClr val="14243A"/>
-                </a:solidFill>
-                <a:latin typeface="Calibri"/>
-              </a:rPr>
-              <a:t>• Fluent responses can still be operationally wrong.</a:t>
-            </a:r>
-          </a:p>
-          <a:p>
-            <a:pPr/>
-            <a:r>
-              <a:rPr sz="1800" b="0">
-                <a:solidFill>
-                  <a:srgbClr val="14243A"/>
-                </a:solidFill>
-                <a:latin typeface="Calibri"/>
-              </a:rPr>
-              <a:t>• Generic advice ignores blast radius and change context.</a:t>
-            </a:r>
-          </a:p>
-          <a:p>
-            <a:pPr/>
-            <a:r>
-              <a:rPr sz="1800" b="0">
-                <a:solidFill>
-                  <a:srgbClr val="14243A"/>
-                </a:solidFill>
-                <a:latin typeface="Calibri"/>
-              </a:rPr>
-              <a:t>• Unstructured output slows triage and handoff.</a:t>
-            </a:r>
-          </a:p>
-          <a:p>
-            <a:pPr/>
-            <a:r>
-              <a:rPr sz="1800" b="0">
-                <a:solidFill>
-                  <a:srgbClr val="14243A"/>
-                </a:solidFill>
-                <a:latin typeface="Calibri"/>
-              </a:rPr>
-              <a:t>• No safety gate means risky actions can be suggested too casually.</a:t>
+          </a:p>
+        </p:txBody>
+      </p:sp>
+      <p:sp>
+        <p:nvSpPr>
+          <p:cNvPr id="11" name="TextBox 10"/>
+          <p:cNvSpPr txBox="1"/>
+          <p:nvPr/>
+        </p:nvSpPr>
+        <p:spPr>
+          <a:xfrm>
+            <a:off x="1051560" y="1993392"/>
+            <a:ext cx="4846320" cy="457200"/>
+          </a:xfrm>
+          <a:prstGeom prst="rect">
+            <a:avLst/>
+          </a:prstGeom>
+          <a:noFill/>
+        </p:spPr>
+        <p:txBody>
+          <a:bodyPr wrap="none">
+            <a:spAutoFit/>
+          </a:bodyPr>
+          <a:lstStyle/>
+          <a:p>
+            <a:pPr algn="l"/>
+            <a:r>
+              <a:rPr sz="2000" b="1">
+                <a:solidFill>
+                  <a:srgbClr val="13233A"/>
+                </a:solidFill>
+                <a:latin typeface="Calibri"/>
+              </a:rPr>
+              <a:t>Typical incident room pain</a:t>
+            </a:r>
+          </a:p>
+        </p:txBody>
+      </p:sp>
+      <p:sp>
+        <p:nvSpPr>
+          <p:cNvPr id="12" name="TextBox 11"/>
+          <p:cNvSpPr txBox="1"/>
+          <p:nvPr/>
+        </p:nvSpPr>
+        <p:spPr>
+          <a:xfrm>
+            <a:off x="1051560" y="2487168"/>
+            <a:ext cx="4846320" cy="3291840"/>
+          </a:xfrm>
+          <a:prstGeom prst="rect">
+            <a:avLst/>
+          </a:prstGeom>
+          <a:noFill/>
+        </p:spPr>
+        <p:txBody>
+          <a:bodyPr wrap="none">
+            <a:spAutoFit/>
+          </a:bodyPr>
+          <a:lstStyle/>
+          <a:p>
+            <a:pPr algn="l"/>
+            <a:r>
+              <a:rPr sz="1500" b="0">
+                <a:solidFill>
+                  <a:srgbClr val="13233A"/>
+                </a:solidFill>
+                <a:latin typeface="Calibri"/>
+              </a:rPr>
+              <a:t>• Alert noise hides true causality.</a:t>
+            </a:r>
+          </a:p>
+          <a:p>
+            <a:pPr algn="l"/>
+            <a:r>
+              <a:rPr sz="1500" b="0">
+                <a:solidFill>
+                  <a:srgbClr val="13233A"/>
+                </a:solidFill>
+                <a:latin typeface="Calibri"/>
+              </a:rPr>
+              <a:t>• Generic advice causes risky interventions.</a:t>
+            </a:r>
+          </a:p>
+          <a:p>
+            <a:pPr algn="l"/>
+            <a:r>
+              <a:rPr sz="1500" b="0">
+                <a:solidFill>
+                  <a:srgbClr val="13233A"/>
+                </a:solidFill>
+                <a:latin typeface="Calibri"/>
+              </a:rPr>
+              <a:t>• Unstructured outputs slow coordination.</a:t>
+            </a:r>
+          </a:p>
+          <a:p>
+            <a:pPr algn="l"/>
+            <a:r>
+              <a:rPr sz="1500" b="0">
+                <a:solidFill>
+                  <a:srgbClr val="13233A"/>
+                </a:solidFill>
+                <a:latin typeface="Calibri"/>
+              </a:rPr>
+              <a:t>• Trust drops when recommendations are not auditable.</a:t>
+            </a:r>
+          </a:p>
+        </p:txBody>
+      </p:sp>
+      <p:sp>
+        <p:nvSpPr>
+          <p:cNvPr id="13" name="Rounded Rectangle 12"/>
+          <p:cNvSpPr/>
+          <p:nvPr/>
+        </p:nvSpPr>
+        <p:spPr>
+          <a:xfrm>
+            <a:off x="6400800" y="1828800"/>
+            <a:ext cx="4937760" cy="4114800"/>
+          </a:xfrm>
+          <a:prstGeom prst="roundRect">
+            <a:avLst/>
+          </a:prstGeom>
+          <a:solidFill>
+            <a:srgbClr val="E3F7F4"/>
+          </a:solidFill>
+          <a:ln>
+            <a:solidFill>
+              <a:srgbClr val="C4D5E9"/>
+            </a:solidFill>
+          </a:ln>
+        </p:spPr>
+        <p:style>
+          <a:lnRef idx="1">
+            <a:schemeClr val="accent1"/>
+          </a:lnRef>
+          <a:fillRef idx="3">
+            <a:schemeClr val="accent1"/>
+          </a:fillRef>
+          <a:effectRef idx="2">
+            <a:schemeClr val="accent1"/>
+          </a:effectRef>
+          <a:fontRef idx="minor">
+            <a:schemeClr val="lt1"/>
+          </a:fontRef>
+        </p:style>
+        <p:txBody>
+          <a:bodyPr rtlCol="0" anchor="ctr"/>
+          <a:lstStyle/>
+          <a:p>
+            <a:pPr algn="ctr"/>
+          </a:p>
+        </p:txBody>
+      </p:sp>
+      <p:sp>
+        <p:nvSpPr>
+          <p:cNvPr id="14" name="TextBox 13"/>
+          <p:cNvSpPr txBox="1"/>
+          <p:nvPr/>
+        </p:nvSpPr>
+        <p:spPr>
+          <a:xfrm>
+            <a:off x="6629400" y="1993392"/>
+            <a:ext cx="4480560" cy="457200"/>
+          </a:xfrm>
+          <a:prstGeom prst="rect">
+            <a:avLst/>
+          </a:prstGeom>
+          <a:noFill/>
+        </p:spPr>
+        <p:txBody>
+          <a:bodyPr wrap="none">
+            <a:spAutoFit/>
+          </a:bodyPr>
+          <a:lstStyle/>
+          <a:p>
+            <a:pPr algn="l"/>
+            <a:r>
+              <a:rPr sz="2000" b="1">
+                <a:solidFill>
+                  <a:srgbClr val="0A7F78"/>
+                </a:solidFill>
+                <a:latin typeface="Calibri"/>
+              </a:rPr>
+              <a:t>SRE Nidaan design response</a:t>
+            </a:r>
+          </a:p>
+        </p:txBody>
+      </p:sp>
+      <p:sp>
+        <p:nvSpPr>
+          <p:cNvPr id="15" name="TextBox 14"/>
+          <p:cNvSpPr txBox="1"/>
+          <p:nvPr/>
+        </p:nvSpPr>
+        <p:spPr>
+          <a:xfrm>
+            <a:off x="6629400" y="2487168"/>
+            <a:ext cx="4480560" cy="3291840"/>
+          </a:xfrm>
+          <a:prstGeom prst="rect">
+            <a:avLst/>
+          </a:prstGeom>
+          <a:noFill/>
+        </p:spPr>
+        <p:txBody>
+          <a:bodyPr wrap="none">
+            <a:spAutoFit/>
+          </a:bodyPr>
+          <a:lstStyle/>
+          <a:p>
+            <a:pPr algn="l"/>
+            <a:r>
+              <a:rPr sz="1500" b="0">
+                <a:solidFill>
+                  <a:srgbClr val="13233A"/>
+                </a:solidFill>
+                <a:latin typeface="Calibri"/>
+              </a:rPr>
+              <a:t>• Causal graph + structured analysis output</a:t>
+            </a:r>
+          </a:p>
+          <a:p>
+            <a:pPr algn="l"/>
+            <a:r>
+              <a:rPr sz="1500" b="0">
+                <a:solidFill>
+                  <a:srgbClr val="13233A"/>
+                </a:solidFill>
+                <a:latin typeface="Calibri"/>
+              </a:rPr>
+              <a:t>• MCP-inspired tool calls for telemetry access</a:t>
+            </a:r>
+          </a:p>
+          <a:p>
+            <a:pPr algn="l"/>
+            <a:r>
+              <a:rPr sz="1500" b="0">
+                <a:solidFill>
+                  <a:srgbClr val="13233A"/>
+                </a:solidFill>
+                <a:latin typeface="Calibri"/>
+              </a:rPr>
+              <a:t>• Human approval gate before intervention</a:t>
+            </a:r>
+          </a:p>
+          <a:p>
+            <a:pPr algn="l"/>
+            <a:r>
+              <a:rPr sz="1500" b="0">
+                <a:solidFill>
+                  <a:srgbClr val="13233A"/>
+                </a:solidFill>
+                <a:latin typeface="Calibri"/>
+              </a:rPr>
+              <a:t>• Feedback loop for continuous improvement</a:t>
             </a:r>
           </a:p>
         </p:txBody>
@@ -3847,7 +4425,7 @@
             <a:avLst/>
           </a:prstGeom>
           <a:solidFill>
-            <a:srgbClr val="F5F9FF"/>
+            <a:srgbClr val="F2F7FF"/>
           </a:solidFill>
           <a:ln>
             <a:noFill/>
@@ -3877,14 +4455,143 @@
       </p:sp>
       <p:sp>
         <p:nvSpPr>
-          <p:cNvPr id="3" name="TextBox 2"/>
+          <p:cNvPr id="3" name="Rectangle 2"/>
+          <p:cNvSpPr/>
+          <p:nvPr/>
+        </p:nvSpPr>
+        <p:spPr>
+          <a:xfrm>
+            <a:off x="0" y="0"/>
+            <a:ext cx="12191695" cy="256032"/>
+          </a:xfrm>
+          <a:prstGeom prst="rect">
+            <a:avLst/>
+          </a:prstGeom>
+          <a:solidFill>
+            <a:srgbClr val="185FCB"/>
+          </a:solidFill>
+          <a:ln>
+            <a:noFill/>
+          </a:ln>
+        </p:spPr>
+        <p:style>
+          <a:lnRef idx="1">
+            <a:schemeClr val="accent1"/>
+          </a:lnRef>
+          <a:fillRef idx="3">
+            <a:schemeClr val="accent1"/>
+          </a:fillRef>
+          <a:effectRef idx="2">
+            <a:schemeClr val="accent1"/>
+          </a:effectRef>
+          <a:fontRef idx="minor">
+            <a:schemeClr val="lt1"/>
+          </a:fontRef>
+        </p:style>
+        <p:txBody>
+          <a:bodyPr rtlCol="0" anchor="ctr"/>
+          <a:lstStyle/>
+          <a:p>
+            <a:pPr algn="ctr"/>
+          </a:p>
+        </p:txBody>
+      </p:sp>
+      <p:sp>
+        <p:nvSpPr>
+          <p:cNvPr id="4" name="Oval 3"/>
+          <p:cNvSpPr/>
+          <p:nvPr/>
+        </p:nvSpPr>
+        <p:spPr>
+          <a:xfrm>
+            <a:off x="-1097280" y="-914400"/>
+            <a:ext cx="3474720" cy="2926080"/>
+          </a:xfrm>
+          <a:prstGeom prst="ellipse">
+            <a:avLst/>
+          </a:prstGeom>
+          <a:solidFill>
+            <a:srgbClr val="E7F0FF"/>
+          </a:solidFill>
+          <a:ln>
+            <a:noFill/>
+          </a:ln>
+        </p:spPr>
+        <p:style>
+          <a:lnRef idx="1">
+            <a:schemeClr val="accent1"/>
+          </a:lnRef>
+          <a:fillRef idx="3">
+            <a:schemeClr val="accent1"/>
+          </a:fillRef>
+          <a:effectRef idx="2">
+            <a:schemeClr val="accent1"/>
+          </a:effectRef>
+          <a:fontRef idx="minor">
+            <a:schemeClr val="lt1"/>
+          </a:fontRef>
+        </p:style>
+        <p:txBody>
+          <a:bodyPr rtlCol="0" anchor="ctr"/>
+          <a:lstStyle/>
+          <a:p>
+            <a:pPr algn="ctr"/>
+          </a:p>
+        </p:txBody>
+      </p:sp>
+      <p:sp>
+        <p:nvSpPr>
+          <p:cNvPr id="5" name="Oval 4"/>
+          <p:cNvSpPr/>
+          <p:nvPr/>
+        </p:nvSpPr>
+        <p:spPr>
+          <a:xfrm>
+            <a:off x="9875520" y="-731520"/>
+            <a:ext cx="2926080" cy="2560320"/>
+          </a:xfrm>
+          <a:prstGeom prst="ellipse">
+            <a:avLst/>
+          </a:prstGeom>
+          <a:solidFill>
+            <a:srgbClr val="E3F7F4"/>
+          </a:solidFill>
+          <a:ln>
+            <a:noFill/>
+          </a:ln>
+        </p:spPr>
+        <p:style>
+          <a:lnRef idx="1">
+            <a:schemeClr val="accent1"/>
+          </a:lnRef>
+          <a:fillRef idx="3">
+            <a:schemeClr val="accent1"/>
+          </a:fillRef>
+          <a:effectRef idx="2">
+            <a:schemeClr val="accent1"/>
+          </a:effectRef>
+          <a:fontRef idx="minor">
+            <a:schemeClr val="lt1"/>
+          </a:fontRef>
+        </p:style>
+        <p:txBody>
+          <a:bodyPr rtlCol="0" anchor="ctr"/>
+          <a:lstStyle/>
+          <a:p>
+            <a:pPr algn="ctr"/>
+          </a:p>
+        </p:txBody>
+      </p:sp>
+      <p:sp>
+        <p:nvSpPr>
+          <p:cNvPr id="6" name="TextBox 5"/>
           <p:cNvSpPr txBox="1"/>
           <p:nvPr/>
         </p:nvSpPr>
         <p:spPr>
           <a:xfrm>
-            <a:off x="640080" y="457200"/>
-            <a:ext cx="10881360" cy="1371600"/>
+            <a:off x="658368" y="420624"/>
+            <a:ext cx="8138160" cy="658368"/>
           </a:xfrm>
           <a:prstGeom prst="rect">
             <a:avLst/>
@@ -3897,28 +4604,29 @@
           </a:bodyPr>
           <a:lstStyle/>
           <a:p>
-            <a:r>
-              <a:rPr sz="3600" b="1">
-                <a:solidFill>
-                  <a:srgbClr val="14243A"/>
-                </a:solidFill>
-                <a:latin typeface="Calibri"/>
-              </a:rPr>
-              <a:t>Approach</a:t>
-            </a:r>
-          </a:p>
-        </p:txBody>
-      </p:sp>
-      <p:sp>
-        <p:nvSpPr>
-          <p:cNvPr id="4" name="TextBox 3"/>
+            <a:pPr algn="l"/>
+            <a:r>
+              <a:rPr sz="3500" b="1">
+                <a:solidFill>
+                  <a:srgbClr val="13233A"/>
+                </a:solidFill>
+                <a:latin typeface="Calibri"/>
+              </a:rPr>
+              <a:t>Architecture Overview</a:t>
+            </a:r>
+          </a:p>
+        </p:txBody>
+      </p:sp>
+      <p:sp>
+        <p:nvSpPr>
+          <p:cNvPr id="7" name="TextBox 6"/>
           <p:cNvSpPr txBox="1"/>
           <p:nvPr/>
         </p:nvSpPr>
         <p:spPr>
           <a:xfrm>
-            <a:off x="685800" y="1417320"/>
-            <a:ext cx="10789920" cy="1097280"/>
+            <a:off x="685800" y="1115568"/>
+            <a:ext cx="9692640" cy="457200"/>
           </a:xfrm>
           <a:prstGeom prst="rect">
             <a:avLst/>
@@ -3931,28 +4639,74 @@
           </a:bodyPr>
           <a:lstStyle/>
           <a:p>
-            <a:r>
-              <a:rPr sz="1800" b="0">
-                <a:solidFill>
-                  <a:srgbClr val="4D607A"/>
-                </a:solidFill>
-                <a:latin typeface="Calibri"/>
-              </a:rPr>
-              <a:t>Practical copilot, not autopilot</a:t>
-            </a:r>
-          </a:p>
-        </p:txBody>
-      </p:sp>
-      <p:sp>
-        <p:nvSpPr>
-          <p:cNvPr id="5" name="TextBox 4"/>
+            <a:pPr algn="l"/>
+            <a:r>
+              <a:rPr sz="1700" b="0">
+                <a:solidFill>
+                  <a:srgbClr val="4E6380"/>
+                </a:solidFill>
+                <a:latin typeface="Calibri"/>
+              </a:rPr>
+              <a:t>Face → Body → Brain with explicit safety boundaries</a:t>
+            </a:r>
+          </a:p>
+        </p:txBody>
+      </p:sp>
+      <p:sp>
+        <p:nvSpPr>
+          <p:cNvPr id="8" name="Rounded Rectangle 7"/>
+          <p:cNvSpPr/>
+          <p:nvPr/>
+        </p:nvSpPr>
+        <p:spPr>
+          <a:xfrm>
+            <a:off x="9464040" y="484632"/>
+            <a:ext cx="2011680" cy="438912"/>
+          </a:xfrm>
+          <a:prstGeom prst="roundRect">
+            <a:avLst/>
+          </a:prstGeom>
+          <a:solidFill>
+            <a:srgbClr val="E7F0FF"/>
+          </a:solidFill>
+          <a:ln>
+            <a:solidFill>
+              <a:srgbClr val="C4D5E9"/>
+            </a:solidFill>
+          </a:ln>
+        </p:spPr>
+        <p:style>
+          <a:lnRef idx="1">
+            <a:schemeClr val="accent1"/>
+          </a:lnRef>
+          <a:fillRef idx="3">
+            <a:schemeClr val="accent1"/>
+          </a:fillRef>
+          <a:effectRef idx="2">
+            <a:schemeClr val="accent1"/>
+          </a:effectRef>
+          <a:fontRef idx="minor">
+            <a:schemeClr val="lt1"/>
+          </a:fontRef>
+        </p:style>
+        <p:txBody>
+          <a:bodyPr rtlCol="0" anchor="ctr"/>
+          <a:lstStyle/>
+          <a:p>
+            <a:pPr algn="ctr"/>
+          </a:p>
+        </p:txBody>
+      </p:sp>
+      <p:sp>
+        <p:nvSpPr>
+          <p:cNvPr id="9" name="TextBox 8"/>
           <p:cNvSpPr txBox="1"/>
           <p:nvPr/>
         </p:nvSpPr>
         <p:spPr>
           <a:xfrm>
-            <a:off x="822960" y="1920240"/>
-            <a:ext cx="10698480" cy="548640"/>
+            <a:off x="9619488" y="548640"/>
+            <a:ext cx="1737360" cy="274320"/>
           </a:xfrm>
           <a:prstGeom prst="rect">
             <a:avLst/>
@@ -3965,28 +4719,29 @@
           </a:bodyPr>
           <a:lstStyle/>
           <a:p>
-            <a:r>
-              <a:rPr sz="2400" b="1">
-                <a:solidFill>
-                  <a:srgbClr val="2166CF"/>
-                </a:solidFill>
-                <a:latin typeface="Calibri"/>
-              </a:rPr>
-              <a:t>Design principles</a:t>
-            </a:r>
-          </a:p>
-        </p:txBody>
-      </p:sp>
-      <p:sp>
-        <p:nvSpPr>
-          <p:cNvPr id="6" name="Rounded Rectangle 5"/>
+            <a:pPr algn="ctr"/>
+            <a:r>
+              <a:rPr sz="1100" b="1">
+                <a:solidFill>
+                  <a:srgbClr val="185FCB"/>
+                </a:solidFill>
+                <a:latin typeface="Calibri"/>
+              </a:rPr>
+              <a:t>SYSTEM</a:t>
+            </a:r>
+          </a:p>
+        </p:txBody>
+      </p:sp>
+      <p:sp>
+        <p:nvSpPr>
+          <p:cNvPr id="10" name="Rounded Rectangle 9"/>
           <p:cNvSpPr/>
           <p:nvPr/>
         </p:nvSpPr>
         <p:spPr>
           <a:xfrm>
-            <a:off x="731520" y="2423160"/>
-            <a:ext cx="10789920" cy="2103120"/>
+            <a:off x="822960" y="2011680"/>
+            <a:ext cx="3383280" cy="2103120"/>
           </a:xfrm>
           <a:prstGeom prst="roundRect">
             <a:avLst/>
@@ -3996,7 +4751,7 @@
           </a:solidFill>
           <a:ln>
             <a:solidFill>
-              <a:srgbClr val="C2D3E8"/>
+              <a:srgbClr val="C4D5E9"/>
             </a:solidFill>
           </a:ln>
         </p:spPr>
@@ -4019,50 +4774,578 @@
           <a:lstStyle/>
           <a:p>
             <a:pPr algn="ctr"/>
-            <a:r>
-              <a:rPr sz="1800" b="0">
-                <a:solidFill>
-                  <a:srgbClr val="14243A"/>
-                </a:solidFill>
-                <a:latin typeface="Calibri"/>
-              </a:rPr>
-              <a:t>• Grounded reasoning from telemetry + incident context.</a:t>
-            </a:r>
-          </a:p>
-          <a:p>
-            <a:pPr/>
-            <a:r>
-              <a:rPr sz="1800" b="0">
-                <a:solidFill>
-                  <a:srgbClr val="14243A"/>
-                </a:solidFill>
-                <a:latin typeface="Calibri"/>
-              </a:rPr>
-              <a:t>• Structured outputs for predictable operator consumption.</a:t>
-            </a:r>
-          </a:p>
-          <a:p>
-            <a:pPr/>
-            <a:r>
-              <a:rPr sz="1800" b="0">
-                <a:solidFill>
-                  <a:srgbClr val="14243A"/>
-                </a:solidFill>
-                <a:latin typeface="Calibri"/>
-              </a:rPr>
-              <a:t>• Human approval gate for intervention authorization.</a:t>
-            </a:r>
-          </a:p>
-          <a:p>
-            <a:pPr/>
-            <a:r>
-              <a:rPr sz="1800" b="0">
-                <a:solidFill>
-                  <a:srgbClr val="14243A"/>
-                </a:solidFill>
-                <a:latin typeface="Calibri"/>
-              </a:rPr>
-              <a:t>• Operator feedback loop for continuous model improvement.</a:t>
+          </a:p>
+        </p:txBody>
+      </p:sp>
+      <p:sp>
+        <p:nvSpPr>
+          <p:cNvPr id="11" name="TextBox 10"/>
+          <p:cNvSpPr txBox="1"/>
+          <p:nvPr/>
+        </p:nvSpPr>
+        <p:spPr>
+          <a:xfrm>
+            <a:off x="1051560" y="2176272"/>
+            <a:ext cx="2926080" cy="457200"/>
+          </a:xfrm>
+          <a:prstGeom prst="rect">
+            <a:avLst/>
+          </a:prstGeom>
+          <a:noFill/>
+        </p:spPr>
+        <p:txBody>
+          <a:bodyPr wrap="none">
+            <a:spAutoFit/>
+          </a:bodyPr>
+          <a:lstStyle/>
+          <a:p>
+            <a:pPr algn="l"/>
+            <a:r>
+              <a:rPr sz="2000" b="1">
+                <a:solidFill>
+                  <a:srgbClr val="13233A"/>
+                </a:solidFill>
+                <a:latin typeface="Calibri"/>
+              </a:rPr>
+              <a:t>Face</a:t>
+            </a:r>
+          </a:p>
+        </p:txBody>
+      </p:sp>
+      <p:sp>
+        <p:nvSpPr>
+          <p:cNvPr id="12" name="TextBox 11"/>
+          <p:cNvSpPr txBox="1"/>
+          <p:nvPr/>
+        </p:nvSpPr>
+        <p:spPr>
+          <a:xfrm>
+            <a:off x="1051560" y="2670048"/>
+            <a:ext cx="2926080" cy="1280160"/>
+          </a:xfrm>
+          <a:prstGeom prst="rect">
+            <a:avLst/>
+          </a:prstGeom>
+          <a:noFill/>
+        </p:spPr>
+        <p:txBody>
+          <a:bodyPr wrap="none">
+            <a:spAutoFit/>
+          </a:bodyPr>
+          <a:lstStyle/>
+          <a:p>
+            <a:pPr algn="l"/>
+            <a:r>
+              <a:rPr sz="1500" b="0">
+                <a:solidFill>
+                  <a:srgbClr val="13233A"/>
+                </a:solidFill>
+                <a:latin typeface="Calibri"/>
+              </a:rPr>
+              <a:t>Next.js command surface</a:t>
+            </a:r>
+          </a:p>
+          <a:p>
+            <a:pPr algn="l"/>
+            <a:r>
+              <a:rPr sz="1500" b="0">
+                <a:solidFill>
+                  <a:srgbClr val="13233A"/>
+                </a:solidFill>
+                <a:latin typeface="Calibri"/>
+              </a:rPr>
+              <a:t>Incident input + graph review</a:t>
+            </a:r>
+          </a:p>
+          <a:p>
+            <a:pPr algn="l"/>
+            <a:r>
+              <a:rPr sz="1500" b="0">
+                <a:solidFill>
+                  <a:srgbClr val="13233A"/>
+                </a:solidFill>
+                <a:latin typeface="Calibri"/>
+              </a:rPr>
+              <a:t>Operator actions</a:t>
+            </a:r>
+          </a:p>
+        </p:txBody>
+      </p:sp>
+      <p:sp>
+        <p:nvSpPr>
+          <p:cNvPr id="13" name="Rounded Rectangle 12"/>
+          <p:cNvSpPr/>
+          <p:nvPr/>
+        </p:nvSpPr>
+        <p:spPr>
+          <a:xfrm>
+            <a:off x="4526280" y="2011680"/>
+            <a:ext cx="3474720" cy="2103120"/>
+          </a:xfrm>
+          <a:prstGeom prst="roundRect">
+            <a:avLst/>
+          </a:prstGeom>
+          <a:solidFill>
+            <a:srgbClr val="E7F0FF"/>
+          </a:solidFill>
+          <a:ln>
+            <a:solidFill>
+              <a:srgbClr val="C4D5E9"/>
+            </a:solidFill>
+          </a:ln>
+        </p:spPr>
+        <p:style>
+          <a:lnRef idx="1">
+            <a:schemeClr val="accent1"/>
+          </a:lnRef>
+          <a:fillRef idx="3">
+            <a:schemeClr val="accent1"/>
+          </a:fillRef>
+          <a:effectRef idx="2">
+            <a:schemeClr val="accent1"/>
+          </a:effectRef>
+          <a:fontRef idx="minor">
+            <a:schemeClr val="lt1"/>
+          </a:fontRef>
+        </p:style>
+        <p:txBody>
+          <a:bodyPr rtlCol="0" anchor="ctr"/>
+          <a:lstStyle/>
+          <a:p>
+            <a:pPr algn="ctr"/>
+          </a:p>
+        </p:txBody>
+      </p:sp>
+      <p:sp>
+        <p:nvSpPr>
+          <p:cNvPr id="14" name="TextBox 13"/>
+          <p:cNvSpPr txBox="1"/>
+          <p:nvPr/>
+        </p:nvSpPr>
+        <p:spPr>
+          <a:xfrm>
+            <a:off x="4754880" y="2176272"/>
+            <a:ext cx="3017520" cy="457200"/>
+          </a:xfrm>
+          <a:prstGeom prst="rect">
+            <a:avLst/>
+          </a:prstGeom>
+          <a:noFill/>
+        </p:spPr>
+        <p:txBody>
+          <a:bodyPr wrap="none">
+            <a:spAutoFit/>
+          </a:bodyPr>
+          <a:lstStyle/>
+          <a:p>
+            <a:pPr algn="l"/>
+            <a:r>
+              <a:rPr sz="2000" b="1">
+                <a:solidFill>
+                  <a:srgbClr val="185FCB"/>
+                </a:solidFill>
+                <a:latin typeface="Calibri"/>
+              </a:rPr>
+              <a:t>Body</a:t>
+            </a:r>
+          </a:p>
+        </p:txBody>
+      </p:sp>
+      <p:sp>
+        <p:nvSpPr>
+          <p:cNvPr id="15" name="TextBox 14"/>
+          <p:cNvSpPr txBox="1"/>
+          <p:nvPr/>
+        </p:nvSpPr>
+        <p:spPr>
+          <a:xfrm>
+            <a:off x="4754880" y="2670048"/>
+            <a:ext cx="3017520" cy="1280160"/>
+          </a:xfrm>
+          <a:prstGeom prst="rect">
+            <a:avLst/>
+          </a:prstGeom>
+          <a:noFill/>
+        </p:spPr>
+        <p:txBody>
+          <a:bodyPr wrap="none">
+            <a:spAutoFit/>
+          </a:bodyPr>
+          <a:lstStyle/>
+          <a:p>
+            <a:pPr algn="l"/>
+            <a:r>
+              <a:rPr sz="1500" b="0">
+                <a:solidFill>
+                  <a:srgbClr val="13233A"/>
+                </a:solidFill>
+                <a:latin typeface="Calibri"/>
+              </a:rPr>
+              <a:t>FastAPI orchestration</a:t>
+            </a:r>
+          </a:p>
+          <a:p>
+            <a:pPr algn="l"/>
+            <a:r>
+              <a:rPr sz="1500" b="0">
+                <a:solidFill>
+                  <a:srgbClr val="13233A"/>
+                </a:solidFill>
+                <a:latin typeface="Calibri"/>
+              </a:rPr>
+              <a:t>MCP-inspired tool routing</a:t>
+            </a:r>
+          </a:p>
+          <a:p>
+            <a:pPr algn="l"/>
+            <a:r>
+              <a:rPr sz="1500" b="0">
+                <a:solidFill>
+                  <a:srgbClr val="13233A"/>
+                </a:solidFill>
+                <a:latin typeface="Calibri"/>
+              </a:rPr>
+              <a:t>Policy + safety gate</a:t>
+            </a:r>
+          </a:p>
+        </p:txBody>
+      </p:sp>
+      <p:sp>
+        <p:nvSpPr>
+          <p:cNvPr id="16" name="Rounded Rectangle 15"/>
+          <p:cNvSpPr/>
+          <p:nvPr/>
+        </p:nvSpPr>
+        <p:spPr>
+          <a:xfrm>
+            <a:off x="8321040" y="2011680"/>
+            <a:ext cx="3108960" cy="2103120"/>
+          </a:xfrm>
+          <a:prstGeom prst="roundRect">
+            <a:avLst/>
+          </a:prstGeom>
+          <a:solidFill>
+            <a:srgbClr val="FFFFFF"/>
+          </a:solidFill>
+          <a:ln>
+            <a:solidFill>
+              <a:srgbClr val="C4D5E9"/>
+            </a:solidFill>
+          </a:ln>
+        </p:spPr>
+        <p:style>
+          <a:lnRef idx="1">
+            <a:schemeClr val="accent1"/>
+          </a:lnRef>
+          <a:fillRef idx="3">
+            <a:schemeClr val="accent1"/>
+          </a:fillRef>
+          <a:effectRef idx="2">
+            <a:schemeClr val="accent1"/>
+          </a:effectRef>
+          <a:fontRef idx="minor">
+            <a:schemeClr val="lt1"/>
+          </a:fontRef>
+        </p:style>
+        <p:txBody>
+          <a:bodyPr rtlCol="0" anchor="ctr"/>
+          <a:lstStyle/>
+          <a:p>
+            <a:pPr algn="ctr"/>
+          </a:p>
+        </p:txBody>
+      </p:sp>
+      <p:sp>
+        <p:nvSpPr>
+          <p:cNvPr id="17" name="TextBox 16"/>
+          <p:cNvSpPr txBox="1"/>
+          <p:nvPr/>
+        </p:nvSpPr>
+        <p:spPr>
+          <a:xfrm>
+            <a:off x="8549640" y="2176272"/>
+            <a:ext cx="2651760" cy="457200"/>
+          </a:xfrm>
+          <a:prstGeom prst="rect">
+            <a:avLst/>
+          </a:prstGeom>
+          <a:noFill/>
+        </p:spPr>
+        <p:txBody>
+          <a:bodyPr wrap="none">
+            <a:spAutoFit/>
+          </a:bodyPr>
+          <a:lstStyle/>
+          <a:p>
+            <a:pPr algn="l"/>
+            <a:r>
+              <a:rPr sz="2000" b="1">
+                <a:solidFill>
+                  <a:srgbClr val="13233A"/>
+                </a:solidFill>
+                <a:latin typeface="Calibri"/>
+              </a:rPr>
+              <a:t>Brain</a:t>
+            </a:r>
+          </a:p>
+        </p:txBody>
+      </p:sp>
+      <p:sp>
+        <p:nvSpPr>
+          <p:cNvPr id="18" name="TextBox 17"/>
+          <p:cNvSpPr txBox="1"/>
+          <p:nvPr/>
+        </p:nvSpPr>
+        <p:spPr>
+          <a:xfrm>
+            <a:off x="8549640" y="2670048"/>
+            <a:ext cx="2651760" cy="1280160"/>
+          </a:xfrm>
+          <a:prstGeom prst="rect">
+            <a:avLst/>
+          </a:prstGeom>
+          <a:noFill/>
+        </p:spPr>
+        <p:txBody>
+          <a:bodyPr wrap="none">
+            <a:spAutoFit/>
+          </a:bodyPr>
+          <a:lstStyle/>
+          <a:p>
+            <a:pPr algn="l"/>
+            <a:r>
+              <a:rPr sz="1500" b="0">
+                <a:solidFill>
+                  <a:srgbClr val="13233A"/>
+                </a:solidFill>
+                <a:latin typeface="Calibri"/>
+              </a:rPr>
+              <a:t>vLLM inference service</a:t>
+            </a:r>
+          </a:p>
+          <a:p>
+            <a:pPr algn="l"/>
+            <a:r>
+              <a:rPr sz="1500" b="0">
+                <a:solidFill>
+                  <a:srgbClr val="13233A"/>
+                </a:solidFill>
+                <a:latin typeface="Calibri"/>
+              </a:rPr>
+              <a:t>LLM reasoning backend</a:t>
+            </a:r>
+          </a:p>
+          <a:p>
+            <a:pPr algn="l"/>
+            <a:r>
+              <a:rPr sz="1500" b="0">
+                <a:solidFill>
+                  <a:srgbClr val="13233A"/>
+                </a:solidFill>
+                <a:latin typeface="Calibri"/>
+              </a:rPr>
+              <a:t>Low-latency serving</a:t>
+            </a:r>
+          </a:p>
+        </p:txBody>
+      </p:sp>
+      <p:sp>
+        <p:nvSpPr>
+          <p:cNvPr id="19" name="Right Arrow 18"/>
+          <p:cNvSpPr/>
+          <p:nvPr/>
+        </p:nvSpPr>
+        <p:spPr>
+          <a:xfrm>
+            <a:off x="4206240" y="2743200"/>
+            <a:ext cx="411480" cy="310896"/>
+          </a:xfrm>
+          <a:prstGeom prst="rightArrow">
+            <a:avLst/>
+          </a:prstGeom>
+          <a:solidFill>
+            <a:srgbClr val="185FCB"/>
+          </a:solidFill>
+          <a:ln>
+            <a:noFill/>
+          </a:ln>
+        </p:spPr>
+        <p:style>
+          <a:lnRef idx="1">
+            <a:schemeClr val="accent1"/>
+          </a:lnRef>
+          <a:fillRef idx="3">
+            <a:schemeClr val="accent1"/>
+          </a:fillRef>
+          <a:effectRef idx="2">
+            <a:schemeClr val="accent1"/>
+          </a:effectRef>
+          <a:fontRef idx="minor">
+            <a:schemeClr val="lt1"/>
+          </a:fontRef>
+        </p:style>
+        <p:txBody>
+          <a:bodyPr rtlCol="0" anchor="ctr"/>
+          <a:lstStyle/>
+          <a:p>
+            <a:pPr algn="ctr"/>
+          </a:p>
+        </p:txBody>
+      </p:sp>
+      <p:sp>
+        <p:nvSpPr>
+          <p:cNvPr id="20" name="Right Arrow 19"/>
+          <p:cNvSpPr/>
+          <p:nvPr/>
+        </p:nvSpPr>
+        <p:spPr>
+          <a:xfrm>
+            <a:off x="8001000" y="2743200"/>
+            <a:ext cx="411480" cy="310896"/>
+          </a:xfrm>
+          <a:prstGeom prst="rightArrow">
+            <a:avLst/>
+          </a:prstGeom>
+          <a:solidFill>
+            <a:srgbClr val="185FCB"/>
+          </a:solidFill>
+          <a:ln>
+            <a:noFill/>
+          </a:ln>
+        </p:spPr>
+        <p:style>
+          <a:lnRef idx="1">
+            <a:schemeClr val="accent1"/>
+          </a:lnRef>
+          <a:fillRef idx="3">
+            <a:schemeClr val="accent1"/>
+          </a:fillRef>
+          <a:effectRef idx="2">
+            <a:schemeClr val="accent1"/>
+          </a:effectRef>
+          <a:fontRef idx="minor">
+            <a:schemeClr val="lt1"/>
+          </a:fontRef>
+        </p:style>
+        <p:txBody>
+          <a:bodyPr rtlCol="0" anchor="ctr"/>
+          <a:lstStyle/>
+          <a:p>
+            <a:pPr algn="ctr"/>
+          </a:p>
+        </p:txBody>
+      </p:sp>
+      <p:sp>
+        <p:nvSpPr>
+          <p:cNvPr id="21" name="Rounded Rectangle 20"/>
+          <p:cNvSpPr/>
+          <p:nvPr/>
+        </p:nvSpPr>
+        <p:spPr>
+          <a:xfrm>
+            <a:off x="822960" y="4617720"/>
+            <a:ext cx="10607040" cy="1371600"/>
+          </a:xfrm>
+          <a:prstGeom prst="roundRect">
+            <a:avLst/>
+          </a:prstGeom>
+          <a:solidFill>
+            <a:srgbClr val="E3F7F4"/>
+          </a:solidFill>
+          <a:ln>
+            <a:solidFill>
+              <a:srgbClr val="C4D5E9"/>
+            </a:solidFill>
+          </a:ln>
+        </p:spPr>
+        <p:style>
+          <a:lnRef idx="1">
+            <a:schemeClr val="accent1"/>
+          </a:lnRef>
+          <a:fillRef idx="3">
+            <a:schemeClr val="accent1"/>
+          </a:fillRef>
+          <a:effectRef idx="2">
+            <a:schemeClr val="accent1"/>
+          </a:effectRef>
+          <a:fontRef idx="minor">
+            <a:schemeClr val="lt1"/>
+          </a:fontRef>
+        </p:style>
+        <p:txBody>
+          <a:bodyPr rtlCol="0" anchor="ctr"/>
+          <a:lstStyle/>
+          <a:p>
+            <a:pPr algn="ctr"/>
+          </a:p>
+        </p:txBody>
+      </p:sp>
+      <p:sp>
+        <p:nvSpPr>
+          <p:cNvPr id="22" name="TextBox 21"/>
+          <p:cNvSpPr txBox="1"/>
+          <p:nvPr/>
+        </p:nvSpPr>
+        <p:spPr>
+          <a:xfrm>
+            <a:off x="1051560" y="4782312"/>
+            <a:ext cx="10149840" cy="457200"/>
+          </a:xfrm>
+          <a:prstGeom prst="rect">
+            <a:avLst/>
+          </a:prstGeom>
+          <a:noFill/>
+        </p:spPr>
+        <p:txBody>
+          <a:bodyPr wrap="none">
+            <a:spAutoFit/>
+          </a:bodyPr>
+          <a:lstStyle/>
+          <a:p>
+            <a:pPr algn="l"/>
+            <a:r>
+              <a:rPr sz="2000" b="1">
+                <a:solidFill>
+                  <a:srgbClr val="0A7F78"/>
+                </a:solidFill>
+                <a:latin typeface="Calibri"/>
+              </a:rPr>
+              <a:t>Control plane principle</a:t>
+            </a:r>
+          </a:p>
+        </p:txBody>
+      </p:sp>
+      <p:sp>
+        <p:nvSpPr>
+          <p:cNvPr id="23" name="TextBox 22"/>
+          <p:cNvSpPr txBox="1"/>
+          <p:nvPr/>
+        </p:nvSpPr>
+        <p:spPr>
+          <a:xfrm>
+            <a:off x="1051560" y="5276088"/>
+            <a:ext cx="10149840" cy="548640"/>
+          </a:xfrm>
+          <a:prstGeom prst="rect">
+            <a:avLst/>
+          </a:prstGeom>
+          <a:noFill/>
+        </p:spPr>
+        <p:txBody>
+          <a:bodyPr wrap="none">
+            <a:spAutoFit/>
+          </a:bodyPr>
+          <a:lstStyle/>
+          <a:p>
+            <a:pPr algn="l"/>
+            <a:r>
+              <a:rPr sz="1500" b="0">
+                <a:solidFill>
+                  <a:srgbClr val="4E6380"/>
+                </a:solidFill>
+                <a:latin typeface="Calibri"/>
+              </a:rPr>
+              <a:t>Reasoning can query structured telemetry tools, but intervention execution remains human-authorized.</a:t>
             </a:r>
           </a:p>
         </p:txBody>
@@ -4100,7 +5383,7 @@
             <a:avLst/>
           </a:prstGeom>
           <a:solidFill>
-            <a:srgbClr val="F5F9FF"/>
+            <a:srgbClr val="F2F7FF"/>
           </a:solidFill>
           <a:ln>
             <a:noFill/>
@@ -4130,14 +5413,143 @@
       </p:sp>
       <p:sp>
         <p:nvSpPr>
-          <p:cNvPr id="3" name="TextBox 2"/>
+          <p:cNvPr id="3" name="Rectangle 2"/>
+          <p:cNvSpPr/>
+          <p:nvPr/>
+        </p:nvSpPr>
+        <p:spPr>
+          <a:xfrm>
+            <a:off x="0" y="0"/>
+            <a:ext cx="12191695" cy="256032"/>
+          </a:xfrm>
+          <a:prstGeom prst="rect">
+            <a:avLst/>
+          </a:prstGeom>
+          <a:solidFill>
+            <a:srgbClr val="185FCB"/>
+          </a:solidFill>
+          <a:ln>
+            <a:noFill/>
+          </a:ln>
+        </p:spPr>
+        <p:style>
+          <a:lnRef idx="1">
+            <a:schemeClr val="accent1"/>
+          </a:lnRef>
+          <a:fillRef idx="3">
+            <a:schemeClr val="accent1"/>
+          </a:fillRef>
+          <a:effectRef idx="2">
+            <a:schemeClr val="accent1"/>
+          </a:effectRef>
+          <a:fontRef idx="minor">
+            <a:schemeClr val="lt1"/>
+          </a:fontRef>
+        </p:style>
+        <p:txBody>
+          <a:bodyPr rtlCol="0" anchor="ctr"/>
+          <a:lstStyle/>
+          <a:p>
+            <a:pPr algn="ctr"/>
+          </a:p>
+        </p:txBody>
+      </p:sp>
+      <p:sp>
+        <p:nvSpPr>
+          <p:cNvPr id="4" name="Oval 3"/>
+          <p:cNvSpPr/>
+          <p:nvPr/>
+        </p:nvSpPr>
+        <p:spPr>
+          <a:xfrm>
+            <a:off x="-1097280" y="-914400"/>
+            <a:ext cx="3474720" cy="2926080"/>
+          </a:xfrm>
+          <a:prstGeom prst="ellipse">
+            <a:avLst/>
+          </a:prstGeom>
+          <a:solidFill>
+            <a:srgbClr val="E7F0FF"/>
+          </a:solidFill>
+          <a:ln>
+            <a:noFill/>
+          </a:ln>
+        </p:spPr>
+        <p:style>
+          <a:lnRef idx="1">
+            <a:schemeClr val="accent1"/>
+          </a:lnRef>
+          <a:fillRef idx="3">
+            <a:schemeClr val="accent1"/>
+          </a:fillRef>
+          <a:effectRef idx="2">
+            <a:schemeClr val="accent1"/>
+          </a:effectRef>
+          <a:fontRef idx="minor">
+            <a:schemeClr val="lt1"/>
+          </a:fontRef>
+        </p:style>
+        <p:txBody>
+          <a:bodyPr rtlCol="0" anchor="ctr"/>
+          <a:lstStyle/>
+          <a:p>
+            <a:pPr algn="ctr"/>
+          </a:p>
+        </p:txBody>
+      </p:sp>
+      <p:sp>
+        <p:nvSpPr>
+          <p:cNvPr id="5" name="Oval 4"/>
+          <p:cNvSpPr/>
+          <p:nvPr/>
+        </p:nvSpPr>
+        <p:spPr>
+          <a:xfrm>
+            <a:off x="9875520" y="-731520"/>
+            <a:ext cx="2926080" cy="2560320"/>
+          </a:xfrm>
+          <a:prstGeom prst="ellipse">
+            <a:avLst/>
+          </a:prstGeom>
+          <a:solidFill>
+            <a:srgbClr val="E3F7F4"/>
+          </a:solidFill>
+          <a:ln>
+            <a:noFill/>
+          </a:ln>
+        </p:spPr>
+        <p:style>
+          <a:lnRef idx="1">
+            <a:schemeClr val="accent1"/>
+          </a:lnRef>
+          <a:fillRef idx="3">
+            <a:schemeClr val="accent1"/>
+          </a:fillRef>
+          <a:effectRef idx="2">
+            <a:schemeClr val="accent1"/>
+          </a:effectRef>
+          <a:fontRef idx="minor">
+            <a:schemeClr val="lt1"/>
+          </a:fontRef>
+        </p:style>
+        <p:txBody>
+          <a:bodyPr rtlCol="0" anchor="ctr"/>
+          <a:lstStyle/>
+          <a:p>
+            <a:pPr algn="ctr"/>
+          </a:p>
+        </p:txBody>
+      </p:sp>
+      <p:sp>
+        <p:nvSpPr>
+          <p:cNvPr id="6" name="TextBox 5"/>
           <p:cNvSpPr txBox="1"/>
           <p:nvPr/>
         </p:nvSpPr>
         <p:spPr>
           <a:xfrm>
-            <a:off x="640080" y="457200"/>
-            <a:ext cx="10881360" cy="1371600"/>
+            <a:off x="658368" y="420624"/>
+            <a:ext cx="8138160" cy="658368"/>
           </a:xfrm>
           <a:prstGeom prst="rect">
             <a:avLst/>
@@ -4150,28 +5562,29 @@
           </a:bodyPr>
           <a:lstStyle/>
           <a:p>
-            <a:r>
-              <a:rPr sz="3600" b="1">
-                <a:solidFill>
-                  <a:srgbClr val="14243A"/>
-                </a:solidFill>
-                <a:latin typeface="Calibri"/>
-              </a:rPr>
-              <a:t>Architecture</a:t>
-            </a:r>
-          </a:p>
-        </p:txBody>
-      </p:sp>
-      <p:sp>
-        <p:nvSpPr>
-          <p:cNvPr id="4" name="TextBox 3"/>
+            <a:pPr algn="l"/>
+            <a:r>
+              <a:rPr sz="3500" b="1">
+                <a:solidFill>
+                  <a:srgbClr val="13233A"/>
+                </a:solidFill>
+                <a:latin typeface="Calibri"/>
+              </a:rPr>
+              <a:t>Model Alignment Pipeline</a:t>
+            </a:r>
+          </a:p>
+        </p:txBody>
+      </p:sp>
+      <p:sp>
+        <p:nvSpPr>
+          <p:cNvPr id="7" name="TextBox 6"/>
           <p:cNvSpPr txBox="1"/>
           <p:nvPr/>
         </p:nvSpPr>
         <p:spPr>
           <a:xfrm>
-            <a:off x="685800" y="1417320"/>
-            <a:ext cx="10789920" cy="1097280"/>
+            <a:off x="685800" y="1115568"/>
+            <a:ext cx="9692640" cy="457200"/>
           </a:xfrm>
           <a:prstGeom prst="rect">
             <a:avLst/>
@@ -4184,28 +5597,109 @@
           </a:bodyPr>
           <a:lstStyle/>
           <a:p>
-            <a:r>
-              <a:rPr sz="1800" b="0">
-                <a:solidFill>
-                  <a:srgbClr val="4D607A"/>
-                </a:solidFill>
-                <a:latin typeface="Calibri"/>
-              </a:rPr>
-              <a:t>Face → Body → Brain, with a safety-first control plane</a:t>
-            </a:r>
-          </a:p>
-        </p:txBody>
-      </p:sp>
-      <p:sp>
-        <p:nvSpPr>
-          <p:cNvPr id="5" name="Rounded Rectangle 4"/>
+            <a:pPr algn="l"/>
+            <a:r>
+              <a:rPr sz="1700" b="0">
+                <a:solidFill>
+                  <a:srgbClr val="4E6380"/>
+                </a:solidFill>
+                <a:latin typeface="Calibri"/>
+              </a:rPr>
+              <a:t>From domain adaptation to policy refinement</a:t>
+            </a:r>
+          </a:p>
+        </p:txBody>
+      </p:sp>
+      <p:sp>
+        <p:nvSpPr>
+          <p:cNvPr id="8" name="Rounded Rectangle 7"/>
           <p:cNvSpPr/>
           <p:nvPr/>
         </p:nvSpPr>
         <p:spPr>
           <a:xfrm>
-            <a:off x="822960" y="1920240"/>
-            <a:ext cx="3017520" cy="1828800"/>
+            <a:off x="9464040" y="484632"/>
+            <a:ext cx="2011680" cy="438912"/>
+          </a:xfrm>
+          <a:prstGeom prst="roundRect">
+            <a:avLst/>
+          </a:prstGeom>
+          <a:solidFill>
+            <a:srgbClr val="E7F0FF"/>
+          </a:solidFill>
+          <a:ln>
+            <a:solidFill>
+              <a:srgbClr val="C4D5E9"/>
+            </a:solidFill>
+          </a:ln>
+        </p:spPr>
+        <p:style>
+          <a:lnRef idx="1">
+            <a:schemeClr val="accent1"/>
+          </a:lnRef>
+          <a:fillRef idx="3">
+            <a:schemeClr val="accent1"/>
+          </a:fillRef>
+          <a:effectRef idx="2">
+            <a:schemeClr val="accent1"/>
+          </a:effectRef>
+          <a:fontRef idx="minor">
+            <a:schemeClr val="lt1"/>
+          </a:fontRef>
+        </p:style>
+        <p:txBody>
+          <a:bodyPr rtlCol="0" anchor="ctr"/>
+          <a:lstStyle/>
+          <a:p>
+            <a:pPr algn="ctr"/>
+          </a:p>
+        </p:txBody>
+      </p:sp>
+      <p:sp>
+        <p:nvSpPr>
+          <p:cNvPr id="9" name="TextBox 8"/>
+          <p:cNvSpPr txBox="1"/>
+          <p:nvPr/>
+        </p:nvSpPr>
+        <p:spPr>
+          <a:xfrm>
+            <a:off x="9619488" y="548640"/>
+            <a:ext cx="1737360" cy="274320"/>
+          </a:xfrm>
+          <a:prstGeom prst="rect">
+            <a:avLst/>
+          </a:prstGeom>
+          <a:noFill/>
+        </p:spPr>
+        <p:txBody>
+          <a:bodyPr wrap="none">
+            <a:spAutoFit/>
+          </a:bodyPr>
+          <a:lstStyle/>
+          <a:p>
+            <a:pPr algn="ctr"/>
+            <a:r>
+              <a:rPr sz="1100" b="1">
+                <a:solidFill>
+                  <a:srgbClr val="185FCB"/>
+                </a:solidFill>
+                <a:latin typeface="Calibri"/>
+              </a:rPr>
+              <a:t>ML STACK</a:t>
+            </a:r>
+          </a:p>
+        </p:txBody>
+      </p:sp>
+      <p:sp>
+        <p:nvSpPr>
+          <p:cNvPr id="10" name="Rounded Rectangle 9"/>
+          <p:cNvSpPr/>
+          <p:nvPr/>
+        </p:nvSpPr>
+        <p:spPr>
+          <a:xfrm>
+            <a:off x="685800" y="2286000"/>
+            <a:ext cx="2743200" cy="2240280"/>
           </a:xfrm>
           <a:prstGeom prst="roundRect">
             <a:avLst/>
@@ -4215,7 +5709,7 @@
           </a:solidFill>
           <a:ln>
             <a:solidFill>
-              <a:srgbClr val="C2D3E8"/>
+              <a:srgbClr val="C4D5E9"/>
             </a:solidFill>
           </a:ln>
         </p:spPr>
@@ -4243,14 +5737,14 @@
       </p:sp>
       <p:sp>
         <p:nvSpPr>
-          <p:cNvPr id="6" name="TextBox 5"/>
+          <p:cNvPr id="11" name="TextBox 10"/>
           <p:cNvSpPr txBox="1"/>
           <p:nvPr/>
         </p:nvSpPr>
         <p:spPr>
           <a:xfrm>
-            <a:off x="1005840" y="2103120"/>
-            <a:ext cx="2651760" cy="457200"/>
+            <a:off x="914400" y="2450592"/>
+            <a:ext cx="2286000" cy="457200"/>
           </a:xfrm>
           <a:prstGeom prst="rect">
             <a:avLst/>
@@ -4263,28 +5757,29 @@
           </a:bodyPr>
           <a:lstStyle/>
           <a:p>
-            <a:r>
-              <a:rPr sz="2200" b="1">
-                <a:solidFill>
-                  <a:srgbClr val="0A7F78"/>
-                </a:solidFill>
-                <a:latin typeface="Calibri"/>
-              </a:rPr>
-              <a:t>Face</a:t>
-            </a:r>
-          </a:p>
-        </p:txBody>
-      </p:sp>
-      <p:sp>
-        <p:nvSpPr>
-          <p:cNvPr id="7" name="TextBox 6"/>
+            <a:pPr algn="l"/>
+            <a:r>
+              <a:rPr sz="2000" b="1">
+                <a:solidFill>
+                  <a:srgbClr val="13233A"/>
+                </a:solidFill>
+                <a:latin typeface="Calibri"/>
+              </a:rPr>
+              <a:t>QLoRA SFT</a:t>
+            </a:r>
+          </a:p>
+        </p:txBody>
+      </p:sp>
+      <p:sp>
+        <p:nvSpPr>
+          <p:cNvPr id="12" name="TextBox 11"/>
           <p:cNvSpPr txBox="1"/>
           <p:nvPr/>
         </p:nvSpPr>
         <p:spPr>
           <a:xfrm>
-            <a:off x="1005840" y="2606040"/>
-            <a:ext cx="2651760" cy="1097280"/>
+            <a:off x="914400" y="2944368"/>
+            <a:ext cx="2286000" cy="1417320"/>
           </a:xfrm>
           <a:prstGeom prst="rect">
             <a:avLst/>
@@ -4297,39 +5792,230 @@
           </a:bodyPr>
           <a:lstStyle/>
           <a:p>
-            <a:r>
-              <a:rPr sz="1400" b="0">
-                <a:solidFill>
-                  <a:srgbClr val="14243A"/>
-                </a:solidFill>
-                <a:latin typeface="Calibri"/>
-              </a:rPr>
-              <a:t>Next.js command surface</a:t>
-            </a:r>
-          </a:p>
-          <a:p>
-            <a:r>
-              <a:rPr sz="1400" b="0">
-                <a:solidFill>
-                  <a:srgbClr val="14243A"/>
-                </a:solidFill>
-                <a:latin typeface="Calibri"/>
-              </a:rPr>
-              <a:t>Operator workflow</a:t>
-            </a:r>
-          </a:p>
-        </p:txBody>
-      </p:sp>
-      <p:sp>
-        <p:nvSpPr>
-          <p:cNvPr id="8" name="Rounded Rectangle 7"/>
+            <a:pPr algn="l"/>
+            <a:r>
+              <a:rPr sz="1500" b="0">
+                <a:solidFill>
+                  <a:srgbClr val="4E6380"/>
+                </a:solidFill>
+                <a:latin typeface="Calibri"/>
+              </a:rPr>
+              <a:t>Domain incident reasoning adaptation</a:t>
+            </a:r>
+          </a:p>
+        </p:txBody>
+      </p:sp>
+      <p:sp>
+        <p:nvSpPr>
+          <p:cNvPr id="13" name="Right Arrow 12"/>
           <p:cNvSpPr/>
           <p:nvPr/>
         </p:nvSpPr>
         <p:spPr>
           <a:xfrm>
-            <a:off x="4526280" y="1920240"/>
-            <a:ext cx="3017520" cy="1828800"/>
+            <a:off x="3474720" y="3154680"/>
+            <a:ext cx="320040" cy="256032"/>
+          </a:xfrm>
+          <a:prstGeom prst="rightArrow">
+            <a:avLst/>
+          </a:prstGeom>
+          <a:solidFill>
+            <a:srgbClr val="185FCB"/>
+          </a:solidFill>
+          <a:ln>
+            <a:noFill/>
+          </a:ln>
+        </p:spPr>
+        <p:style>
+          <a:lnRef idx="1">
+            <a:schemeClr val="accent1"/>
+          </a:lnRef>
+          <a:fillRef idx="3">
+            <a:schemeClr val="accent1"/>
+          </a:fillRef>
+          <a:effectRef idx="2">
+            <a:schemeClr val="accent1"/>
+          </a:effectRef>
+          <a:fontRef idx="minor">
+            <a:schemeClr val="lt1"/>
+          </a:fontRef>
+        </p:style>
+        <p:txBody>
+          <a:bodyPr rtlCol="0" anchor="ctr"/>
+          <a:lstStyle/>
+          <a:p>
+            <a:pPr algn="ctr"/>
+          </a:p>
+        </p:txBody>
+      </p:sp>
+      <p:sp>
+        <p:nvSpPr>
+          <p:cNvPr id="14" name="Rounded Rectangle 13"/>
+          <p:cNvSpPr/>
+          <p:nvPr/>
+        </p:nvSpPr>
+        <p:spPr>
+          <a:xfrm>
+            <a:off x="3611880" y="2286000"/>
+            <a:ext cx="2743200" cy="2240280"/>
+          </a:xfrm>
+          <a:prstGeom prst="roundRect">
+            <a:avLst/>
+          </a:prstGeom>
+          <a:solidFill>
+            <a:srgbClr val="E7F0FF"/>
+          </a:solidFill>
+          <a:ln>
+            <a:solidFill>
+              <a:srgbClr val="C4D5E9"/>
+            </a:solidFill>
+          </a:ln>
+        </p:spPr>
+        <p:style>
+          <a:lnRef idx="1">
+            <a:schemeClr val="accent1"/>
+          </a:lnRef>
+          <a:fillRef idx="3">
+            <a:schemeClr val="accent1"/>
+          </a:fillRef>
+          <a:effectRef idx="2">
+            <a:schemeClr val="accent1"/>
+          </a:effectRef>
+          <a:fontRef idx="minor">
+            <a:schemeClr val="lt1"/>
+          </a:fontRef>
+        </p:style>
+        <p:txBody>
+          <a:bodyPr rtlCol="0" anchor="ctr"/>
+          <a:lstStyle/>
+          <a:p>
+            <a:pPr algn="ctr"/>
+          </a:p>
+        </p:txBody>
+      </p:sp>
+      <p:sp>
+        <p:nvSpPr>
+          <p:cNvPr id="15" name="TextBox 14"/>
+          <p:cNvSpPr txBox="1"/>
+          <p:nvPr/>
+        </p:nvSpPr>
+        <p:spPr>
+          <a:xfrm>
+            <a:off x="3840480" y="2450592"/>
+            <a:ext cx="2286000" cy="457200"/>
+          </a:xfrm>
+          <a:prstGeom prst="rect">
+            <a:avLst/>
+          </a:prstGeom>
+          <a:noFill/>
+        </p:spPr>
+        <p:txBody>
+          <a:bodyPr wrap="none">
+            <a:spAutoFit/>
+          </a:bodyPr>
+          <a:lstStyle/>
+          <a:p>
+            <a:pPr algn="l"/>
+            <a:r>
+              <a:rPr sz="2000" b="1">
+                <a:solidFill>
+                  <a:srgbClr val="185FCB"/>
+                </a:solidFill>
+                <a:latin typeface="Calibri"/>
+              </a:rPr>
+              <a:t>Reward Model</a:t>
+            </a:r>
+          </a:p>
+        </p:txBody>
+      </p:sp>
+      <p:sp>
+        <p:nvSpPr>
+          <p:cNvPr id="16" name="TextBox 15"/>
+          <p:cNvSpPr txBox="1"/>
+          <p:nvPr/>
+        </p:nvSpPr>
+        <p:spPr>
+          <a:xfrm>
+            <a:off x="3840480" y="2944368"/>
+            <a:ext cx="2286000" cy="1417320"/>
+          </a:xfrm>
+          <a:prstGeom prst="rect">
+            <a:avLst/>
+          </a:prstGeom>
+          <a:noFill/>
+        </p:spPr>
+        <p:txBody>
+          <a:bodyPr wrap="none">
+            <a:spAutoFit/>
+          </a:bodyPr>
+          <a:lstStyle/>
+          <a:p>
+            <a:pPr algn="l"/>
+            <a:r>
+              <a:rPr sz="1500" b="0">
+                <a:solidFill>
+                  <a:srgbClr val="4E6380"/>
+                </a:solidFill>
+                <a:latin typeface="Calibri"/>
+              </a:rPr>
+              <a:t>7D scoring for quality + safety</a:t>
+            </a:r>
+          </a:p>
+        </p:txBody>
+      </p:sp>
+      <p:sp>
+        <p:nvSpPr>
+          <p:cNvPr id="17" name="Right Arrow 16"/>
+          <p:cNvSpPr/>
+          <p:nvPr/>
+        </p:nvSpPr>
+        <p:spPr>
+          <a:xfrm>
+            <a:off x="6400800" y="3154680"/>
+            <a:ext cx="320040" cy="256032"/>
+          </a:xfrm>
+          <a:prstGeom prst="rightArrow">
+            <a:avLst/>
+          </a:prstGeom>
+          <a:solidFill>
+            <a:srgbClr val="185FCB"/>
+          </a:solidFill>
+          <a:ln>
+            <a:noFill/>
+          </a:ln>
+        </p:spPr>
+        <p:style>
+          <a:lnRef idx="1">
+            <a:schemeClr val="accent1"/>
+          </a:lnRef>
+          <a:fillRef idx="3">
+            <a:schemeClr val="accent1"/>
+          </a:fillRef>
+          <a:effectRef idx="2">
+            <a:schemeClr val="accent1"/>
+          </a:effectRef>
+          <a:fontRef idx="minor">
+            <a:schemeClr val="lt1"/>
+          </a:fontRef>
+        </p:style>
+        <p:txBody>
+          <a:bodyPr rtlCol="0" anchor="ctr"/>
+          <a:lstStyle/>
+          <a:p>
+            <a:pPr algn="ctr"/>
+          </a:p>
+        </p:txBody>
+      </p:sp>
+      <p:sp>
+        <p:nvSpPr>
+          <p:cNvPr id="18" name="Rounded Rectangle 17"/>
+          <p:cNvSpPr/>
+          <p:nvPr/>
+        </p:nvSpPr>
+        <p:spPr>
+          <a:xfrm>
+            <a:off x="6537960" y="2286000"/>
+            <a:ext cx="2743200" cy="2240280"/>
           </a:xfrm>
           <a:prstGeom prst="roundRect">
             <a:avLst/>
@@ -4339,7 +6025,7 @@
           </a:solidFill>
           <a:ln>
             <a:solidFill>
-              <a:srgbClr val="C2D3E8"/>
+              <a:srgbClr val="C4D5E9"/>
             </a:solidFill>
           </a:ln>
         </p:spPr>
@@ -4367,14 +6053,14 @@
       </p:sp>
       <p:sp>
         <p:nvSpPr>
-          <p:cNvPr id="9" name="TextBox 8"/>
+          <p:cNvPr id="19" name="TextBox 18"/>
           <p:cNvSpPr txBox="1"/>
           <p:nvPr/>
         </p:nvSpPr>
         <p:spPr>
           <a:xfrm>
-            <a:off x="4709160" y="2103120"/>
-            <a:ext cx="2651760" cy="457200"/>
+            <a:off x="6766560" y="2450592"/>
+            <a:ext cx="2286000" cy="457200"/>
           </a:xfrm>
           <a:prstGeom prst="rect">
             <a:avLst/>
@@ -4387,28 +6073,29 @@
           </a:bodyPr>
           <a:lstStyle/>
           <a:p>
-            <a:r>
-              <a:rPr sz="2200" b="1">
-                <a:solidFill>
-                  <a:srgbClr val="0A7F78"/>
-                </a:solidFill>
-                <a:latin typeface="Calibri"/>
-              </a:rPr>
-              <a:t>Body</a:t>
-            </a:r>
-          </a:p>
-        </p:txBody>
-      </p:sp>
-      <p:sp>
-        <p:nvSpPr>
-          <p:cNvPr id="10" name="TextBox 9"/>
+            <a:pPr algn="l"/>
+            <a:r>
+              <a:rPr sz="2000" b="1">
+                <a:solidFill>
+                  <a:srgbClr val="13233A"/>
+                </a:solidFill>
+                <a:latin typeface="Calibri"/>
+              </a:rPr>
+              <a:t>RLHF</a:t>
+            </a:r>
+          </a:p>
+        </p:txBody>
+      </p:sp>
+      <p:sp>
+        <p:nvSpPr>
+          <p:cNvPr id="20" name="TextBox 19"/>
           <p:cNvSpPr txBox="1"/>
           <p:nvPr/>
         </p:nvSpPr>
         <p:spPr>
           <a:xfrm>
-            <a:off x="4709160" y="2606040"/>
-            <a:ext cx="2651760" cy="1097280"/>
+            <a:off x="6766560" y="2944368"/>
+            <a:ext cx="2286000" cy="1417320"/>
           </a:xfrm>
           <a:prstGeom prst="rect">
             <a:avLst/>
@@ -4421,61 +6108,38 @@
           </a:bodyPr>
           <a:lstStyle/>
           <a:p>
-            <a:r>
-              <a:rPr sz="1400" b="0">
-                <a:solidFill>
-                  <a:srgbClr val="14243A"/>
-                </a:solidFill>
-                <a:latin typeface="Calibri"/>
-              </a:rPr>
-              <a:t>FastAPI orchestration</a:t>
-            </a:r>
-          </a:p>
-          <a:p>
-            <a:r>
-              <a:rPr sz="1400" b="0">
-                <a:solidFill>
-                  <a:srgbClr val="14243A"/>
-                </a:solidFill>
-                <a:latin typeface="Calibri"/>
-              </a:rPr>
-              <a:t>MCP-inspired tool routing</a:t>
-            </a:r>
-          </a:p>
-          <a:p>
-            <a:r>
-              <a:rPr sz="1400" b="0">
-                <a:solidFill>
-                  <a:srgbClr val="14243A"/>
-                </a:solidFill>
-                <a:latin typeface="Calibri"/>
-              </a:rPr>
-              <a:t>Policy + safety gating</a:t>
-            </a:r>
-          </a:p>
-        </p:txBody>
-      </p:sp>
-      <p:sp>
-        <p:nvSpPr>
-          <p:cNvPr id="11" name="Rounded Rectangle 10"/>
+            <a:pPr algn="l"/>
+            <a:r>
+              <a:rPr sz="1500" b="0">
+                <a:solidFill>
+                  <a:srgbClr val="4E6380"/>
+                </a:solidFill>
+                <a:latin typeface="Calibri"/>
+              </a:rPr>
+              <a:t>Policy refinement with controlled updates</a:t>
+            </a:r>
+          </a:p>
+        </p:txBody>
+      </p:sp>
+      <p:sp>
+        <p:nvSpPr>
+          <p:cNvPr id="21" name="Right Arrow 20"/>
           <p:cNvSpPr/>
           <p:nvPr/>
         </p:nvSpPr>
         <p:spPr>
           <a:xfrm>
-            <a:off x="8183879" y="1920240"/>
-            <a:ext cx="3017520" cy="1828800"/>
-          </a:xfrm>
-          <a:prstGeom prst="roundRect">
+            <a:off x="9326880" y="3154680"/>
+            <a:ext cx="320040" cy="256032"/>
+          </a:xfrm>
+          <a:prstGeom prst="rightArrow">
             <a:avLst/>
           </a:prstGeom>
           <a:solidFill>
-            <a:srgbClr val="FFFFFF"/>
+            <a:srgbClr val="185FCB"/>
           </a:solidFill>
           <a:ln>
-            <a:solidFill>
-              <a:srgbClr val="C2D3E8"/>
-            </a:solidFill>
+            <a:noFill/>
           </a:ln>
         </p:spPr>
         <p:style>
@@ -4502,102 +6166,25 @@
       </p:sp>
       <p:sp>
         <p:nvSpPr>
-          <p:cNvPr id="12" name="TextBox 11"/>
-          <p:cNvSpPr txBox="1"/>
-          <p:nvPr/>
-        </p:nvSpPr>
-        <p:spPr>
-          <a:xfrm>
-            <a:off x="8366759" y="2103120"/>
-            <a:ext cx="2651760" cy="457200"/>
-          </a:xfrm>
-          <a:prstGeom prst="rect">
-            <a:avLst/>
-          </a:prstGeom>
-          <a:noFill/>
-        </p:spPr>
-        <p:txBody>
-          <a:bodyPr wrap="none">
-            <a:spAutoFit/>
-          </a:bodyPr>
-          <a:lstStyle/>
-          <a:p>
-            <a:r>
-              <a:rPr sz="2200" b="1">
-                <a:solidFill>
-                  <a:srgbClr val="0A7F78"/>
-                </a:solidFill>
-                <a:latin typeface="Calibri"/>
-              </a:rPr>
-              <a:t>Brain</a:t>
-            </a:r>
-          </a:p>
-        </p:txBody>
-      </p:sp>
-      <p:sp>
-        <p:nvSpPr>
-          <p:cNvPr id="13" name="TextBox 12"/>
-          <p:cNvSpPr txBox="1"/>
-          <p:nvPr/>
-        </p:nvSpPr>
-        <p:spPr>
-          <a:xfrm>
-            <a:off x="8366759" y="2606040"/>
-            <a:ext cx="2651760" cy="1097280"/>
-          </a:xfrm>
-          <a:prstGeom prst="rect">
-            <a:avLst/>
-          </a:prstGeom>
-          <a:noFill/>
-        </p:spPr>
-        <p:txBody>
-          <a:bodyPr wrap="none">
-            <a:spAutoFit/>
-          </a:bodyPr>
-          <a:lstStyle/>
-          <a:p>
-            <a:r>
-              <a:rPr sz="1400" b="0">
-                <a:solidFill>
-                  <a:srgbClr val="14243A"/>
-                </a:solidFill>
-                <a:latin typeface="Calibri"/>
-              </a:rPr>
-              <a:t>vLLM inference service</a:t>
-            </a:r>
-          </a:p>
-          <a:p>
-            <a:r>
-              <a:rPr sz="1400" b="0">
-                <a:solidFill>
-                  <a:srgbClr val="14243A"/>
-                </a:solidFill>
-                <a:latin typeface="Calibri"/>
-              </a:rPr>
-              <a:t>LLM reasoning backend</a:t>
-            </a:r>
-          </a:p>
-        </p:txBody>
-      </p:sp>
-      <p:sp>
-        <p:nvSpPr>
-          <p:cNvPr id="14" name="Right Arrow 13"/>
+          <p:cNvPr id="22" name="Rounded Rectangle 21"/>
           <p:cNvSpPr/>
           <p:nvPr/>
         </p:nvSpPr>
         <p:spPr>
           <a:xfrm>
-            <a:off x="3931920" y="2514600"/>
-            <a:ext cx="411480" cy="411480"/>
-          </a:xfrm>
-          <a:prstGeom prst="rightArrow">
+            <a:off x="9464040" y="2286000"/>
+            <a:ext cx="2743200" cy="2240280"/>
+          </a:xfrm>
+          <a:prstGeom prst="roundRect">
             <a:avLst/>
           </a:prstGeom>
           <a:solidFill>
-            <a:srgbClr val="2166CF"/>
+            <a:srgbClr val="E7F0FF"/>
           </a:solidFill>
           <a:ln>
-            <a:noFill/>
+            <a:solidFill>
+              <a:srgbClr val="C4D5E9"/>
+            </a:solidFill>
           </a:ln>
         </p:spPr>
         <p:style>
@@ -4624,23 +6211,95 @@
       </p:sp>
       <p:sp>
         <p:nvSpPr>
-          <p:cNvPr id="15" name="Right Arrow 14"/>
+          <p:cNvPr id="23" name="TextBox 22"/>
+          <p:cNvSpPr txBox="1"/>
+          <p:nvPr/>
+        </p:nvSpPr>
+        <p:spPr>
+          <a:xfrm>
+            <a:off x="9692640" y="2450592"/>
+            <a:ext cx="2286000" cy="457200"/>
+          </a:xfrm>
+          <a:prstGeom prst="rect">
+            <a:avLst/>
+          </a:prstGeom>
+          <a:noFill/>
+        </p:spPr>
+        <p:txBody>
+          <a:bodyPr wrap="none">
+            <a:spAutoFit/>
+          </a:bodyPr>
+          <a:lstStyle/>
+          <a:p>
+            <a:pPr algn="l"/>
+            <a:r>
+              <a:rPr sz="2000" b="1">
+                <a:solidFill>
+                  <a:srgbClr val="185FCB"/>
+                </a:solidFill>
+                <a:latin typeface="Calibri"/>
+              </a:rPr>
+              <a:t>vLLM Serve</a:t>
+            </a:r>
+          </a:p>
+        </p:txBody>
+      </p:sp>
+      <p:sp>
+        <p:nvSpPr>
+          <p:cNvPr id="24" name="TextBox 23"/>
+          <p:cNvSpPr txBox="1"/>
+          <p:nvPr/>
+        </p:nvSpPr>
+        <p:spPr>
+          <a:xfrm>
+            <a:off x="9692640" y="2944368"/>
+            <a:ext cx="2286000" cy="1417320"/>
+          </a:xfrm>
+          <a:prstGeom prst="rect">
+            <a:avLst/>
+          </a:prstGeom>
+          <a:noFill/>
+        </p:spPr>
+        <p:txBody>
+          <a:bodyPr wrap="none">
+            <a:spAutoFit/>
+          </a:bodyPr>
+          <a:lstStyle/>
+          <a:p>
+            <a:pPr algn="l"/>
+            <a:r>
+              <a:rPr sz="1500" b="0">
+                <a:solidFill>
+                  <a:srgbClr val="4E6380"/>
+                </a:solidFill>
+                <a:latin typeface="Calibri"/>
+              </a:rPr>
+              <a:t>Runtime inference for production flow</a:t>
+            </a:r>
+          </a:p>
+        </p:txBody>
+      </p:sp>
+      <p:sp>
+        <p:nvSpPr>
+          <p:cNvPr id="25" name="Rounded Rectangle 24"/>
           <p:cNvSpPr/>
           <p:nvPr/>
         </p:nvSpPr>
         <p:spPr>
           <a:xfrm>
-            <a:off x="7635240" y="2514600"/>
-            <a:ext cx="411480" cy="411480"/>
-          </a:xfrm>
-          <a:prstGeom prst="rightArrow">
+            <a:off x="822960" y="4846320"/>
+            <a:ext cx="10698480" cy="1143000"/>
+          </a:xfrm>
+          <a:prstGeom prst="roundRect">
             <a:avLst/>
           </a:prstGeom>
           <a:solidFill>
-            <a:srgbClr val="2166CF"/>
+            <a:srgbClr val="E3F7F4"/>
           </a:solidFill>
           <a:ln>
-            <a:noFill/>
+            <a:solidFill>
+              <a:srgbClr val="C4D5E9"/>
+            </a:solidFill>
           </a:ln>
         </p:spPr>
         <p:style>
@@ -4667,14 +6326,14 @@
       </p:sp>
       <p:sp>
         <p:nvSpPr>
-          <p:cNvPr id="16" name="TextBox 15"/>
+          <p:cNvPr id="26" name="TextBox 25"/>
           <p:cNvSpPr txBox="1"/>
           <p:nvPr/>
         </p:nvSpPr>
         <p:spPr>
           <a:xfrm>
-            <a:off x="868680" y="4617720"/>
-            <a:ext cx="10424160" cy="1005840"/>
+            <a:off x="1051560" y="5010912"/>
+            <a:ext cx="10241280" cy="457200"/>
           </a:xfrm>
           <a:prstGeom prst="rect">
             <a:avLst/>
@@ -4687,14 +6346,50 @@
           </a:bodyPr>
           <a:lstStyle/>
           <a:p>
-            <a:r>
-              <a:rPr sz="1600" b="0">
-                <a:solidFill>
-                  <a:srgbClr val="4D607A"/>
-                </a:solidFill>
-                <a:latin typeface="Calibri"/>
-              </a:rPr>
-              <a:t>Why this helps: split responsibilities keep incident workflows clear, auditable, and safer under pressure.</a:t>
+            <a:pPr algn="l"/>
+            <a:r>
+              <a:rPr sz="2000" b="1">
+                <a:solidFill>
+                  <a:srgbClr val="0A7F78"/>
+                </a:solidFill>
+                <a:latin typeface="Calibri"/>
+              </a:rPr>
+              <a:t>Why this sequence</a:t>
+            </a:r>
+          </a:p>
+        </p:txBody>
+      </p:sp>
+      <p:sp>
+        <p:nvSpPr>
+          <p:cNvPr id="27" name="TextBox 26"/>
+          <p:cNvSpPr txBox="1"/>
+          <p:nvPr/>
+        </p:nvSpPr>
+        <p:spPr>
+          <a:xfrm>
+            <a:off x="1051560" y="5504688"/>
+            <a:ext cx="10241280" cy="320040"/>
+          </a:xfrm>
+          <a:prstGeom prst="rect">
+            <a:avLst/>
+          </a:prstGeom>
+          <a:noFill/>
+        </p:spPr>
+        <p:txBody>
+          <a:bodyPr wrap="none">
+            <a:spAutoFit/>
+          </a:bodyPr>
+          <a:lstStyle/>
+          <a:p>
+            <a:pPr algn="l"/>
+            <a:r>
+              <a:rPr sz="1500" b="0">
+                <a:solidFill>
+                  <a:srgbClr val="4E6380"/>
+                </a:solidFill>
+                <a:latin typeface="Calibri"/>
+              </a:rPr>
+              <a:t>It improves consistency and safety posture versus a vanilla prompt-only setup.</a:t>
             </a:r>
           </a:p>
         </p:txBody>
@@ -4732,7 +6427,7 @@
             <a:avLst/>
           </a:prstGeom>
           <a:solidFill>
-            <a:srgbClr val="F5F9FF"/>
+            <a:srgbClr val="F2F7FF"/>
           </a:solidFill>
           <a:ln>
             <a:noFill/>
@@ -4762,14 +6457,143 @@
       </p:sp>
       <p:sp>
         <p:nvSpPr>
-          <p:cNvPr id="3" name="TextBox 2"/>
+          <p:cNvPr id="3" name="Rectangle 2"/>
+          <p:cNvSpPr/>
+          <p:nvPr/>
+        </p:nvSpPr>
+        <p:spPr>
+          <a:xfrm>
+            <a:off x="0" y="0"/>
+            <a:ext cx="12191695" cy="256032"/>
+          </a:xfrm>
+          <a:prstGeom prst="rect">
+            <a:avLst/>
+          </a:prstGeom>
+          <a:solidFill>
+            <a:srgbClr val="185FCB"/>
+          </a:solidFill>
+          <a:ln>
+            <a:noFill/>
+          </a:ln>
+        </p:spPr>
+        <p:style>
+          <a:lnRef idx="1">
+            <a:schemeClr val="accent1"/>
+          </a:lnRef>
+          <a:fillRef idx="3">
+            <a:schemeClr val="accent1"/>
+          </a:fillRef>
+          <a:effectRef idx="2">
+            <a:schemeClr val="accent1"/>
+          </a:effectRef>
+          <a:fontRef idx="minor">
+            <a:schemeClr val="lt1"/>
+          </a:fontRef>
+        </p:style>
+        <p:txBody>
+          <a:bodyPr rtlCol="0" anchor="ctr"/>
+          <a:lstStyle/>
+          <a:p>
+            <a:pPr algn="ctr"/>
+          </a:p>
+        </p:txBody>
+      </p:sp>
+      <p:sp>
+        <p:nvSpPr>
+          <p:cNvPr id="4" name="Oval 3"/>
+          <p:cNvSpPr/>
+          <p:nvPr/>
+        </p:nvSpPr>
+        <p:spPr>
+          <a:xfrm>
+            <a:off x="-1097280" y="-914400"/>
+            <a:ext cx="3474720" cy="2926080"/>
+          </a:xfrm>
+          <a:prstGeom prst="ellipse">
+            <a:avLst/>
+          </a:prstGeom>
+          <a:solidFill>
+            <a:srgbClr val="E7F0FF"/>
+          </a:solidFill>
+          <a:ln>
+            <a:noFill/>
+          </a:ln>
+        </p:spPr>
+        <p:style>
+          <a:lnRef idx="1">
+            <a:schemeClr val="accent1"/>
+          </a:lnRef>
+          <a:fillRef idx="3">
+            <a:schemeClr val="accent1"/>
+          </a:fillRef>
+          <a:effectRef idx="2">
+            <a:schemeClr val="accent1"/>
+          </a:effectRef>
+          <a:fontRef idx="minor">
+            <a:schemeClr val="lt1"/>
+          </a:fontRef>
+        </p:style>
+        <p:txBody>
+          <a:bodyPr rtlCol="0" anchor="ctr"/>
+          <a:lstStyle/>
+          <a:p>
+            <a:pPr algn="ctr"/>
+          </a:p>
+        </p:txBody>
+      </p:sp>
+      <p:sp>
+        <p:nvSpPr>
+          <p:cNvPr id="5" name="Oval 4"/>
+          <p:cNvSpPr/>
+          <p:nvPr/>
+        </p:nvSpPr>
+        <p:spPr>
+          <a:xfrm>
+            <a:off x="9875520" y="-731520"/>
+            <a:ext cx="2926080" cy="2560320"/>
+          </a:xfrm>
+          <a:prstGeom prst="ellipse">
+            <a:avLst/>
+          </a:prstGeom>
+          <a:solidFill>
+            <a:srgbClr val="E3F7F4"/>
+          </a:solidFill>
+          <a:ln>
+            <a:noFill/>
+          </a:ln>
+        </p:spPr>
+        <p:style>
+          <a:lnRef idx="1">
+            <a:schemeClr val="accent1"/>
+          </a:lnRef>
+          <a:fillRef idx="3">
+            <a:schemeClr val="accent1"/>
+          </a:fillRef>
+          <a:effectRef idx="2">
+            <a:schemeClr val="accent1"/>
+          </a:effectRef>
+          <a:fontRef idx="minor">
+            <a:schemeClr val="lt1"/>
+          </a:fontRef>
+        </p:style>
+        <p:txBody>
+          <a:bodyPr rtlCol="0" anchor="ctr"/>
+          <a:lstStyle/>
+          <a:p>
+            <a:pPr algn="ctr"/>
+          </a:p>
+        </p:txBody>
+      </p:sp>
+      <p:sp>
+        <p:nvSpPr>
+          <p:cNvPr id="6" name="TextBox 5"/>
           <p:cNvSpPr txBox="1"/>
           <p:nvPr/>
         </p:nvSpPr>
         <p:spPr>
           <a:xfrm>
-            <a:off x="640080" y="457200"/>
-            <a:ext cx="10881360" cy="1371600"/>
+            <a:off x="658368" y="420624"/>
+            <a:ext cx="8138160" cy="658368"/>
           </a:xfrm>
           <a:prstGeom prst="rect">
             <a:avLst/>
@@ -4782,28 +6606,29 @@
           </a:bodyPr>
           <a:lstStyle/>
           <a:p>
-            <a:r>
-              <a:rPr sz="3600" b="1">
-                <a:solidFill>
-                  <a:srgbClr val="14243A"/>
-                </a:solidFill>
-                <a:latin typeface="Calibri"/>
-              </a:rPr>
-              <a:t>Model Pipeline</a:t>
-            </a:r>
-          </a:p>
-        </p:txBody>
-      </p:sp>
-      <p:sp>
-        <p:nvSpPr>
-          <p:cNvPr id="4" name="TextBox 3"/>
+            <a:pPr algn="l"/>
+            <a:r>
+              <a:rPr sz="3500" b="1">
+                <a:solidFill>
+                  <a:srgbClr val="13233A"/>
+                </a:solidFill>
+                <a:latin typeface="Calibri"/>
+              </a:rPr>
+              <a:t>Project Demonstration Scenario</a:t>
+            </a:r>
+          </a:p>
+        </p:txBody>
+      </p:sp>
+      <p:sp>
+        <p:nvSpPr>
+          <p:cNvPr id="7" name="TextBox 6"/>
           <p:cNvSpPr txBox="1"/>
           <p:nvPr/>
         </p:nvSpPr>
         <p:spPr>
           <a:xfrm>
-            <a:off x="685800" y="1417320"/>
-            <a:ext cx="10789920" cy="1097280"/>
+            <a:off x="685800" y="1115568"/>
+            <a:ext cx="9692640" cy="457200"/>
           </a:xfrm>
           <a:prstGeom prst="rect">
             <a:avLst/>
@@ -4816,28 +6641,74 @@
           </a:bodyPr>
           <a:lstStyle/>
           <a:p>
-            <a:r>
-              <a:rPr sz="1800" b="0">
-                <a:solidFill>
-                  <a:srgbClr val="4D607A"/>
-                </a:solidFill>
-                <a:latin typeface="Calibri"/>
-              </a:rPr>
-              <a:t>LLM alignment stack used in SRE Nidaan</a:t>
-            </a:r>
-          </a:p>
-        </p:txBody>
-      </p:sp>
-      <p:sp>
-        <p:nvSpPr>
-          <p:cNvPr id="5" name="TextBox 4"/>
+            <a:pPr algn="l"/>
+            <a:r>
+              <a:rPr sz="1700" b="0">
+                <a:solidFill>
+                  <a:srgbClr val="4E6380"/>
+                </a:solidFill>
+                <a:latin typeface="Calibri"/>
+              </a:rPr>
+              <a:t>Auth retry storm with database saturation risk</a:t>
+            </a:r>
+          </a:p>
+        </p:txBody>
+      </p:sp>
+      <p:sp>
+        <p:nvSpPr>
+          <p:cNvPr id="8" name="Rounded Rectangle 7"/>
+          <p:cNvSpPr/>
+          <p:nvPr/>
+        </p:nvSpPr>
+        <p:spPr>
+          <a:xfrm>
+            <a:off x="9464040" y="484632"/>
+            <a:ext cx="2011680" cy="438912"/>
+          </a:xfrm>
+          <a:prstGeom prst="roundRect">
+            <a:avLst/>
+          </a:prstGeom>
+          <a:solidFill>
+            <a:srgbClr val="E7F0FF"/>
+          </a:solidFill>
+          <a:ln>
+            <a:solidFill>
+              <a:srgbClr val="C4D5E9"/>
+            </a:solidFill>
+          </a:ln>
+        </p:spPr>
+        <p:style>
+          <a:lnRef idx="1">
+            <a:schemeClr val="accent1"/>
+          </a:lnRef>
+          <a:fillRef idx="3">
+            <a:schemeClr val="accent1"/>
+          </a:fillRef>
+          <a:effectRef idx="2">
+            <a:schemeClr val="accent1"/>
+          </a:effectRef>
+          <a:fontRef idx="minor">
+            <a:schemeClr val="lt1"/>
+          </a:fontRef>
+        </p:style>
+        <p:txBody>
+          <a:bodyPr rtlCol="0" anchor="ctr"/>
+          <a:lstStyle/>
+          <a:p>
+            <a:pPr algn="ctr"/>
+          </a:p>
+        </p:txBody>
+      </p:sp>
+      <p:sp>
+        <p:nvSpPr>
+          <p:cNvPr id="9" name="TextBox 8"/>
           <p:cNvSpPr txBox="1"/>
           <p:nvPr/>
         </p:nvSpPr>
         <p:spPr>
           <a:xfrm>
-            <a:off x="822960" y="1920240"/>
-            <a:ext cx="10698480" cy="548640"/>
+            <a:off x="9619488" y="548640"/>
+            <a:ext cx="1737360" cy="274320"/>
           </a:xfrm>
           <a:prstGeom prst="rect">
             <a:avLst/>
@@ -4850,28 +6721,29 @@
           </a:bodyPr>
           <a:lstStyle/>
           <a:p>
-            <a:r>
-              <a:rPr sz="2400" b="1">
-                <a:solidFill>
-                  <a:srgbClr val="2166CF"/>
-                </a:solidFill>
-                <a:latin typeface="Calibri"/>
-              </a:rPr>
-              <a:t>Training sequence</a:t>
-            </a:r>
-          </a:p>
-        </p:txBody>
-      </p:sp>
-      <p:sp>
-        <p:nvSpPr>
-          <p:cNvPr id="6" name="Rounded Rectangle 5"/>
+            <a:pPr algn="ctr"/>
+            <a:r>
+              <a:rPr sz="1100" b="1">
+                <a:solidFill>
+                  <a:srgbClr val="185FCB"/>
+                </a:solidFill>
+                <a:latin typeface="Calibri"/>
+              </a:rPr>
+              <a:t>DEMO STEP 1</a:t>
+            </a:r>
+          </a:p>
+        </p:txBody>
+      </p:sp>
+      <p:sp>
+        <p:nvSpPr>
+          <p:cNvPr id="10" name="Rounded Rectangle 9"/>
           <p:cNvSpPr/>
           <p:nvPr/>
         </p:nvSpPr>
         <p:spPr>
           <a:xfrm>
-            <a:off x="731520" y="2423160"/>
-            <a:ext cx="10789920" cy="2103120"/>
+            <a:off x="822960" y="1828800"/>
+            <a:ext cx="5486400" cy="4160520"/>
           </a:xfrm>
           <a:prstGeom prst="roundRect">
             <a:avLst/>
@@ -4881,7 +6753,7 @@
           </a:solidFill>
           <a:ln>
             <a:solidFill>
-              <a:srgbClr val="C2D3E8"/>
+              <a:srgbClr val="C4D5E9"/>
             </a:solidFill>
           </a:ln>
         </p:spPr>
@@ -4904,50 +6776,286 @@
           <a:lstStyle/>
           <a:p>
             <a:pPr algn="ctr"/>
-            <a:r>
-              <a:rPr sz="1800" b="0">
-                <a:solidFill>
-                  <a:srgbClr val="14243A"/>
-                </a:solidFill>
-                <a:latin typeface="Calibri"/>
-              </a:rPr>
-              <a:t>• QLoRA Supervised Fine-Tuning (domain incident data).</a:t>
-            </a:r>
-          </a:p>
-          <a:p>
-            <a:pPr/>
-            <a:r>
-              <a:rPr sz="1800" b="0">
-                <a:solidFill>
-                  <a:srgbClr val="14243A"/>
-                </a:solidFill>
-                <a:latin typeface="Calibri"/>
-              </a:rPr>
-              <a:t>• 7D reward modeling (safety + causality dimensions).</a:t>
-            </a:r>
-          </a:p>
-          <a:p>
-            <a:pPr/>
-            <a:r>
-              <a:rPr sz="1800" b="0">
-                <a:solidFill>
-                  <a:srgbClr val="14243A"/>
-                </a:solidFill>
-                <a:latin typeface="Calibri"/>
-              </a:rPr>
-              <a:t>• RLHF refinement with guardrails and periodic eval gating.</a:t>
-            </a:r>
-          </a:p>
-          <a:p>
-            <a:pPr/>
-            <a:r>
-              <a:rPr sz="1800" b="0">
-                <a:solidFill>
-                  <a:srgbClr val="14243A"/>
-                </a:solidFill>
-                <a:latin typeface="Calibri"/>
-              </a:rPr>
-              <a:t>• Runtime serving through vLLM for low-latency inference.</a:t>
+          </a:p>
+        </p:txBody>
+      </p:sp>
+      <p:sp>
+        <p:nvSpPr>
+          <p:cNvPr id="11" name="TextBox 10"/>
+          <p:cNvSpPr txBox="1"/>
+          <p:nvPr/>
+        </p:nvSpPr>
+        <p:spPr>
+          <a:xfrm>
+            <a:off x="1051560" y="1993392"/>
+            <a:ext cx="5029200" cy="457200"/>
+          </a:xfrm>
+          <a:prstGeom prst="rect">
+            <a:avLst/>
+          </a:prstGeom>
+          <a:noFill/>
+        </p:spPr>
+        <p:txBody>
+          <a:bodyPr wrap="none">
+            <a:spAutoFit/>
+          </a:bodyPr>
+          <a:lstStyle/>
+          <a:p>
+            <a:pPr algn="l"/>
+            <a:r>
+              <a:rPr sz="2000" b="1">
+                <a:solidFill>
+                  <a:srgbClr val="13233A"/>
+                </a:solidFill>
+                <a:latin typeface="Calibri"/>
+              </a:rPr>
+              <a:t>Incident input (what we provide)</a:t>
+            </a:r>
+          </a:p>
+        </p:txBody>
+      </p:sp>
+      <p:sp>
+        <p:nvSpPr>
+          <p:cNvPr id="12" name="TextBox 11"/>
+          <p:cNvSpPr txBox="1"/>
+          <p:nvPr/>
+        </p:nvSpPr>
+        <p:spPr>
+          <a:xfrm>
+            <a:off x="1051560" y="2487168"/>
+            <a:ext cx="5029200" cy="3337560"/>
+          </a:xfrm>
+          <a:prstGeom prst="rect">
+            <a:avLst/>
+          </a:prstGeom>
+          <a:noFill/>
+        </p:spPr>
+        <p:txBody>
+          <a:bodyPr wrap="none">
+            <a:spAutoFit/>
+          </a:bodyPr>
+          <a:lstStyle/>
+          <a:p>
+            <a:pPr algn="l"/>
+            <a:r>
+              <a:rPr sz="1500" b="0">
+                <a:solidFill>
+                  <a:srgbClr val="13233A"/>
+                </a:solidFill>
+                <a:latin typeface="Calibri"/>
+              </a:rPr>
+              <a:t>Severity: SEV-1</a:t>
+            </a:r>
+          </a:p>
+          <a:p>
+            <a:pPr algn="l"/>
+            <a:r>
+              <a:rPr sz="1500" b="0">
+                <a:solidFill>
+                  <a:srgbClr val="13233A"/>
+                </a:solidFill>
+                <a:latin typeface="Calibri"/>
+              </a:rPr>
+              <a:t>Signal: auth latency 210ms → 1.8s, error rate 18%</a:t>
+            </a:r>
+          </a:p>
+          <a:p>
+            <a:pPr algn="l"/>
+            <a:r>
+              <a:rPr sz="1500" b="0">
+                <a:solidFill>
+                  <a:srgbClr val="13233A"/>
+                </a:solidFill>
+                <a:latin typeface="Calibri"/>
+              </a:rPr>
+              <a:t>Impact: login + checkout timeout</a:t>
+            </a:r>
+          </a:p>
+          <a:p>
+            <a:pPr algn="l"/>
+            <a:r>
+              <a:rPr sz="1500" b="0">
+                <a:solidFill>
+                  <a:srgbClr val="13233A"/>
+                </a:solidFill>
+                <a:latin typeface="Calibri"/>
+              </a:rPr>
+              <a:t>Change context: auth middleware rollout 18 min prior</a:t>
+            </a:r>
+          </a:p>
+          <a:p>
+            <a:pPr algn="l"/>
+            <a:r>
+              <a:rPr sz="1500" b="0">
+                <a:solidFill>
+                  <a:srgbClr val="13233A"/>
+                </a:solidFill>
+                <a:latin typeface="Calibri"/>
+              </a:rPr>
+              <a:t>Affected services: auth-service, api-gateway, postgres</a:t>
+            </a:r>
+          </a:p>
+        </p:txBody>
+      </p:sp>
+      <p:sp>
+        <p:nvSpPr>
+          <p:cNvPr id="13" name="Rounded Rectangle 12"/>
+          <p:cNvSpPr/>
+          <p:nvPr/>
+        </p:nvSpPr>
+        <p:spPr>
+          <a:xfrm>
+            <a:off x="6583680" y="1828800"/>
+            <a:ext cx="4754880" cy="4160520"/>
+          </a:xfrm>
+          <a:prstGeom prst="roundRect">
+            <a:avLst/>
+          </a:prstGeom>
+          <a:solidFill>
+            <a:srgbClr val="E7F0FF"/>
+          </a:solidFill>
+          <a:ln>
+            <a:solidFill>
+              <a:srgbClr val="C4D5E9"/>
+            </a:solidFill>
+          </a:ln>
+        </p:spPr>
+        <p:style>
+          <a:lnRef idx="1">
+            <a:schemeClr val="accent1"/>
+          </a:lnRef>
+          <a:fillRef idx="3">
+            <a:schemeClr val="accent1"/>
+          </a:fillRef>
+          <a:effectRef idx="2">
+            <a:schemeClr val="accent1"/>
+          </a:effectRef>
+          <a:fontRef idx="minor">
+            <a:schemeClr val="lt1"/>
+          </a:fontRef>
+        </p:style>
+        <p:txBody>
+          <a:bodyPr rtlCol="0" anchor="ctr"/>
+          <a:lstStyle/>
+          <a:p>
+            <a:pPr algn="ctr"/>
+          </a:p>
+        </p:txBody>
+      </p:sp>
+      <p:sp>
+        <p:nvSpPr>
+          <p:cNvPr id="14" name="TextBox 13"/>
+          <p:cNvSpPr txBox="1"/>
+          <p:nvPr/>
+        </p:nvSpPr>
+        <p:spPr>
+          <a:xfrm>
+            <a:off x="6812280" y="1993392"/>
+            <a:ext cx="4297680" cy="457200"/>
+          </a:xfrm>
+          <a:prstGeom prst="rect">
+            <a:avLst/>
+          </a:prstGeom>
+          <a:noFill/>
+        </p:spPr>
+        <p:txBody>
+          <a:bodyPr wrap="none">
+            <a:spAutoFit/>
+          </a:bodyPr>
+          <a:lstStyle/>
+          <a:p>
+            <a:pPr algn="l"/>
+            <a:r>
+              <a:rPr sz="2000" b="1">
+                <a:solidFill>
+                  <a:srgbClr val="185FCB"/>
+                </a:solidFill>
+                <a:latin typeface="Calibri"/>
+              </a:rPr>
+              <a:t>Expected analysis surface</a:t>
+            </a:r>
+          </a:p>
+        </p:txBody>
+      </p:sp>
+      <p:sp>
+        <p:nvSpPr>
+          <p:cNvPr id="15" name="TextBox 14"/>
+          <p:cNvSpPr txBox="1"/>
+          <p:nvPr/>
+        </p:nvSpPr>
+        <p:spPr>
+          <a:xfrm>
+            <a:off x="6812280" y="2487168"/>
+            <a:ext cx="4297680" cy="3337560"/>
+          </a:xfrm>
+          <a:prstGeom prst="rect">
+            <a:avLst/>
+          </a:prstGeom>
+          <a:noFill/>
+        </p:spPr>
+        <p:txBody>
+          <a:bodyPr wrap="none">
+            <a:spAutoFit/>
+          </a:bodyPr>
+          <a:lstStyle/>
+          <a:p>
+            <a:pPr algn="l"/>
+            <a:r>
+              <a:rPr sz="1500" b="0">
+                <a:solidFill>
+                  <a:srgbClr val="13233A"/>
+                </a:solidFill>
+                <a:latin typeface="Calibri"/>
+              </a:rPr>
+              <a:t>• Root cause hypothesis</a:t>
+            </a:r>
+          </a:p>
+          <a:p>
+            <a:pPr algn="l"/>
+            <a:r>
+              <a:rPr sz="1500" b="0">
+                <a:solidFill>
+                  <a:srgbClr val="13233A"/>
+                </a:solidFill>
+                <a:latin typeface="Calibri"/>
+              </a:rPr>
+              <a:t>• Intervention simulation</a:t>
+            </a:r>
+          </a:p>
+          <a:p>
+            <a:pPr algn="l"/>
+            <a:r>
+              <a:rPr sz="1500" b="0">
+                <a:solidFill>
+                  <a:srgbClr val="13233A"/>
+                </a:solidFill>
+                <a:latin typeface="Calibri"/>
+              </a:rPr>
+              <a:t>• Causal DAG rendering</a:t>
+            </a:r>
+          </a:p>
+          <a:p>
+            <a:pPr algn="l"/>
+            <a:r>
+              <a:rPr sz="1500" b="0">
+                <a:solidFill>
+                  <a:srgbClr val="13233A"/>
+                </a:solidFill>
+                <a:latin typeface="Calibri"/>
+              </a:rPr>
+              <a:t>• Evidence + confidence</a:t>
+            </a:r>
+          </a:p>
+          <a:p>
+            <a:pPr algn="l"/>
+            <a:r>
+              <a:rPr sz="1500" b="0">
+                <a:solidFill>
+                  <a:srgbClr val="13233A"/>
+                </a:solidFill>
+                <a:latin typeface="Calibri"/>
+              </a:rPr>
+              <a:t>• Human approval requirement</a:t>
             </a:r>
           </a:p>
         </p:txBody>
@@ -4985,7 +7093,7 @@
             <a:avLst/>
           </a:prstGeom>
           <a:solidFill>
-            <a:srgbClr val="F5F9FF"/>
+            <a:srgbClr val="F2F7FF"/>
           </a:solidFill>
           <a:ln>
             <a:noFill/>
@@ -5015,14 +7123,143 @@
       </p:sp>
       <p:sp>
         <p:nvSpPr>
-          <p:cNvPr id="3" name="TextBox 2"/>
+          <p:cNvPr id="3" name="Rectangle 2"/>
+          <p:cNvSpPr/>
+          <p:nvPr/>
+        </p:nvSpPr>
+        <p:spPr>
+          <a:xfrm>
+            <a:off x="0" y="0"/>
+            <a:ext cx="12191695" cy="256032"/>
+          </a:xfrm>
+          <a:prstGeom prst="rect">
+            <a:avLst/>
+          </a:prstGeom>
+          <a:solidFill>
+            <a:srgbClr val="185FCB"/>
+          </a:solidFill>
+          <a:ln>
+            <a:noFill/>
+          </a:ln>
+        </p:spPr>
+        <p:style>
+          <a:lnRef idx="1">
+            <a:schemeClr val="accent1"/>
+          </a:lnRef>
+          <a:fillRef idx="3">
+            <a:schemeClr val="accent1"/>
+          </a:fillRef>
+          <a:effectRef idx="2">
+            <a:schemeClr val="accent1"/>
+          </a:effectRef>
+          <a:fontRef idx="minor">
+            <a:schemeClr val="lt1"/>
+          </a:fontRef>
+        </p:style>
+        <p:txBody>
+          <a:bodyPr rtlCol="0" anchor="ctr"/>
+          <a:lstStyle/>
+          <a:p>
+            <a:pPr algn="ctr"/>
+          </a:p>
+        </p:txBody>
+      </p:sp>
+      <p:sp>
+        <p:nvSpPr>
+          <p:cNvPr id="4" name="Oval 3"/>
+          <p:cNvSpPr/>
+          <p:nvPr/>
+        </p:nvSpPr>
+        <p:spPr>
+          <a:xfrm>
+            <a:off x="-1097280" y="-914400"/>
+            <a:ext cx="3474720" cy="2926080"/>
+          </a:xfrm>
+          <a:prstGeom prst="ellipse">
+            <a:avLst/>
+          </a:prstGeom>
+          <a:solidFill>
+            <a:srgbClr val="E7F0FF"/>
+          </a:solidFill>
+          <a:ln>
+            <a:noFill/>
+          </a:ln>
+        </p:spPr>
+        <p:style>
+          <a:lnRef idx="1">
+            <a:schemeClr val="accent1"/>
+          </a:lnRef>
+          <a:fillRef idx="3">
+            <a:schemeClr val="accent1"/>
+          </a:fillRef>
+          <a:effectRef idx="2">
+            <a:schemeClr val="accent1"/>
+          </a:effectRef>
+          <a:fontRef idx="minor">
+            <a:schemeClr val="lt1"/>
+          </a:fontRef>
+        </p:style>
+        <p:txBody>
+          <a:bodyPr rtlCol="0" anchor="ctr"/>
+          <a:lstStyle/>
+          <a:p>
+            <a:pPr algn="ctr"/>
+          </a:p>
+        </p:txBody>
+      </p:sp>
+      <p:sp>
+        <p:nvSpPr>
+          <p:cNvPr id="5" name="Oval 4"/>
+          <p:cNvSpPr/>
+          <p:nvPr/>
+        </p:nvSpPr>
+        <p:spPr>
+          <a:xfrm>
+            <a:off x="9875520" y="-731520"/>
+            <a:ext cx="2926080" cy="2560320"/>
+          </a:xfrm>
+          <a:prstGeom prst="ellipse">
+            <a:avLst/>
+          </a:prstGeom>
+          <a:solidFill>
+            <a:srgbClr val="E3F7F4"/>
+          </a:solidFill>
+          <a:ln>
+            <a:noFill/>
+          </a:ln>
+        </p:spPr>
+        <p:style>
+          <a:lnRef idx="1">
+            <a:schemeClr val="accent1"/>
+          </a:lnRef>
+          <a:fillRef idx="3">
+            <a:schemeClr val="accent1"/>
+          </a:fillRef>
+          <a:effectRef idx="2">
+            <a:schemeClr val="accent1"/>
+          </a:effectRef>
+          <a:fontRef idx="minor">
+            <a:schemeClr val="lt1"/>
+          </a:fontRef>
+        </p:style>
+        <p:txBody>
+          <a:bodyPr rtlCol="0" anchor="ctr"/>
+          <a:lstStyle/>
+          <a:p>
+            <a:pPr algn="ctr"/>
+          </a:p>
+        </p:txBody>
+      </p:sp>
+      <p:sp>
+        <p:nvSpPr>
+          <p:cNvPr id="6" name="TextBox 5"/>
           <p:cNvSpPr txBox="1"/>
           <p:nvPr/>
         </p:nvSpPr>
         <p:spPr>
           <a:xfrm>
-            <a:off x="640080" y="457200"/>
-            <a:ext cx="10881360" cy="1371600"/>
+            <a:off x="658368" y="420624"/>
+            <a:ext cx="8138160" cy="658368"/>
           </a:xfrm>
           <a:prstGeom prst="rect">
             <a:avLst/>
@@ -5035,28 +7272,29 @@
           </a:bodyPr>
           <a:lstStyle/>
           <a:p>
-            <a:r>
-              <a:rPr sz="3600" b="1">
-                <a:solidFill>
-                  <a:srgbClr val="14243A"/>
-                </a:solidFill>
-                <a:latin typeface="Calibri"/>
-              </a:rPr>
-              <a:t>Live Workflow</a:t>
-            </a:r>
-          </a:p>
-        </p:txBody>
-      </p:sp>
-      <p:sp>
-        <p:nvSpPr>
-          <p:cNvPr id="4" name="TextBox 3"/>
+            <a:pPr algn="l"/>
+            <a:r>
+              <a:rPr sz="3500" b="1">
+                <a:solidFill>
+                  <a:srgbClr val="13233A"/>
+                </a:solidFill>
+                <a:latin typeface="Calibri"/>
+              </a:rPr>
+              <a:t>Demonstration Flow (1/2)</a:t>
+            </a:r>
+          </a:p>
+        </p:txBody>
+      </p:sp>
+      <p:sp>
+        <p:nvSpPr>
+          <p:cNvPr id="7" name="TextBox 6"/>
           <p:cNvSpPr txBox="1"/>
           <p:nvPr/>
         </p:nvSpPr>
         <p:spPr>
           <a:xfrm>
-            <a:off x="685800" y="1417320"/>
-            <a:ext cx="10789920" cy="1097280"/>
+            <a:off x="685800" y="1115568"/>
+            <a:ext cx="9692640" cy="457200"/>
           </a:xfrm>
           <a:prstGeom prst="rect">
             <a:avLst/>
@@ -5069,28 +7307,74 @@
           </a:bodyPr>
           <a:lstStyle/>
           <a:p>
-            <a:r>
-              <a:rPr sz="1800" b="0">
-                <a:solidFill>
-                  <a:srgbClr val="4D607A"/>
-                </a:solidFill>
-                <a:latin typeface="Calibri"/>
-              </a:rPr>
-              <a:t>How an incident run looks end-to-end</a:t>
-            </a:r>
-          </a:p>
-        </p:txBody>
-      </p:sp>
-      <p:sp>
-        <p:nvSpPr>
-          <p:cNvPr id="5" name="TextBox 4"/>
+            <a:pPr algn="l"/>
+            <a:r>
+              <a:rPr sz="1700" b="0">
+                <a:solidFill>
+                  <a:srgbClr val="4E6380"/>
+                </a:solidFill>
+                <a:latin typeface="Calibri"/>
+              </a:rPr>
+              <a:t>From incident brief to generated analysis</a:t>
+            </a:r>
+          </a:p>
+        </p:txBody>
+      </p:sp>
+      <p:sp>
+        <p:nvSpPr>
+          <p:cNvPr id="8" name="Rounded Rectangle 7"/>
+          <p:cNvSpPr/>
+          <p:nvPr/>
+        </p:nvSpPr>
+        <p:spPr>
+          <a:xfrm>
+            <a:off x="9464040" y="484632"/>
+            <a:ext cx="2011680" cy="438912"/>
+          </a:xfrm>
+          <a:prstGeom prst="roundRect">
+            <a:avLst/>
+          </a:prstGeom>
+          <a:solidFill>
+            <a:srgbClr val="E7F0FF"/>
+          </a:solidFill>
+          <a:ln>
+            <a:solidFill>
+              <a:srgbClr val="C4D5E9"/>
+            </a:solidFill>
+          </a:ln>
+        </p:spPr>
+        <p:style>
+          <a:lnRef idx="1">
+            <a:schemeClr val="accent1"/>
+          </a:lnRef>
+          <a:fillRef idx="3">
+            <a:schemeClr val="accent1"/>
+          </a:fillRef>
+          <a:effectRef idx="2">
+            <a:schemeClr val="accent1"/>
+          </a:effectRef>
+          <a:fontRef idx="minor">
+            <a:schemeClr val="lt1"/>
+          </a:fontRef>
+        </p:style>
+        <p:txBody>
+          <a:bodyPr rtlCol="0" anchor="ctr"/>
+          <a:lstStyle/>
+          <a:p>
+            <a:pPr algn="ctr"/>
+          </a:p>
+        </p:txBody>
+      </p:sp>
+      <p:sp>
+        <p:nvSpPr>
+          <p:cNvPr id="9" name="TextBox 8"/>
           <p:cNvSpPr txBox="1"/>
           <p:nvPr/>
         </p:nvSpPr>
         <p:spPr>
           <a:xfrm>
-            <a:off x="822960" y="1920240"/>
-            <a:ext cx="10698480" cy="548640"/>
+            <a:off x="9619488" y="548640"/>
+            <a:ext cx="1737360" cy="274320"/>
           </a:xfrm>
           <a:prstGeom prst="rect">
             <a:avLst/>
@@ -5103,28 +7387,29 @@
           </a:bodyPr>
           <a:lstStyle/>
           <a:p>
-            <a:r>
-              <a:rPr sz="2400" b="1">
-                <a:solidFill>
-                  <a:srgbClr val="2166CF"/>
-                </a:solidFill>
-                <a:latin typeface="Calibri"/>
-              </a:rPr>
-              <a:t>Operator flow</a:t>
-            </a:r>
-          </a:p>
-        </p:txBody>
-      </p:sp>
-      <p:sp>
-        <p:nvSpPr>
-          <p:cNvPr id="6" name="Rounded Rectangle 5"/>
+            <a:pPr algn="ctr"/>
+            <a:r>
+              <a:rPr sz="1100" b="1">
+                <a:solidFill>
+                  <a:srgbClr val="185FCB"/>
+                </a:solidFill>
+                <a:latin typeface="Calibri"/>
+              </a:rPr>
+              <a:t>DEMO STEP 2</a:t>
+            </a:r>
+          </a:p>
+        </p:txBody>
+      </p:sp>
+      <p:sp>
+        <p:nvSpPr>
+          <p:cNvPr id="10" name="Rounded Rectangle 9"/>
           <p:cNvSpPr/>
           <p:nvPr/>
         </p:nvSpPr>
         <p:spPr>
           <a:xfrm>
-            <a:off x="731520" y="2423160"/>
-            <a:ext cx="10789920" cy="2103120"/>
+            <a:off x="777240" y="1783080"/>
+            <a:ext cx="10972800" cy="1078992"/>
           </a:xfrm>
           <a:prstGeom prst="roundRect">
             <a:avLst/>
@@ -5134,7 +7419,7 @@
           </a:solidFill>
           <a:ln>
             <a:solidFill>
-              <a:srgbClr val="C2D3E8"/>
+              <a:srgbClr val="C4D5E9"/>
             </a:solidFill>
           </a:ln>
         </p:spPr>
@@ -5157,50 +7442,317 @@
           <a:lstStyle/>
           <a:p>
             <a:pPr algn="ctr"/>
-            <a:r>
-              <a:rPr sz="1800" b="0">
-                <a:solidFill>
-                  <a:srgbClr val="14243A"/>
-                </a:solidFill>
-                <a:latin typeface="Calibri"/>
-              </a:rPr>
-              <a:t>1. Describe incident signal/impact/change context.</a:t>
-            </a:r>
-          </a:p>
-          <a:p>
-            <a:pPr/>
-            <a:r>
-              <a:rPr sz="1800" b="0">
-                <a:solidFill>
-                  <a:srgbClr val="14243A"/>
-                </a:solidFill>
-                <a:latin typeface="Calibri"/>
-              </a:rPr>
-              <a:t>2. Run analysis and inspect causal graph + evidence.</a:t>
-            </a:r>
-          </a:p>
-          <a:p>
-            <a:pPr/>
-            <a:r>
-              <a:rPr sz="1800" b="0">
-                <a:solidFill>
-                  <a:srgbClr val="14243A"/>
-                </a:solidFill>
-                <a:latin typeface="Calibri"/>
-              </a:rPr>
-              <a:t>3. Review recommended intervention and safety check.</a:t>
-            </a:r>
-          </a:p>
-          <a:p>
-            <a:pPr/>
-            <a:r>
-              <a:rPr sz="1800" b="0">
-                <a:solidFill>
-                  <a:srgbClr val="14243A"/>
-                </a:solidFill>
-                <a:latin typeface="Calibri"/>
-              </a:rPr>
-              <a:t>4. Authorize manually, then submit analyst feedback.</a:t>
+          </a:p>
+        </p:txBody>
+      </p:sp>
+      <p:sp>
+        <p:nvSpPr>
+          <p:cNvPr id="11" name="TextBox 10"/>
+          <p:cNvSpPr txBox="1"/>
+          <p:nvPr/>
+        </p:nvSpPr>
+        <p:spPr>
+          <a:xfrm>
+            <a:off x="1005840" y="1947672"/>
+            <a:ext cx="10515600" cy="457200"/>
+          </a:xfrm>
+          <a:prstGeom prst="rect">
+            <a:avLst/>
+          </a:prstGeom>
+          <a:noFill/>
+        </p:spPr>
+        <p:txBody>
+          <a:bodyPr wrap="none">
+            <a:spAutoFit/>
+          </a:bodyPr>
+          <a:lstStyle/>
+          <a:p>
+            <a:pPr algn="l"/>
+            <a:r>
+              <a:rPr sz="2000" b="1">
+                <a:solidFill>
+                  <a:srgbClr val="13233A"/>
+                </a:solidFill>
+                <a:latin typeface="Calibri"/>
+              </a:rPr>
+              <a:t>0:00-0:20</a:t>
+            </a:r>
+          </a:p>
+        </p:txBody>
+      </p:sp>
+      <p:sp>
+        <p:nvSpPr>
+          <p:cNvPr id="12" name="TextBox 11"/>
+          <p:cNvSpPr txBox="1"/>
+          <p:nvPr/>
+        </p:nvSpPr>
+        <p:spPr>
+          <a:xfrm>
+            <a:off x="1005840" y="2441448"/>
+            <a:ext cx="10515600" cy="256031"/>
+          </a:xfrm>
+          <a:prstGeom prst="rect">
+            <a:avLst/>
+          </a:prstGeom>
+          <a:noFill/>
+        </p:spPr>
+        <p:txBody>
+          <a:bodyPr wrap="none">
+            <a:spAutoFit/>
+          </a:bodyPr>
+          <a:lstStyle/>
+          <a:p>
+            <a:pPr algn="l"/>
+            <a:r>
+              <a:rPr sz="1500" b="0">
+                <a:solidFill>
+                  <a:srgbClr val="13233A"/>
+                </a:solidFill>
+                <a:latin typeface="Calibri"/>
+              </a:rPr>
+              <a:t>Open runtime, describe incident context, generate final brief.</a:t>
+            </a:r>
+          </a:p>
+        </p:txBody>
+      </p:sp>
+      <p:sp>
+        <p:nvSpPr>
+          <p:cNvPr id="13" name="Rounded Rectangle 12"/>
+          <p:cNvSpPr/>
+          <p:nvPr/>
+        </p:nvSpPr>
+        <p:spPr>
+          <a:xfrm>
+            <a:off x="777240" y="2971800"/>
+            <a:ext cx="10972800" cy="1078992"/>
+          </a:xfrm>
+          <a:prstGeom prst="roundRect">
+            <a:avLst/>
+          </a:prstGeom>
+          <a:solidFill>
+            <a:srgbClr val="E7F0FF"/>
+          </a:solidFill>
+          <a:ln>
+            <a:solidFill>
+              <a:srgbClr val="C4D5E9"/>
+            </a:solidFill>
+          </a:ln>
+        </p:spPr>
+        <p:style>
+          <a:lnRef idx="1">
+            <a:schemeClr val="accent1"/>
+          </a:lnRef>
+          <a:fillRef idx="3">
+            <a:schemeClr val="accent1"/>
+          </a:fillRef>
+          <a:effectRef idx="2">
+            <a:schemeClr val="accent1"/>
+          </a:effectRef>
+          <a:fontRef idx="minor">
+            <a:schemeClr val="lt1"/>
+          </a:fontRef>
+        </p:style>
+        <p:txBody>
+          <a:bodyPr rtlCol="0" anchor="ctr"/>
+          <a:lstStyle/>
+          <a:p>
+            <a:pPr algn="ctr"/>
+          </a:p>
+        </p:txBody>
+      </p:sp>
+      <p:sp>
+        <p:nvSpPr>
+          <p:cNvPr id="14" name="TextBox 13"/>
+          <p:cNvSpPr txBox="1"/>
+          <p:nvPr/>
+        </p:nvSpPr>
+        <p:spPr>
+          <a:xfrm>
+            <a:off x="1005840" y="3136392"/>
+            <a:ext cx="10515600" cy="457200"/>
+          </a:xfrm>
+          <a:prstGeom prst="rect">
+            <a:avLst/>
+          </a:prstGeom>
+          <a:noFill/>
+        </p:spPr>
+        <p:txBody>
+          <a:bodyPr wrap="none">
+            <a:spAutoFit/>
+          </a:bodyPr>
+          <a:lstStyle/>
+          <a:p>
+            <a:pPr algn="l"/>
+            <a:r>
+              <a:rPr sz="2000" b="1">
+                <a:solidFill>
+                  <a:srgbClr val="185FCB"/>
+                </a:solidFill>
+                <a:latin typeface="Calibri"/>
+              </a:rPr>
+              <a:t>0:20-0:40</a:t>
+            </a:r>
+          </a:p>
+        </p:txBody>
+      </p:sp>
+      <p:sp>
+        <p:nvSpPr>
+          <p:cNvPr id="15" name="TextBox 14"/>
+          <p:cNvSpPr txBox="1"/>
+          <p:nvPr/>
+        </p:nvSpPr>
+        <p:spPr>
+          <a:xfrm>
+            <a:off x="1005840" y="3630168"/>
+            <a:ext cx="10515600" cy="256031"/>
+          </a:xfrm>
+          <a:prstGeom prst="rect">
+            <a:avLst/>
+          </a:prstGeom>
+          <a:noFill/>
+        </p:spPr>
+        <p:txBody>
+          <a:bodyPr wrap="none">
+            <a:spAutoFit/>
+          </a:bodyPr>
+          <a:lstStyle/>
+          <a:p>
+            <a:pPr algn="l"/>
+            <a:r>
+              <a:rPr sz="1500" b="0">
+                <a:solidFill>
+                  <a:srgbClr val="13233A"/>
+                </a:solidFill>
+                <a:latin typeface="Calibri"/>
+              </a:rPr>
+              <a:t>Run Analyze Incident and show stage/status transitions.</a:t>
+            </a:r>
+          </a:p>
+        </p:txBody>
+      </p:sp>
+      <p:sp>
+        <p:nvSpPr>
+          <p:cNvPr id="16" name="Rounded Rectangle 15"/>
+          <p:cNvSpPr/>
+          <p:nvPr/>
+        </p:nvSpPr>
+        <p:spPr>
+          <a:xfrm>
+            <a:off x="777240" y="4160520"/>
+            <a:ext cx="10972800" cy="1737360"/>
+          </a:xfrm>
+          <a:prstGeom prst="roundRect">
+            <a:avLst/>
+          </a:prstGeom>
+          <a:solidFill>
+            <a:srgbClr val="E3F7F4"/>
+          </a:solidFill>
+          <a:ln>
+            <a:solidFill>
+              <a:srgbClr val="C4D5E9"/>
+            </a:solidFill>
+          </a:ln>
+        </p:spPr>
+        <p:style>
+          <a:lnRef idx="1">
+            <a:schemeClr val="accent1"/>
+          </a:lnRef>
+          <a:fillRef idx="3">
+            <a:schemeClr val="accent1"/>
+          </a:fillRef>
+          <a:effectRef idx="2">
+            <a:schemeClr val="accent1"/>
+          </a:effectRef>
+          <a:fontRef idx="minor">
+            <a:schemeClr val="lt1"/>
+          </a:fontRef>
+        </p:style>
+        <p:txBody>
+          <a:bodyPr rtlCol="0" anchor="ctr"/>
+          <a:lstStyle/>
+          <a:p>
+            <a:pPr algn="ctr"/>
+          </a:p>
+        </p:txBody>
+      </p:sp>
+      <p:sp>
+        <p:nvSpPr>
+          <p:cNvPr id="17" name="TextBox 16"/>
+          <p:cNvSpPr txBox="1"/>
+          <p:nvPr/>
+        </p:nvSpPr>
+        <p:spPr>
+          <a:xfrm>
+            <a:off x="1005840" y="4325112"/>
+            <a:ext cx="10515600" cy="457200"/>
+          </a:xfrm>
+          <a:prstGeom prst="rect">
+            <a:avLst/>
+          </a:prstGeom>
+          <a:noFill/>
+        </p:spPr>
+        <p:txBody>
+          <a:bodyPr wrap="none">
+            <a:spAutoFit/>
+          </a:bodyPr>
+          <a:lstStyle/>
+          <a:p>
+            <a:pPr algn="l"/>
+            <a:r>
+              <a:rPr sz="2000" b="1">
+                <a:solidFill>
+                  <a:srgbClr val="0A7F78"/>
+                </a:solidFill>
+                <a:latin typeface="Calibri"/>
+              </a:rPr>
+              <a:t>What to narrate</a:t>
+            </a:r>
+          </a:p>
+        </p:txBody>
+      </p:sp>
+      <p:sp>
+        <p:nvSpPr>
+          <p:cNvPr id="18" name="TextBox 17"/>
+          <p:cNvSpPr txBox="1"/>
+          <p:nvPr/>
+        </p:nvSpPr>
+        <p:spPr>
+          <a:xfrm>
+            <a:off x="1005840" y="4818888"/>
+            <a:ext cx="10515600" cy="914399"/>
+          </a:xfrm>
+          <a:prstGeom prst="rect">
+            <a:avLst/>
+          </a:prstGeom>
+          <a:noFill/>
+        </p:spPr>
+        <p:txBody>
+          <a:bodyPr wrap="none">
+            <a:spAutoFit/>
+          </a:bodyPr>
+          <a:lstStyle/>
+          <a:p>
+            <a:pPr algn="l"/>
+            <a:r>
+              <a:rPr sz="1500" b="0">
+                <a:solidFill>
+                  <a:srgbClr val="4E6380"/>
+                </a:solidFill>
+                <a:latin typeface="Calibri"/>
+              </a:rPr>
+              <a:t>Vanilla LLM outputs can sound correct but still be risky.</a:t>
+            </a:r>
+          </a:p>
+          <a:p>
+            <a:pPr algn="l"/>
+            <a:r>
+              <a:rPr sz="1500" b="0">
+                <a:solidFill>
+                  <a:srgbClr val="4E6380"/>
+                </a:solidFill>
+                <a:latin typeface="Calibri"/>
+              </a:rPr>
+              <a:t>This flow forces structure, tool-grounding, and explicit safety context.</a:t>
             </a:r>
           </a:p>
         </p:txBody>
@@ -5238,7 +7790,7 @@
             <a:avLst/>
           </a:prstGeom>
           <a:solidFill>
-            <a:srgbClr val="F5F9FF"/>
+            <a:srgbClr val="F2F7FF"/>
           </a:solidFill>
           <a:ln>
             <a:noFill/>
@@ -5268,14 +7820,143 @@
       </p:sp>
       <p:sp>
         <p:nvSpPr>
-          <p:cNvPr id="3" name="TextBox 2"/>
+          <p:cNvPr id="3" name="Rectangle 2"/>
+          <p:cNvSpPr/>
+          <p:nvPr/>
+        </p:nvSpPr>
+        <p:spPr>
+          <a:xfrm>
+            <a:off x="0" y="0"/>
+            <a:ext cx="12191695" cy="256032"/>
+          </a:xfrm>
+          <a:prstGeom prst="rect">
+            <a:avLst/>
+          </a:prstGeom>
+          <a:solidFill>
+            <a:srgbClr val="185FCB"/>
+          </a:solidFill>
+          <a:ln>
+            <a:noFill/>
+          </a:ln>
+        </p:spPr>
+        <p:style>
+          <a:lnRef idx="1">
+            <a:schemeClr val="accent1"/>
+          </a:lnRef>
+          <a:fillRef idx="3">
+            <a:schemeClr val="accent1"/>
+          </a:fillRef>
+          <a:effectRef idx="2">
+            <a:schemeClr val="accent1"/>
+          </a:effectRef>
+          <a:fontRef idx="minor">
+            <a:schemeClr val="lt1"/>
+          </a:fontRef>
+        </p:style>
+        <p:txBody>
+          <a:bodyPr rtlCol="0" anchor="ctr"/>
+          <a:lstStyle/>
+          <a:p>
+            <a:pPr algn="ctr"/>
+          </a:p>
+        </p:txBody>
+      </p:sp>
+      <p:sp>
+        <p:nvSpPr>
+          <p:cNvPr id="4" name="Oval 3"/>
+          <p:cNvSpPr/>
+          <p:nvPr/>
+        </p:nvSpPr>
+        <p:spPr>
+          <a:xfrm>
+            <a:off x="-1097280" y="-914400"/>
+            <a:ext cx="3474720" cy="2926080"/>
+          </a:xfrm>
+          <a:prstGeom prst="ellipse">
+            <a:avLst/>
+          </a:prstGeom>
+          <a:solidFill>
+            <a:srgbClr val="E7F0FF"/>
+          </a:solidFill>
+          <a:ln>
+            <a:noFill/>
+          </a:ln>
+        </p:spPr>
+        <p:style>
+          <a:lnRef idx="1">
+            <a:schemeClr val="accent1"/>
+          </a:lnRef>
+          <a:fillRef idx="3">
+            <a:schemeClr val="accent1"/>
+          </a:fillRef>
+          <a:effectRef idx="2">
+            <a:schemeClr val="accent1"/>
+          </a:effectRef>
+          <a:fontRef idx="minor">
+            <a:schemeClr val="lt1"/>
+          </a:fontRef>
+        </p:style>
+        <p:txBody>
+          <a:bodyPr rtlCol="0" anchor="ctr"/>
+          <a:lstStyle/>
+          <a:p>
+            <a:pPr algn="ctr"/>
+          </a:p>
+        </p:txBody>
+      </p:sp>
+      <p:sp>
+        <p:nvSpPr>
+          <p:cNvPr id="5" name="Oval 4"/>
+          <p:cNvSpPr/>
+          <p:nvPr/>
+        </p:nvSpPr>
+        <p:spPr>
+          <a:xfrm>
+            <a:off x="9875520" y="-731520"/>
+            <a:ext cx="2926080" cy="2560320"/>
+          </a:xfrm>
+          <a:prstGeom prst="ellipse">
+            <a:avLst/>
+          </a:prstGeom>
+          <a:solidFill>
+            <a:srgbClr val="E3F7F4"/>
+          </a:solidFill>
+          <a:ln>
+            <a:noFill/>
+          </a:ln>
+        </p:spPr>
+        <p:style>
+          <a:lnRef idx="1">
+            <a:schemeClr val="accent1"/>
+          </a:lnRef>
+          <a:fillRef idx="3">
+            <a:schemeClr val="accent1"/>
+          </a:fillRef>
+          <a:effectRef idx="2">
+            <a:schemeClr val="accent1"/>
+          </a:effectRef>
+          <a:fontRef idx="minor">
+            <a:schemeClr val="lt1"/>
+          </a:fontRef>
+        </p:style>
+        <p:txBody>
+          <a:bodyPr rtlCol="0" anchor="ctr"/>
+          <a:lstStyle/>
+          <a:p>
+            <a:pPr algn="ctr"/>
+          </a:p>
+        </p:txBody>
+      </p:sp>
+      <p:sp>
+        <p:nvSpPr>
+          <p:cNvPr id="6" name="TextBox 5"/>
           <p:cNvSpPr txBox="1"/>
           <p:nvPr/>
         </p:nvSpPr>
         <p:spPr>
           <a:xfrm>
-            <a:off x="640080" y="457200"/>
-            <a:ext cx="10881360" cy="1371600"/>
+            <a:off x="658368" y="420624"/>
+            <a:ext cx="8138160" cy="658368"/>
           </a:xfrm>
           <a:prstGeom prst="rect">
             <a:avLst/>
@@ -5288,28 +7969,29 @@
           </a:bodyPr>
           <a:lstStyle/>
           <a:p>
-            <a:r>
-              <a:rPr sz="3600" b="1">
-                <a:solidFill>
-                  <a:srgbClr val="14243A"/>
-                </a:solidFill>
-                <a:latin typeface="Calibri"/>
-              </a:rPr>
-              <a:t>Demo Script</a:t>
-            </a:r>
-          </a:p>
-        </p:txBody>
-      </p:sp>
-      <p:sp>
-        <p:nvSpPr>
-          <p:cNvPr id="4" name="TextBox 3"/>
+            <a:pPr algn="l"/>
+            <a:r>
+              <a:rPr sz="3500" b="1">
+                <a:solidFill>
+                  <a:srgbClr val="13233A"/>
+                </a:solidFill>
+                <a:latin typeface="Calibri"/>
+              </a:rPr>
+              <a:t>Demonstration Flow (2/2)</a:t>
+            </a:r>
+          </a:p>
+        </p:txBody>
+      </p:sp>
+      <p:sp>
+        <p:nvSpPr>
+          <p:cNvPr id="7" name="TextBox 6"/>
           <p:cNvSpPr txBox="1"/>
           <p:nvPr/>
         </p:nvSpPr>
         <p:spPr>
           <a:xfrm>
-            <a:off x="685800" y="1417320"/>
-            <a:ext cx="10789920" cy="1097280"/>
+            <a:off x="685800" y="1115568"/>
+            <a:ext cx="9692640" cy="457200"/>
           </a:xfrm>
           <a:prstGeom prst="rect">
             <a:avLst/>
@@ -5322,28 +8004,74 @@
           </a:bodyPr>
           <a:lstStyle/>
           <a:p>
-            <a:r>
-              <a:rPr sz="1800" b="0">
-                <a:solidFill>
-                  <a:srgbClr val="4D607A"/>
-                </a:solidFill>
-                <a:latin typeface="Calibri"/>
-              </a:rPr>
-              <a:t>Suggested 90-second walkthrough</a:t>
-            </a:r>
-          </a:p>
-        </p:txBody>
-      </p:sp>
-      <p:sp>
-        <p:nvSpPr>
-          <p:cNvPr id="5" name="TextBox 4"/>
+            <a:pPr algn="l"/>
+            <a:r>
+              <a:rPr sz="1700" b="0">
+                <a:solidFill>
+                  <a:srgbClr val="4E6380"/>
+                </a:solidFill>
+                <a:latin typeface="Calibri"/>
+              </a:rPr>
+              <a:t>From causal graph review to safe operator action</a:t>
+            </a:r>
+          </a:p>
+        </p:txBody>
+      </p:sp>
+      <p:sp>
+        <p:nvSpPr>
+          <p:cNvPr id="8" name="Rounded Rectangle 7"/>
+          <p:cNvSpPr/>
+          <p:nvPr/>
+        </p:nvSpPr>
+        <p:spPr>
+          <a:xfrm>
+            <a:off x="9464040" y="484632"/>
+            <a:ext cx="2011680" cy="438912"/>
+          </a:xfrm>
+          <a:prstGeom prst="roundRect">
+            <a:avLst/>
+          </a:prstGeom>
+          <a:solidFill>
+            <a:srgbClr val="E7F0FF"/>
+          </a:solidFill>
+          <a:ln>
+            <a:solidFill>
+              <a:srgbClr val="C4D5E9"/>
+            </a:solidFill>
+          </a:ln>
+        </p:spPr>
+        <p:style>
+          <a:lnRef idx="1">
+            <a:schemeClr val="accent1"/>
+          </a:lnRef>
+          <a:fillRef idx="3">
+            <a:schemeClr val="accent1"/>
+          </a:fillRef>
+          <a:effectRef idx="2">
+            <a:schemeClr val="accent1"/>
+          </a:effectRef>
+          <a:fontRef idx="minor">
+            <a:schemeClr val="lt1"/>
+          </a:fontRef>
+        </p:style>
+        <p:txBody>
+          <a:bodyPr rtlCol="0" anchor="ctr"/>
+          <a:lstStyle/>
+          <a:p>
+            <a:pPr algn="ctr"/>
+          </a:p>
+        </p:txBody>
+      </p:sp>
+      <p:sp>
+        <p:nvSpPr>
+          <p:cNvPr id="9" name="TextBox 8"/>
           <p:cNvSpPr txBox="1"/>
           <p:nvPr/>
         </p:nvSpPr>
         <p:spPr>
           <a:xfrm>
-            <a:off x="822960" y="1920240"/>
-            <a:ext cx="10698480" cy="548640"/>
+            <a:off x="9619488" y="548640"/>
+            <a:ext cx="1737360" cy="274320"/>
           </a:xfrm>
           <a:prstGeom prst="rect">
             <a:avLst/>
@@ -5356,28 +8084,29 @@
           </a:bodyPr>
           <a:lstStyle/>
           <a:p>
-            <a:r>
-              <a:rPr sz="2400" b="1">
-                <a:solidFill>
-                  <a:srgbClr val="2166CF"/>
-                </a:solidFill>
-                <a:latin typeface="Calibri"/>
-              </a:rPr>
-              <a:t>Timeline</a:t>
-            </a:r>
-          </a:p>
-        </p:txBody>
-      </p:sp>
-      <p:sp>
-        <p:nvSpPr>
-          <p:cNvPr id="6" name="Rounded Rectangle 5"/>
+            <a:pPr algn="ctr"/>
+            <a:r>
+              <a:rPr sz="1100" b="1">
+                <a:solidFill>
+                  <a:srgbClr val="185FCB"/>
+                </a:solidFill>
+                <a:latin typeface="Calibri"/>
+              </a:rPr>
+              <a:t>DEMO STEP 3</a:t>
+            </a:r>
+          </a:p>
+        </p:txBody>
+      </p:sp>
+      <p:sp>
+        <p:nvSpPr>
+          <p:cNvPr id="10" name="Rounded Rectangle 9"/>
           <p:cNvSpPr/>
           <p:nvPr/>
         </p:nvSpPr>
         <p:spPr>
           <a:xfrm>
-            <a:off x="731520" y="2423160"/>
-            <a:ext cx="10789920" cy="2103120"/>
+            <a:off x="777240" y="1783080"/>
+            <a:ext cx="5349240" cy="1965960"/>
           </a:xfrm>
           <a:prstGeom prst="roundRect">
             <a:avLst/>
@@ -5387,7 +8116,7 @@
           </a:solidFill>
           <a:ln>
             <a:solidFill>
-              <a:srgbClr val="C2D3E8"/>
+              <a:srgbClr val="C4D5E9"/>
             </a:solidFill>
           </a:ln>
         </p:spPr>
@@ -5410,50 +8139,377 @@
           <a:lstStyle/>
           <a:p>
             <a:pPr algn="ctr"/>
-            <a:r>
-              <a:rPr sz="1800" b="0">
-                <a:solidFill>
-                  <a:srgbClr val="14243A"/>
-                </a:solidFill>
-                <a:latin typeface="Calibri"/>
-              </a:rPr>
-              <a:t>• 0:00-0:20: Incident framing and objective.</a:t>
-            </a:r>
-          </a:p>
-          <a:p>
-            <a:pPr/>
-            <a:r>
-              <a:rPr sz="1800" b="0">
-                <a:solidFill>
-                  <a:srgbClr val="14243A"/>
-                </a:solidFill>
-                <a:latin typeface="Calibri"/>
-              </a:rPr>
-              <a:t>• 0:20-0:45: Fill incident brief, run analysis.</a:t>
-            </a:r>
-          </a:p>
-          <a:p>
-            <a:pPr/>
-            <a:r>
-              <a:rPr sz="1800" b="0">
-                <a:solidFill>
-                  <a:srgbClr val="14243A"/>
-                </a:solidFill>
-                <a:latin typeface="Calibri"/>
-              </a:rPr>
-              <a:t>• 0:45-1:10: Inspect graph + intervention + safety gate.</a:t>
-            </a:r>
-          </a:p>
-          <a:p>
-            <a:pPr/>
-            <a:r>
-              <a:rPr sz="1800" b="0">
-                <a:solidFill>
-                  <a:srgbClr val="14243A"/>
-                </a:solidFill>
-                <a:latin typeface="Calibri"/>
-              </a:rPr>
-              <a:t>• 1:10-1:30: Feedback loop + close with links.</a:t>
+          </a:p>
+        </p:txBody>
+      </p:sp>
+      <p:sp>
+        <p:nvSpPr>
+          <p:cNvPr id="11" name="TextBox 10"/>
+          <p:cNvSpPr txBox="1"/>
+          <p:nvPr/>
+        </p:nvSpPr>
+        <p:spPr>
+          <a:xfrm>
+            <a:off x="1005840" y="1947672"/>
+            <a:ext cx="4892040" cy="457200"/>
+          </a:xfrm>
+          <a:prstGeom prst="rect">
+            <a:avLst/>
+          </a:prstGeom>
+          <a:noFill/>
+        </p:spPr>
+        <p:txBody>
+          <a:bodyPr wrap="none">
+            <a:spAutoFit/>
+          </a:bodyPr>
+          <a:lstStyle/>
+          <a:p>
+            <a:pPr algn="l"/>
+            <a:r>
+              <a:rPr sz="2000" b="1">
+                <a:solidFill>
+                  <a:srgbClr val="13233A"/>
+                </a:solidFill>
+                <a:latin typeface="Calibri"/>
+              </a:rPr>
+              <a:t>0:40-1:00 Graph + Evidence</a:t>
+            </a:r>
+          </a:p>
+        </p:txBody>
+      </p:sp>
+      <p:sp>
+        <p:nvSpPr>
+          <p:cNvPr id="12" name="TextBox 11"/>
+          <p:cNvSpPr txBox="1"/>
+          <p:nvPr/>
+        </p:nvSpPr>
+        <p:spPr>
+          <a:xfrm>
+            <a:off x="1005840" y="2441448"/>
+            <a:ext cx="4892040" cy="1143000"/>
+          </a:xfrm>
+          <a:prstGeom prst="rect">
+            <a:avLst/>
+          </a:prstGeom>
+          <a:noFill/>
+        </p:spPr>
+        <p:txBody>
+          <a:bodyPr wrap="none">
+            <a:spAutoFit/>
+          </a:bodyPr>
+          <a:lstStyle/>
+          <a:p>
+            <a:pPr algn="l"/>
+            <a:r>
+              <a:rPr sz="1500" b="0">
+                <a:solidFill>
+                  <a:srgbClr val="13233A"/>
+                </a:solidFill>
+                <a:latin typeface="Calibri"/>
+              </a:rPr>
+              <a:t>Inspect node relationships.</a:t>
+            </a:r>
+          </a:p>
+          <a:p>
+            <a:pPr algn="l"/>
+            <a:r>
+              <a:rPr sz="1500" b="0">
+                <a:solidFill>
+                  <a:srgbClr val="13233A"/>
+                </a:solidFill>
+                <a:latin typeface="Calibri"/>
+              </a:rPr>
+              <a:t>Review linked evidence snippets.</a:t>
+            </a:r>
+          </a:p>
+          <a:p>
+            <a:pPr algn="l"/>
+            <a:r>
+              <a:rPr sz="1500" b="0">
+                <a:solidFill>
+                  <a:srgbClr val="13233A"/>
+                </a:solidFill>
+                <a:latin typeface="Calibri"/>
+              </a:rPr>
+              <a:t>Explain intervention logic.</a:t>
+            </a:r>
+          </a:p>
+        </p:txBody>
+      </p:sp>
+      <p:sp>
+        <p:nvSpPr>
+          <p:cNvPr id="13" name="Rounded Rectangle 12"/>
+          <p:cNvSpPr/>
+          <p:nvPr/>
+        </p:nvSpPr>
+        <p:spPr>
+          <a:xfrm>
+            <a:off x="6382512" y="1783080"/>
+            <a:ext cx="5349240" cy="1965960"/>
+          </a:xfrm>
+          <a:prstGeom prst="roundRect">
+            <a:avLst/>
+          </a:prstGeom>
+          <a:solidFill>
+            <a:srgbClr val="E7F0FF"/>
+          </a:solidFill>
+          <a:ln>
+            <a:solidFill>
+              <a:srgbClr val="C4D5E9"/>
+            </a:solidFill>
+          </a:ln>
+        </p:spPr>
+        <p:style>
+          <a:lnRef idx="1">
+            <a:schemeClr val="accent1"/>
+          </a:lnRef>
+          <a:fillRef idx="3">
+            <a:schemeClr val="accent1"/>
+          </a:fillRef>
+          <a:effectRef idx="2">
+            <a:schemeClr val="accent1"/>
+          </a:effectRef>
+          <a:fontRef idx="minor">
+            <a:schemeClr val="lt1"/>
+          </a:fontRef>
+        </p:style>
+        <p:txBody>
+          <a:bodyPr rtlCol="0" anchor="ctr"/>
+          <a:lstStyle/>
+          <a:p>
+            <a:pPr algn="ctr"/>
+          </a:p>
+        </p:txBody>
+      </p:sp>
+      <p:sp>
+        <p:nvSpPr>
+          <p:cNvPr id="14" name="TextBox 13"/>
+          <p:cNvSpPr txBox="1"/>
+          <p:nvPr/>
+        </p:nvSpPr>
+        <p:spPr>
+          <a:xfrm>
+            <a:off x="6611112" y="1947672"/>
+            <a:ext cx="4892040" cy="457200"/>
+          </a:xfrm>
+          <a:prstGeom prst="rect">
+            <a:avLst/>
+          </a:prstGeom>
+          <a:noFill/>
+        </p:spPr>
+        <p:txBody>
+          <a:bodyPr wrap="none">
+            <a:spAutoFit/>
+          </a:bodyPr>
+          <a:lstStyle/>
+          <a:p>
+            <a:pPr algn="l"/>
+            <a:r>
+              <a:rPr sz="2000" b="1">
+                <a:solidFill>
+                  <a:srgbClr val="185FCB"/>
+                </a:solidFill>
+                <a:latin typeface="Calibri"/>
+              </a:rPr>
+              <a:t>1:00-1:20 Safety Gate</a:t>
+            </a:r>
+          </a:p>
+        </p:txBody>
+      </p:sp>
+      <p:sp>
+        <p:nvSpPr>
+          <p:cNvPr id="15" name="TextBox 14"/>
+          <p:cNvSpPr txBox="1"/>
+          <p:nvPr/>
+        </p:nvSpPr>
+        <p:spPr>
+          <a:xfrm>
+            <a:off x="6611112" y="2441448"/>
+            <a:ext cx="4892040" cy="1143000"/>
+          </a:xfrm>
+          <a:prstGeom prst="rect">
+            <a:avLst/>
+          </a:prstGeom>
+          <a:noFill/>
+        </p:spPr>
+        <p:txBody>
+          <a:bodyPr wrap="none">
+            <a:spAutoFit/>
+          </a:bodyPr>
+          <a:lstStyle/>
+          <a:p>
+            <a:pPr algn="l"/>
+            <a:r>
+              <a:rPr sz="1500" b="0">
+                <a:solidFill>
+                  <a:srgbClr val="13233A"/>
+                </a:solidFill>
+                <a:latin typeface="Calibri"/>
+              </a:rPr>
+              <a:t>Show mandatory approval reason.</a:t>
+            </a:r>
+          </a:p>
+          <a:p>
+            <a:pPr algn="l"/>
+            <a:r>
+              <a:rPr sz="1500" b="0">
+                <a:solidFill>
+                  <a:srgbClr val="13233A"/>
+                </a:solidFill>
+                <a:latin typeface="Calibri"/>
+              </a:rPr>
+              <a:t>Emphasize human authorization step.</a:t>
+            </a:r>
+          </a:p>
+          <a:p>
+            <a:pPr algn="l"/>
+            <a:r>
+              <a:rPr sz="1500" b="0">
+                <a:solidFill>
+                  <a:srgbClr val="13233A"/>
+                </a:solidFill>
+                <a:latin typeface="Calibri"/>
+              </a:rPr>
+              <a:t>Confirm no blind auto-execution.</a:t>
+            </a:r>
+          </a:p>
+        </p:txBody>
+      </p:sp>
+      <p:sp>
+        <p:nvSpPr>
+          <p:cNvPr id="16" name="Rounded Rectangle 15"/>
+          <p:cNvSpPr/>
+          <p:nvPr/>
+        </p:nvSpPr>
+        <p:spPr>
+          <a:xfrm>
+            <a:off x="777240" y="3977639"/>
+            <a:ext cx="10972800" cy="1920240"/>
+          </a:xfrm>
+          <a:prstGeom prst="roundRect">
+            <a:avLst/>
+          </a:prstGeom>
+          <a:solidFill>
+            <a:srgbClr val="E3F7F4"/>
+          </a:solidFill>
+          <a:ln>
+            <a:solidFill>
+              <a:srgbClr val="C4D5E9"/>
+            </a:solidFill>
+          </a:ln>
+        </p:spPr>
+        <p:style>
+          <a:lnRef idx="1">
+            <a:schemeClr val="accent1"/>
+          </a:lnRef>
+          <a:fillRef idx="3">
+            <a:schemeClr val="accent1"/>
+          </a:fillRef>
+          <a:effectRef idx="2">
+            <a:schemeClr val="accent1"/>
+          </a:effectRef>
+          <a:fontRef idx="minor">
+            <a:schemeClr val="lt1"/>
+          </a:fontRef>
+        </p:style>
+        <p:txBody>
+          <a:bodyPr rtlCol="0" anchor="ctr"/>
+          <a:lstStyle/>
+          <a:p>
+            <a:pPr algn="ctr"/>
+          </a:p>
+        </p:txBody>
+      </p:sp>
+      <p:sp>
+        <p:nvSpPr>
+          <p:cNvPr id="17" name="TextBox 16"/>
+          <p:cNvSpPr txBox="1"/>
+          <p:nvPr/>
+        </p:nvSpPr>
+        <p:spPr>
+          <a:xfrm>
+            <a:off x="1005840" y="4142231"/>
+            <a:ext cx="10515600" cy="457200"/>
+          </a:xfrm>
+          <a:prstGeom prst="rect">
+            <a:avLst/>
+          </a:prstGeom>
+          <a:noFill/>
+        </p:spPr>
+        <p:txBody>
+          <a:bodyPr wrap="none">
+            <a:spAutoFit/>
+          </a:bodyPr>
+          <a:lstStyle/>
+          <a:p>
+            <a:pPr algn="l"/>
+            <a:r>
+              <a:rPr sz="2000" b="1">
+                <a:solidFill>
+                  <a:srgbClr val="0A7F78"/>
+                </a:solidFill>
+                <a:latin typeface="Calibri"/>
+              </a:rPr>
+              <a:t>1:20-1:30 Feedback loop close</a:t>
+            </a:r>
+          </a:p>
+        </p:txBody>
+      </p:sp>
+      <p:sp>
+        <p:nvSpPr>
+          <p:cNvPr id="18" name="TextBox 17"/>
+          <p:cNvSpPr txBox="1"/>
+          <p:nvPr/>
+        </p:nvSpPr>
+        <p:spPr>
+          <a:xfrm>
+            <a:off x="1005840" y="4636007"/>
+            <a:ext cx="10515600" cy="1097280"/>
+          </a:xfrm>
+          <a:prstGeom prst="rect">
+            <a:avLst/>
+          </a:prstGeom>
+          <a:noFill/>
+        </p:spPr>
+        <p:txBody>
+          <a:bodyPr wrap="none">
+            <a:spAutoFit/>
+          </a:bodyPr>
+          <a:lstStyle/>
+          <a:p>
+            <a:pPr algn="l"/>
+            <a:r>
+              <a:rPr sz="1500" b="0">
+                <a:solidFill>
+                  <a:srgbClr val="4E6380"/>
+                </a:solidFill>
+                <a:latin typeface="Calibri"/>
+              </a:rPr>
+              <a:t>Submit analyst feedback to improve future behavior.</a:t>
+            </a:r>
+          </a:p>
+          <a:p>
+            <a:pPr algn="l"/>
+            <a:r>
+              <a:rPr sz="1500" b="0">
+                <a:solidFill>
+                  <a:srgbClr val="4E6380"/>
+                </a:solidFill>
+                <a:latin typeface="Calibri"/>
+              </a:rPr>
+              <a:t>Close with product and repository links.</a:t>
+            </a:r>
+          </a:p>
+          <a:p>
+            <a:pPr algn="l"/>
+            <a:r>
+              <a:rPr sz="1500" b="0">
+                <a:solidFill>
+                  <a:srgbClr val="4E6380"/>
+                </a:solidFill>
+                <a:latin typeface="Calibri"/>
+              </a:rPr>
+              <a:t>Suggested close line: Early, imperfect but seems useful in practice.</a:t>
             </a:r>
           </a:p>
         </p:txBody>
@@ -5491,7 +8547,7 @@
             <a:avLst/>
           </a:prstGeom>
           <a:solidFill>
-            <a:srgbClr val="F5F9FF"/>
+            <a:srgbClr val="F2F7FF"/>
           </a:solidFill>
           <a:ln>
             <a:noFill/>
@@ -5521,14 +8577,143 @@
       </p:sp>
       <p:sp>
         <p:nvSpPr>
-          <p:cNvPr id="3" name="TextBox 2"/>
+          <p:cNvPr id="3" name="Rectangle 2"/>
+          <p:cNvSpPr/>
+          <p:nvPr/>
+        </p:nvSpPr>
+        <p:spPr>
+          <a:xfrm>
+            <a:off x="0" y="0"/>
+            <a:ext cx="12191695" cy="256032"/>
+          </a:xfrm>
+          <a:prstGeom prst="rect">
+            <a:avLst/>
+          </a:prstGeom>
+          <a:solidFill>
+            <a:srgbClr val="185FCB"/>
+          </a:solidFill>
+          <a:ln>
+            <a:noFill/>
+          </a:ln>
+        </p:spPr>
+        <p:style>
+          <a:lnRef idx="1">
+            <a:schemeClr val="accent1"/>
+          </a:lnRef>
+          <a:fillRef idx="3">
+            <a:schemeClr val="accent1"/>
+          </a:fillRef>
+          <a:effectRef idx="2">
+            <a:schemeClr val="accent1"/>
+          </a:effectRef>
+          <a:fontRef idx="minor">
+            <a:schemeClr val="lt1"/>
+          </a:fontRef>
+        </p:style>
+        <p:txBody>
+          <a:bodyPr rtlCol="0" anchor="ctr"/>
+          <a:lstStyle/>
+          <a:p>
+            <a:pPr algn="ctr"/>
+          </a:p>
+        </p:txBody>
+      </p:sp>
+      <p:sp>
+        <p:nvSpPr>
+          <p:cNvPr id="4" name="Oval 3"/>
+          <p:cNvSpPr/>
+          <p:nvPr/>
+        </p:nvSpPr>
+        <p:spPr>
+          <a:xfrm>
+            <a:off x="-1097280" y="-914400"/>
+            <a:ext cx="3474720" cy="2926080"/>
+          </a:xfrm>
+          <a:prstGeom prst="ellipse">
+            <a:avLst/>
+          </a:prstGeom>
+          <a:solidFill>
+            <a:srgbClr val="E7F0FF"/>
+          </a:solidFill>
+          <a:ln>
+            <a:noFill/>
+          </a:ln>
+        </p:spPr>
+        <p:style>
+          <a:lnRef idx="1">
+            <a:schemeClr val="accent1"/>
+          </a:lnRef>
+          <a:fillRef idx="3">
+            <a:schemeClr val="accent1"/>
+          </a:fillRef>
+          <a:effectRef idx="2">
+            <a:schemeClr val="accent1"/>
+          </a:effectRef>
+          <a:fontRef idx="minor">
+            <a:schemeClr val="lt1"/>
+          </a:fontRef>
+        </p:style>
+        <p:txBody>
+          <a:bodyPr rtlCol="0" anchor="ctr"/>
+          <a:lstStyle/>
+          <a:p>
+            <a:pPr algn="ctr"/>
+          </a:p>
+        </p:txBody>
+      </p:sp>
+      <p:sp>
+        <p:nvSpPr>
+          <p:cNvPr id="5" name="Oval 4"/>
+          <p:cNvSpPr/>
+          <p:nvPr/>
+        </p:nvSpPr>
+        <p:spPr>
+          <a:xfrm>
+            <a:off x="9875520" y="-731520"/>
+            <a:ext cx="2926080" cy="2560320"/>
+          </a:xfrm>
+          <a:prstGeom prst="ellipse">
+            <a:avLst/>
+          </a:prstGeom>
+          <a:solidFill>
+            <a:srgbClr val="E3F7F4"/>
+          </a:solidFill>
+          <a:ln>
+            <a:noFill/>
+          </a:ln>
+        </p:spPr>
+        <p:style>
+          <a:lnRef idx="1">
+            <a:schemeClr val="accent1"/>
+          </a:lnRef>
+          <a:fillRef idx="3">
+            <a:schemeClr val="accent1"/>
+          </a:fillRef>
+          <a:effectRef idx="2">
+            <a:schemeClr val="accent1"/>
+          </a:effectRef>
+          <a:fontRef idx="minor">
+            <a:schemeClr val="lt1"/>
+          </a:fontRef>
+        </p:style>
+        <p:txBody>
+          <a:bodyPr rtlCol="0" anchor="ctr"/>
+          <a:lstStyle/>
+          <a:p>
+            <a:pPr algn="ctr"/>
+          </a:p>
+        </p:txBody>
+      </p:sp>
+      <p:sp>
+        <p:nvSpPr>
+          <p:cNvPr id="6" name="TextBox 5"/>
           <p:cNvSpPr txBox="1"/>
           <p:nvPr/>
         </p:nvSpPr>
         <p:spPr>
           <a:xfrm>
-            <a:off x="640080" y="457200"/>
-            <a:ext cx="10881360" cy="1371600"/>
+            <a:off x="658368" y="420624"/>
+            <a:ext cx="8138160" cy="658368"/>
           </a:xfrm>
           <a:prstGeom prst="rect">
             <a:avLst/>
@@ -5541,28 +8726,29 @@
           </a:bodyPr>
           <a:lstStyle/>
           <a:p>
-            <a:r>
-              <a:rPr sz="3600" b="1">
-                <a:solidFill>
-                  <a:srgbClr val="14243A"/>
-                </a:solidFill>
-                <a:latin typeface="Calibri"/>
-              </a:rPr>
-              <a:t>Why Useful</a:t>
-            </a:r>
-          </a:p>
-        </p:txBody>
-      </p:sp>
-      <p:sp>
-        <p:nvSpPr>
-          <p:cNvPr id="4" name="TextBox 3"/>
+            <a:pPr algn="l"/>
+            <a:r>
+              <a:rPr sz="3500" b="1">
+                <a:solidFill>
+                  <a:srgbClr val="13233A"/>
+                </a:solidFill>
+                <a:latin typeface="Calibri"/>
+              </a:rPr>
+              <a:t>What audience should notice</a:t>
+            </a:r>
+          </a:p>
+        </p:txBody>
+      </p:sp>
+      <p:sp>
+        <p:nvSpPr>
+          <p:cNvPr id="7" name="TextBox 6"/>
           <p:cNvSpPr txBox="1"/>
           <p:nvPr/>
         </p:nvSpPr>
         <p:spPr>
           <a:xfrm>
-            <a:off x="685800" y="1417320"/>
-            <a:ext cx="10789920" cy="1097280"/>
+            <a:off x="685800" y="1115568"/>
+            <a:ext cx="9692640" cy="457200"/>
           </a:xfrm>
           <a:prstGeom prst="rect">
             <a:avLst/>
@@ -5575,28 +8761,74 @@
           </a:bodyPr>
           <a:lstStyle/>
           <a:p>
-            <a:r>
-              <a:rPr sz="1800" b="0">
-                <a:solidFill>
-                  <a:srgbClr val="4D607A"/>
-                </a:solidFill>
-                <a:latin typeface="Calibri"/>
-              </a:rPr>
-              <a:t>What this improves during high-pressure incidents</a:t>
-            </a:r>
-          </a:p>
-        </p:txBody>
-      </p:sp>
-      <p:sp>
-        <p:nvSpPr>
-          <p:cNvPr id="5" name="TextBox 4"/>
+            <a:pPr algn="l"/>
+            <a:r>
+              <a:rPr sz="1700" b="0">
+                <a:solidFill>
+                  <a:srgbClr val="4E6380"/>
+                </a:solidFill>
+                <a:latin typeface="Calibri"/>
+              </a:rPr>
+              <a:t>Demonstration checkpoints that signal product maturity</a:t>
+            </a:r>
+          </a:p>
+        </p:txBody>
+      </p:sp>
+      <p:sp>
+        <p:nvSpPr>
+          <p:cNvPr id="8" name="Rounded Rectangle 7"/>
+          <p:cNvSpPr/>
+          <p:nvPr/>
+        </p:nvSpPr>
+        <p:spPr>
+          <a:xfrm>
+            <a:off x="9464040" y="484632"/>
+            <a:ext cx="2011680" cy="438912"/>
+          </a:xfrm>
+          <a:prstGeom prst="roundRect">
+            <a:avLst/>
+          </a:prstGeom>
+          <a:solidFill>
+            <a:srgbClr val="E7F0FF"/>
+          </a:solidFill>
+          <a:ln>
+            <a:solidFill>
+              <a:srgbClr val="C4D5E9"/>
+            </a:solidFill>
+          </a:ln>
+        </p:spPr>
+        <p:style>
+          <a:lnRef idx="1">
+            <a:schemeClr val="accent1"/>
+          </a:lnRef>
+          <a:fillRef idx="3">
+            <a:schemeClr val="accent1"/>
+          </a:fillRef>
+          <a:effectRef idx="2">
+            <a:schemeClr val="accent1"/>
+          </a:effectRef>
+          <a:fontRef idx="minor">
+            <a:schemeClr val="lt1"/>
+          </a:fontRef>
+        </p:style>
+        <p:txBody>
+          <a:bodyPr rtlCol="0" anchor="ctr"/>
+          <a:lstStyle/>
+          <a:p>
+            <a:pPr algn="ctr"/>
+          </a:p>
+        </p:txBody>
+      </p:sp>
+      <p:sp>
+        <p:nvSpPr>
+          <p:cNvPr id="9" name="TextBox 8"/>
           <p:cNvSpPr txBox="1"/>
           <p:nvPr/>
         </p:nvSpPr>
         <p:spPr>
           <a:xfrm>
-            <a:off x="822960" y="1920240"/>
-            <a:ext cx="10698480" cy="548640"/>
+            <a:off x="9619488" y="548640"/>
+            <a:ext cx="1737360" cy="274320"/>
           </a:xfrm>
           <a:prstGeom prst="rect">
             <a:avLst/>
@@ -5609,28 +8841,29 @@
           </a:bodyPr>
           <a:lstStyle/>
           <a:p>
-            <a:r>
-              <a:rPr sz="2400" b="1">
-                <a:solidFill>
-                  <a:srgbClr val="2166CF"/>
-                </a:solidFill>
-                <a:latin typeface="Calibri"/>
-              </a:rPr>
-              <a:t>Operational value</a:t>
-            </a:r>
-          </a:p>
-        </p:txBody>
-      </p:sp>
-      <p:sp>
-        <p:nvSpPr>
-          <p:cNvPr id="6" name="Rounded Rectangle 5"/>
+            <a:pPr algn="ctr"/>
+            <a:r>
+              <a:rPr sz="1100" b="1">
+                <a:solidFill>
+                  <a:srgbClr val="185FCB"/>
+                </a:solidFill>
+                <a:latin typeface="Calibri"/>
+              </a:rPr>
+              <a:t>HIGHLIGHTS</a:t>
+            </a:r>
+          </a:p>
+        </p:txBody>
+      </p:sp>
+      <p:sp>
+        <p:nvSpPr>
+          <p:cNvPr id="10" name="Rounded Rectangle 9"/>
           <p:cNvSpPr/>
           <p:nvPr/>
         </p:nvSpPr>
         <p:spPr>
           <a:xfrm>
-            <a:off x="731520" y="2423160"/>
-            <a:ext cx="10789920" cy="2103120"/>
+            <a:off x="822960" y="1920240"/>
+            <a:ext cx="4937760" cy="1645920"/>
           </a:xfrm>
           <a:prstGeom prst="roundRect">
             <a:avLst/>
@@ -5640,7 +8873,7 @@
           </a:solidFill>
           <a:ln>
             <a:solidFill>
-              <a:srgbClr val="C2D3E8"/>
+              <a:srgbClr val="C4D5E9"/>
             </a:solidFill>
           </a:ln>
         </p:spPr>
@@ -5663,50 +8896,420 @@
           <a:lstStyle/>
           <a:p>
             <a:pPr algn="ctr"/>
-            <a:r>
-              <a:rPr sz="1800" b="0">
-                <a:solidFill>
-                  <a:srgbClr val="14243A"/>
-                </a:solidFill>
-                <a:latin typeface="Calibri"/>
-              </a:rPr>
-              <a:t>• Faster first-pass causal clarity.</a:t>
-            </a:r>
-          </a:p>
-          <a:p>
-            <a:pPr/>
-            <a:r>
-              <a:rPr sz="1800" b="0">
-                <a:solidFill>
-                  <a:srgbClr val="14243A"/>
-                </a:solidFill>
-                <a:latin typeface="Calibri"/>
-              </a:rPr>
-              <a:t>• Better consistency across responders.</a:t>
-            </a:r>
-          </a:p>
-          <a:p>
-            <a:pPr/>
-            <a:r>
-              <a:rPr sz="1800" b="0">
-                <a:solidFill>
-                  <a:srgbClr val="14243A"/>
-                </a:solidFill>
-                <a:latin typeface="Calibri"/>
-              </a:rPr>
-              <a:t>• Safer interventions through explicit approval gates.</a:t>
-            </a:r>
-          </a:p>
-          <a:p>
-            <a:pPr/>
-            <a:r>
-              <a:rPr sz="1800" b="0">
-                <a:solidFill>
-                  <a:srgbClr val="14243A"/>
-                </a:solidFill>
-                <a:latin typeface="Calibri"/>
-              </a:rPr>
-              <a:t>• Cleaner post-incident learning via structured feedback.</a:t>
+          </a:p>
+        </p:txBody>
+      </p:sp>
+      <p:sp>
+        <p:nvSpPr>
+          <p:cNvPr id="11" name="TextBox 10"/>
+          <p:cNvSpPr txBox="1"/>
+          <p:nvPr/>
+        </p:nvSpPr>
+        <p:spPr>
+          <a:xfrm>
+            <a:off x="1051560" y="2084832"/>
+            <a:ext cx="4480560" cy="457200"/>
+          </a:xfrm>
+          <a:prstGeom prst="rect">
+            <a:avLst/>
+          </a:prstGeom>
+          <a:noFill/>
+        </p:spPr>
+        <p:txBody>
+          <a:bodyPr wrap="none">
+            <a:spAutoFit/>
+          </a:bodyPr>
+          <a:lstStyle/>
+          <a:p>
+            <a:pPr algn="l"/>
+            <a:r>
+              <a:rPr sz="2000" b="1">
+                <a:solidFill>
+                  <a:srgbClr val="13233A"/>
+                </a:solidFill>
+                <a:latin typeface="Calibri"/>
+              </a:rPr>
+              <a:t>Grounding</a:t>
+            </a:r>
+          </a:p>
+        </p:txBody>
+      </p:sp>
+      <p:sp>
+        <p:nvSpPr>
+          <p:cNvPr id="12" name="TextBox 11"/>
+          <p:cNvSpPr txBox="1"/>
+          <p:nvPr/>
+        </p:nvSpPr>
+        <p:spPr>
+          <a:xfrm>
+            <a:off x="1051560" y="2578608"/>
+            <a:ext cx="4480560" cy="822960"/>
+          </a:xfrm>
+          <a:prstGeom prst="rect">
+            <a:avLst/>
+          </a:prstGeom>
+          <a:noFill/>
+        </p:spPr>
+        <p:txBody>
+          <a:bodyPr wrap="none">
+            <a:spAutoFit/>
+          </a:bodyPr>
+          <a:lstStyle/>
+          <a:p>
+            <a:pPr algn="l"/>
+            <a:r>
+              <a:rPr sz="1500" b="0">
+                <a:solidFill>
+                  <a:srgbClr val="4E6380"/>
+                </a:solidFill>
+                <a:latin typeface="Calibri"/>
+              </a:rPr>
+              <a:t>Analysis traces back to structured telemetry context.</a:t>
+            </a:r>
+          </a:p>
+        </p:txBody>
+      </p:sp>
+      <p:sp>
+        <p:nvSpPr>
+          <p:cNvPr id="13" name="Rounded Rectangle 12"/>
+          <p:cNvSpPr/>
+          <p:nvPr/>
+        </p:nvSpPr>
+        <p:spPr>
+          <a:xfrm>
+            <a:off x="6400800" y="1920240"/>
+            <a:ext cx="4937760" cy="1645920"/>
+          </a:xfrm>
+          <a:prstGeom prst="roundRect">
+            <a:avLst/>
+          </a:prstGeom>
+          <a:solidFill>
+            <a:srgbClr val="E7F0FF"/>
+          </a:solidFill>
+          <a:ln>
+            <a:solidFill>
+              <a:srgbClr val="C4D5E9"/>
+            </a:solidFill>
+          </a:ln>
+        </p:spPr>
+        <p:style>
+          <a:lnRef idx="1">
+            <a:schemeClr val="accent1"/>
+          </a:lnRef>
+          <a:fillRef idx="3">
+            <a:schemeClr val="accent1"/>
+          </a:fillRef>
+          <a:effectRef idx="2">
+            <a:schemeClr val="accent1"/>
+          </a:effectRef>
+          <a:fontRef idx="minor">
+            <a:schemeClr val="lt1"/>
+          </a:fontRef>
+        </p:style>
+        <p:txBody>
+          <a:bodyPr rtlCol="0" anchor="ctr"/>
+          <a:lstStyle/>
+          <a:p>
+            <a:pPr algn="ctr"/>
+          </a:p>
+        </p:txBody>
+      </p:sp>
+      <p:sp>
+        <p:nvSpPr>
+          <p:cNvPr id="14" name="TextBox 13"/>
+          <p:cNvSpPr txBox="1"/>
+          <p:nvPr/>
+        </p:nvSpPr>
+        <p:spPr>
+          <a:xfrm>
+            <a:off x="6629400" y="2084832"/>
+            <a:ext cx="4480560" cy="457200"/>
+          </a:xfrm>
+          <a:prstGeom prst="rect">
+            <a:avLst/>
+          </a:prstGeom>
+          <a:noFill/>
+        </p:spPr>
+        <p:txBody>
+          <a:bodyPr wrap="none">
+            <a:spAutoFit/>
+          </a:bodyPr>
+          <a:lstStyle/>
+          <a:p>
+            <a:pPr algn="l"/>
+            <a:r>
+              <a:rPr sz="2000" b="1">
+                <a:solidFill>
+                  <a:srgbClr val="185FCB"/>
+                </a:solidFill>
+                <a:latin typeface="Calibri"/>
+              </a:rPr>
+              <a:t>Causality</a:t>
+            </a:r>
+          </a:p>
+        </p:txBody>
+      </p:sp>
+      <p:sp>
+        <p:nvSpPr>
+          <p:cNvPr id="15" name="TextBox 14"/>
+          <p:cNvSpPr txBox="1"/>
+          <p:nvPr/>
+        </p:nvSpPr>
+        <p:spPr>
+          <a:xfrm>
+            <a:off x="6629400" y="2578608"/>
+            <a:ext cx="4480560" cy="822960"/>
+          </a:xfrm>
+          <a:prstGeom prst="rect">
+            <a:avLst/>
+          </a:prstGeom>
+          <a:noFill/>
+        </p:spPr>
+        <p:txBody>
+          <a:bodyPr wrap="none">
+            <a:spAutoFit/>
+          </a:bodyPr>
+          <a:lstStyle/>
+          <a:p>
+            <a:pPr algn="l"/>
+            <a:r>
+              <a:rPr sz="1500" b="0">
+                <a:solidFill>
+                  <a:srgbClr val="4E6380"/>
+                </a:solidFill>
+                <a:latin typeface="Calibri"/>
+              </a:rPr>
+              <a:t>Graph makes root-cause path legible under pressure.</a:t>
+            </a:r>
+          </a:p>
+        </p:txBody>
+      </p:sp>
+      <p:sp>
+        <p:nvSpPr>
+          <p:cNvPr id="16" name="Rounded Rectangle 15"/>
+          <p:cNvSpPr/>
+          <p:nvPr/>
+        </p:nvSpPr>
+        <p:spPr>
+          <a:xfrm>
+            <a:off x="822960" y="3840480"/>
+            <a:ext cx="4937760" cy="1645920"/>
+          </a:xfrm>
+          <a:prstGeom prst="roundRect">
+            <a:avLst/>
+          </a:prstGeom>
+          <a:solidFill>
+            <a:srgbClr val="FFFFFF"/>
+          </a:solidFill>
+          <a:ln>
+            <a:solidFill>
+              <a:srgbClr val="C4D5E9"/>
+            </a:solidFill>
+          </a:ln>
+        </p:spPr>
+        <p:style>
+          <a:lnRef idx="1">
+            <a:schemeClr val="accent1"/>
+          </a:lnRef>
+          <a:fillRef idx="3">
+            <a:schemeClr val="accent1"/>
+          </a:fillRef>
+          <a:effectRef idx="2">
+            <a:schemeClr val="accent1"/>
+          </a:effectRef>
+          <a:fontRef idx="minor">
+            <a:schemeClr val="lt1"/>
+          </a:fontRef>
+        </p:style>
+        <p:txBody>
+          <a:bodyPr rtlCol="0" anchor="ctr"/>
+          <a:lstStyle/>
+          <a:p>
+            <a:pPr algn="ctr"/>
+          </a:p>
+        </p:txBody>
+      </p:sp>
+      <p:sp>
+        <p:nvSpPr>
+          <p:cNvPr id="17" name="TextBox 16"/>
+          <p:cNvSpPr txBox="1"/>
+          <p:nvPr/>
+        </p:nvSpPr>
+        <p:spPr>
+          <a:xfrm>
+            <a:off x="1051560" y="4005072"/>
+            <a:ext cx="4480560" cy="457200"/>
+          </a:xfrm>
+          <a:prstGeom prst="rect">
+            <a:avLst/>
+          </a:prstGeom>
+          <a:noFill/>
+        </p:spPr>
+        <p:txBody>
+          <a:bodyPr wrap="none">
+            <a:spAutoFit/>
+          </a:bodyPr>
+          <a:lstStyle/>
+          <a:p>
+            <a:pPr algn="l"/>
+            <a:r>
+              <a:rPr sz="2000" b="1">
+                <a:solidFill>
+                  <a:srgbClr val="13233A"/>
+                </a:solidFill>
+                <a:latin typeface="Calibri"/>
+              </a:rPr>
+              <a:t>Safety</a:t>
+            </a:r>
+          </a:p>
+        </p:txBody>
+      </p:sp>
+      <p:sp>
+        <p:nvSpPr>
+          <p:cNvPr id="18" name="TextBox 17"/>
+          <p:cNvSpPr txBox="1"/>
+          <p:nvPr/>
+        </p:nvSpPr>
+        <p:spPr>
+          <a:xfrm>
+            <a:off x="1051560" y="4498848"/>
+            <a:ext cx="4480560" cy="822960"/>
+          </a:xfrm>
+          <a:prstGeom prst="rect">
+            <a:avLst/>
+          </a:prstGeom>
+          <a:noFill/>
+        </p:spPr>
+        <p:txBody>
+          <a:bodyPr wrap="none">
+            <a:spAutoFit/>
+          </a:bodyPr>
+          <a:lstStyle/>
+          <a:p>
+            <a:pPr algn="l"/>
+            <a:r>
+              <a:rPr sz="1500" b="0">
+                <a:solidFill>
+                  <a:srgbClr val="4E6380"/>
+                </a:solidFill>
+                <a:latin typeface="Calibri"/>
+              </a:rPr>
+              <a:t>Intervention path is human-gated, not auto-triggered.</a:t>
+            </a:r>
+          </a:p>
+        </p:txBody>
+      </p:sp>
+      <p:sp>
+        <p:nvSpPr>
+          <p:cNvPr id="19" name="Rounded Rectangle 18"/>
+          <p:cNvSpPr/>
+          <p:nvPr/>
+        </p:nvSpPr>
+        <p:spPr>
+          <a:xfrm>
+            <a:off x="6400800" y="3840480"/>
+            <a:ext cx="4937760" cy="1645920"/>
+          </a:xfrm>
+          <a:prstGeom prst="roundRect">
+            <a:avLst/>
+          </a:prstGeom>
+          <a:solidFill>
+            <a:srgbClr val="E7F0FF"/>
+          </a:solidFill>
+          <a:ln>
+            <a:solidFill>
+              <a:srgbClr val="C4D5E9"/>
+            </a:solidFill>
+          </a:ln>
+        </p:spPr>
+        <p:style>
+          <a:lnRef idx="1">
+            <a:schemeClr val="accent1"/>
+          </a:lnRef>
+          <a:fillRef idx="3">
+            <a:schemeClr val="accent1"/>
+          </a:fillRef>
+          <a:effectRef idx="2">
+            <a:schemeClr val="accent1"/>
+          </a:effectRef>
+          <a:fontRef idx="minor">
+            <a:schemeClr val="lt1"/>
+          </a:fontRef>
+        </p:style>
+        <p:txBody>
+          <a:bodyPr rtlCol="0" anchor="ctr"/>
+          <a:lstStyle/>
+          <a:p>
+            <a:pPr algn="ctr"/>
+          </a:p>
+        </p:txBody>
+      </p:sp>
+      <p:sp>
+        <p:nvSpPr>
+          <p:cNvPr id="20" name="TextBox 19"/>
+          <p:cNvSpPr txBox="1"/>
+          <p:nvPr/>
+        </p:nvSpPr>
+        <p:spPr>
+          <a:xfrm>
+            <a:off x="6629400" y="4005072"/>
+            <a:ext cx="4480560" cy="457200"/>
+          </a:xfrm>
+          <a:prstGeom prst="rect">
+            <a:avLst/>
+          </a:prstGeom>
+          <a:noFill/>
+        </p:spPr>
+        <p:txBody>
+          <a:bodyPr wrap="none">
+            <a:spAutoFit/>
+          </a:bodyPr>
+          <a:lstStyle/>
+          <a:p>
+            <a:pPr algn="l"/>
+            <a:r>
+              <a:rPr sz="2000" b="1">
+                <a:solidFill>
+                  <a:srgbClr val="185FCB"/>
+                </a:solidFill>
+                <a:latin typeface="Calibri"/>
+              </a:rPr>
+              <a:t>Learning</a:t>
+            </a:r>
+          </a:p>
+        </p:txBody>
+      </p:sp>
+      <p:sp>
+        <p:nvSpPr>
+          <p:cNvPr id="21" name="TextBox 20"/>
+          <p:cNvSpPr txBox="1"/>
+          <p:nvPr/>
+        </p:nvSpPr>
+        <p:spPr>
+          <a:xfrm>
+            <a:off x="6629400" y="4498848"/>
+            <a:ext cx="4480560" cy="822960"/>
+          </a:xfrm>
+          <a:prstGeom prst="rect">
+            <a:avLst/>
+          </a:prstGeom>
+          <a:noFill/>
+        </p:spPr>
+        <p:txBody>
+          <a:bodyPr wrap="none">
+            <a:spAutoFit/>
+          </a:bodyPr>
+          <a:lstStyle/>
+          <a:p>
+            <a:pPr algn="l"/>
+            <a:r>
+              <a:rPr sz="1500" b="0">
+                <a:solidFill>
+                  <a:srgbClr val="4E6380"/>
+                </a:solidFill>
+                <a:latin typeface="Calibri"/>
+              </a:rPr>
+              <a:t>Analyst feedback is captured for iterative refinement.</a:t>
             </a:r>
           </a:p>
         </p:txBody>
@@ -5744,7 +9347,7 @@
             <a:avLst/>
           </a:prstGeom>
           <a:solidFill>
-            <a:srgbClr val="F5F9FF"/>
+            <a:srgbClr val="F2F7FF"/>
           </a:solidFill>
           <a:ln>
             <a:noFill/>
@@ -5774,14 +9377,143 @@
       </p:sp>
       <p:sp>
         <p:nvSpPr>
-          <p:cNvPr id="3" name="TextBox 2"/>
+          <p:cNvPr id="3" name="Rectangle 2"/>
+          <p:cNvSpPr/>
+          <p:nvPr/>
+        </p:nvSpPr>
+        <p:spPr>
+          <a:xfrm>
+            <a:off x="0" y="0"/>
+            <a:ext cx="12191695" cy="256032"/>
+          </a:xfrm>
+          <a:prstGeom prst="rect">
+            <a:avLst/>
+          </a:prstGeom>
+          <a:solidFill>
+            <a:srgbClr val="185FCB"/>
+          </a:solidFill>
+          <a:ln>
+            <a:noFill/>
+          </a:ln>
+        </p:spPr>
+        <p:style>
+          <a:lnRef idx="1">
+            <a:schemeClr val="accent1"/>
+          </a:lnRef>
+          <a:fillRef idx="3">
+            <a:schemeClr val="accent1"/>
+          </a:fillRef>
+          <a:effectRef idx="2">
+            <a:schemeClr val="accent1"/>
+          </a:effectRef>
+          <a:fontRef idx="minor">
+            <a:schemeClr val="lt1"/>
+          </a:fontRef>
+        </p:style>
+        <p:txBody>
+          <a:bodyPr rtlCol="0" anchor="ctr"/>
+          <a:lstStyle/>
+          <a:p>
+            <a:pPr algn="ctr"/>
+          </a:p>
+        </p:txBody>
+      </p:sp>
+      <p:sp>
+        <p:nvSpPr>
+          <p:cNvPr id="4" name="Oval 3"/>
+          <p:cNvSpPr/>
+          <p:nvPr/>
+        </p:nvSpPr>
+        <p:spPr>
+          <a:xfrm>
+            <a:off x="-1097280" y="-914400"/>
+            <a:ext cx="3474720" cy="2926080"/>
+          </a:xfrm>
+          <a:prstGeom prst="ellipse">
+            <a:avLst/>
+          </a:prstGeom>
+          <a:solidFill>
+            <a:srgbClr val="E7F0FF"/>
+          </a:solidFill>
+          <a:ln>
+            <a:noFill/>
+          </a:ln>
+        </p:spPr>
+        <p:style>
+          <a:lnRef idx="1">
+            <a:schemeClr val="accent1"/>
+          </a:lnRef>
+          <a:fillRef idx="3">
+            <a:schemeClr val="accent1"/>
+          </a:fillRef>
+          <a:effectRef idx="2">
+            <a:schemeClr val="accent1"/>
+          </a:effectRef>
+          <a:fontRef idx="minor">
+            <a:schemeClr val="lt1"/>
+          </a:fontRef>
+        </p:style>
+        <p:txBody>
+          <a:bodyPr rtlCol="0" anchor="ctr"/>
+          <a:lstStyle/>
+          <a:p>
+            <a:pPr algn="ctr"/>
+          </a:p>
+        </p:txBody>
+      </p:sp>
+      <p:sp>
+        <p:nvSpPr>
+          <p:cNvPr id="5" name="Oval 4"/>
+          <p:cNvSpPr/>
+          <p:nvPr/>
+        </p:nvSpPr>
+        <p:spPr>
+          <a:xfrm>
+            <a:off x="9875520" y="-731520"/>
+            <a:ext cx="2926080" cy="2560320"/>
+          </a:xfrm>
+          <a:prstGeom prst="ellipse">
+            <a:avLst/>
+          </a:prstGeom>
+          <a:solidFill>
+            <a:srgbClr val="E3F7F4"/>
+          </a:solidFill>
+          <a:ln>
+            <a:noFill/>
+          </a:ln>
+        </p:spPr>
+        <p:style>
+          <a:lnRef idx="1">
+            <a:schemeClr val="accent1"/>
+          </a:lnRef>
+          <a:fillRef idx="3">
+            <a:schemeClr val="accent1"/>
+          </a:fillRef>
+          <a:effectRef idx="2">
+            <a:schemeClr val="accent1"/>
+          </a:effectRef>
+          <a:fontRef idx="minor">
+            <a:schemeClr val="lt1"/>
+          </a:fontRef>
+        </p:style>
+        <p:txBody>
+          <a:bodyPr rtlCol="0" anchor="ctr"/>
+          <a:lstStyle/>
+          <a:p>
+            <a:pPr algn="ctr"/>
+          </a:p>
+        </p:txBody>
+      </p:sp>
+      <p:sp>
+        <p:nvSpPr>
+          <p:cNvPr id="6" name="TextBox 5"/>
           <p:cNvSpPr txBox="1"/>
           <p:nvPr/>
         </p:nvSpPr>
         <p:spPr>
           <a:xfrm>
-            <a:off x="640080" y="457200"/>
-            <a:ext cx="10881360" cy="1371600"/>
+            <a:off x="658368" y="420624"/>
+            <a:ext cx="8138160" cy="658368"/>
           </a:xfrm>
           <a:prstGeom prst="rect">
             <a:avLst/>
@@ -5794,28 +9526,29 @@
           </a:bodyPr>
           <a:lstStyle/>
           <a:p>
-            <a:r>
-              <a:rPr sz="3600" b="1">
-                <a:solidFill>
-                  <a:srgbClr val="14243A"/>
-                </a:solidFill>
-                <a:latin typeface="Calibri"/>
-              </a:rPr>
-              <a:t>Current State</a:t>
-            </a:r>
-          </a:p>
-        </p:txBody>
-      </p:sp>
-      <p:sp>
-        <p:nvSpPr>
-          <p:cNvPr id="4" name="TextBox 3"/>
+            <a:pPr algn="l"/>
+            <a:r>
+              <a:rPr sz="3500" b="1">
+                <a:solidFill>
+                  <a:srgbClr val="13233A"/>
+                </a:solidFill>
+                <a:latin typeface="Calibri"/>
+              </a:rPr>
+              <a:t>Access &amp; Next Steps</a:t>
+            </a:r>
+          </a:p>
+        </p:txBody>
+      </p:sp>
+      <p:sp>
+        <p:nvSpPr>
+          <p:cNvPr id="7" name="TextBox 6"/>
           <p:cNvSpPr txBox="1"/>
           <p:nvPr/>
         </p:nvSpPr>
         <p:spPr>
           <a:xfrm>
-            <a:off x="685800" y="1417320"/>
-            <a:ext cx="10789920" cy="1097280"/>
+            <a:off x="685800" y="1115568"/>
+            <a:ext cx="9692640" cy="457200"/>
           </a:xfrm>
           <a:prstGeom prst="rect">
             <a:avLst/>
@@ -5828,28 +9561,74 @@
           </a:bodyPr>
           <a:lstStyle/>
           <a:p>
-            <a:r>
-              <a:rPr sz="1800" b="0">
-                <a:solidFill>
-                  <a:srgbClr val="4D607A"/>
-                </a:solidFill>
-                <a:latin typeface="Calibri"/>
-              </a:rPr>
-              <a:t>Honest status</a:t>
-            </a:r>
-          </a:p>
-        </p:txBody>
-      </p:sp>
-      <p:sp>
-        <p:nvSpPr>
-          <p:cNvPr id="5" name="TextBox 4"/>
+            <a:pPr algn="l"/>
+            <a:r>
+              <a:rPr sz="1700" b="0">
+                <a:solidFill>
+                  <a:srgbClr val="4E6380"/>
+                </a:solidFill>
+                <a:latin typeface="Calibri"/>
+              </a:rPr>
+              <a:t>Live demo endpoint and codebase</a:t>
+            </a:r>
+          </a:p>
+        </p:txBody>
+      </p:sp>
+      <p:sp>
+        <p:nvSpPr>
+          <p:cNvPr id="8" name="Rounded Rectangle 7"/>
+          <p:cNvSpPr/>
+          <p:nvPr/>
+        </p:nvSpPr>
+        <p:spPr>
+          <a:xfrm>
+            <a:off x="9464040" y="484632"/>
+            <a:ext cx="2011680" cy="438912"/>
+          </a:xfrm>
+          <a:prstGeom prst="roundRect">
+            <a:avLst/>
+          </a:prstGeom>
+          <a:solidFill>
+            <a:srgbClr val="E7F0FF"/>
+          </a:solidFill>
+          <a:ln>
+            <a:solidFill>
+              <a:srgbClr val="C4D5E9"/>
+            </a:solidFill>
+          </a:ln>
+        </p:spPr>
+        <p:style>
+          <a:lnRef idx="1">
+            <a:schemeClr val="accent1"/>
+          </a:lnRef>
+          <a:fillRef idx="3">
+            <a:schemeClr val="accent1"/>
+          </a:fillRef>
+          <a:effectRef idx="2">
+            <a:schemeClr val="accent1"/>
+          </a:effectRef>
+          <a:fontRef idx="minor">
+            <a:schemeClr val="lt1"/>
+          </a:fontRef>
+        </p:style>
+        <p:txBody>
+          <a:bodyPr rtlCol="0" anchor="ctr"/>
+          <a:lstStyle/>
+          <a:p>
+            <a:pPr algn="ctr"/>
+          </a:p>
+        </p:txBody>
+      </p:sp>
+      <p:sp>
+        <p:nvSpPr>
+          <p:cNvPr id="9" name="TextBox 8"/>
           <p:cNvSpPr txBox="1"/>
           <p:nvPr/>
         </p:nvSpPr>
         <p:spPr>
           <a:xfrm>
-            <a:off x="822960" y="2103120"/>
-            <a:ext cx="10698480" cy="548640"/>
+            <a:off x="9619488" y="548640"/>
+            <a:ext cx="1737360" cy="274320"/>
           </a:xfrm>
           <a:prstGeom prst="rect">
             <a:avLst/>
@@ -5862,28 +9641,144 @@
           </a:bodyPr>
           <a:lstStyle/>
           <a:p>
-            <a:r>
-              <a:rPr sz="2400" b="1">
-                <a:solidFill>
-                  <a:srgbClr val="2166CF"/>
-                </a:solidFill>
-                <a:latin typeface="Calibri"/>
-              </a:rPr>
-              <a:t>Reality check</a:t>
-            </a:r>
-          </a:p>
-        </p:txBody>
-      </p:sp>
-      <p:sp>
-        <p:nvSpPr>
-          <p:cNvPr id="6" name="Rounded Rectangle 5"/>
+            <a:pPr algn="ctr"/>
+            <a:r>
+              <a:rPr sz="1100" b="1">
+                <a:solidFill>
+                  <a:srgbClr val="185FCB"/>
+                </a:solidFill>
+                <a:latin typeface="Calibri"/>
+              </a:rPr>
+              <a:t>LINKS</a:t>
+            </a:r>
+          </a:p>
+        </p:txBody>
+      </p:sp>
+      <p:sp>
+        <p:nvSpPr>
+          <p:cNvPr id="10" name="Rounded Rectangle 9"/>
           <p:cNvSpPr/>
           <p:nvPr/>
         </p:nvSpPr>
         <p:spPr>
           <a:xfrm>
-            <a:off x="731520" y="2606039"/>
-            <a:ext cx="10789920" cy="2103120"/>
+            <a:off x="822960" y="2057400"/>
+            <a:ext cx="10698480" cy="1737360"/>
+          </a:xfrm>
+          <a:prstGeom prst="roundRect">
+            <a:avLst/>
+          </a:prstGeom>
+          <a:solidFill>
+            <a:srgbClr val="E7F0FF"/>
+          </a:solidFill>
+          <a:ln>
+            <a:solidFill>
+              <a:srgbClr val="C4D5E9"/>
+            </a:solidFill>
+          </a:ln>
+        </p:spPr>
+        <p:style>
+          <a:lnRef idx="1">
+            <a:schemeClr val="accent1"/>
+          </a:lnRef>
+          <a:fillRef idx="3">
+            <a:schemeClr val="accent1"/>
+          </a:fillRef>
+          <a:effectRef idx="2">
+            <a:schemeClr val="accent1"/>
+          </a:effectRef>
+          <a:fontRef idx="minor">
+            <a:schemeClr val="lt1"/>
+          </a:fontRef>
+        </p:style>
+        <p:txBody>
+          <a:bodyPr rtlCol="0" anchor="ctr"/>
+          <a:lstStyle/>
+          <a:p>
+            <a:pPr algn="ctr"/>
+          </a:p>
+        </p:txBody>
+      </p:sp>
+      <p:sp>
+        <p:nvSpPr>
+          <p:cNvPr id="11" name="TextBox 10"/>
+          <p:cNvSpPr txBox="1"/>
+          <p:nvPr/>
+        </p:nvSpPr>
+        <p:spPr>
+          <a:xfrm>
+            <a:off x="1051560" y="2221992"/>
+            <a:ext cx="10241280" cy="457200"/>
+          </a:xfrm>
+          <a:prstGeom prst="rect">
+            <a:avLst/>
+          </a:prstGeom>
+          <a:noFill/>
+        </p:spPr>
+        <p:txBody>
+          <a:bodyPr wrap="none">
+            <a:spAutoFit/>
+          </a:bodyPr>
+          <a:lstStyle/>
+          <a:p>
+            <a:pPr algn="l"/>
+            <a:r>
+              <a:rPr sz="2000" b="1">
+                <a:solidFill>
+                  <a:srgbClr val="185FCB"/>
+                </a:solidFill>
+                <a:latin typeface="Calibri"/>
+              </a:rPr>
+              <a:t>Product</a:t>
+            </a:r>
+          </a:p>
+        </p:txBody>
+      </p:sp>
+      <p:sp>
+        <p:nvSpPr>
+          <p:cNvPr id="12" name="TextBox 11"/>
+          <p:cNvSpPr txBox="1"/>
+          <p:nvPr/>
+        </p:nvSpPr>
+        <p:spPr>
+          <a:xfrm>
+            <a:off x="1051560" y="2715768"/>
+            <a:ext cx="10241280" cy="914399"/>
+          </a:xfrm>
+          <a:prstGeom prst="rect">
+            <a:avLst/>
+          </a:prstGeom>
+          <a:noFill/>
+        </p:spPr>
+        <p:txBody>
+          <a:bodyPr wrap="none">
+            <a:spAutoFit/>
+          </a:bodyPr>
+          <a:lstStyle/>
+          <a:p>
+            <a:pPr algn="l"/>
+            <a:r>
+              <a:rPr sz="1500" b="0">
+                <a:solidFill>
+                  <a:srgbClr val="13233A"/>
+                </a:solidFill>
+                <a:latin typeface="Calibri"/>
+              </a:rPr>
+              <a:t>https://sre-nidaan-122722888597.us-east4.run.app</a:t>
+            </a:r>
+          </a:p>
+        </p:txBody>
+      </p:sp>
+      <p:sp>
+        <p:nvSpPr>
+          <p:cNvPr id="13" name="Rounded Rectangle 12"/>
+          <p:cNvSpPr/>
+          <p:nvPr/>
+        </p:nvSpPr>
+        <p:spPr>
+          <a:xfrm>
+            <a:off x="822960" y="3977639"/>
+            <a:ext cx="10698480" cy="1737360"/>
           </a:xfrm>
           <a:prstGeom prst="roundRect">
             <a:avLst/>
@@ -5893,7 +9788,7 @@
           </a:solidFill>
           <a:ln>
             <a:solidFill>
-              <a:srgbClr val="C2D3E8"/>
+              <a:srgbClr val="C4D5E9"/>
             </a:solidFill>
           </a:ln>
         </p:spPr>
@@ -5916,38 +9811,75 @@
           <a:lstStyle/>
           <a:p>
             <a:pPr algn="ctr"/>
-            <a:r>
-              <a:rPr sz="1800" b="0">
-                <a:solidFill>
-                  <a:srgbClr val="14243A"/>
-                </a:solidFill>
-                <a:latin typeface="Calibri"/>
-              </a:rPr>
-              <a:t>• Early, imperfect but seems useful in practice.</a:t>
-            </a:r>
-          </a:p>
-          <a:p>
-            <a:pPr/>
-            <a:r>
-              <a:rPr sz="1800" b="0">
-                <a:solidFill>
-                  <a:srgbClr val="14243A"/>
-                </a:solidFill>
-                <a:latin typeface="Calibri"/>
-              </a:rPr>
-              <a:t>• Focus remains production hardening, not hype.</a:t>
-            </a:r>
-          </a:p>
-          <a:p>
-            <a:pPr/>
-            <a:r>
-              <a:rPr sz="1800" b="0">
-                <a:solidFill>
-                  <a:srgbClr val="14243A"/>
-                </a:solidFill>
-                <a:latin typeface="Calibri"/>
-              </a:rPr>
-              <a:t>• Goal: reliable copilot behavior under real incident pressure.</a:t>
+          </a:p>
+        </p:txBody>
+      </p:sp>
+      <p:sp>
+        <p:nvSpPr>
+          <p:cNvPr id="14" name="TextBox 13"/>
+          <p:cNvSpPr txBox="1"/>
+          <p:nvPr/>
+        </p:nvSpPr>
+        <p:spPr>
+          <a:xfrm>
+            <a:off x="1051560" y="4142231"/>
+            <a:ext cx="10241280" cy="457200"/>
+          </a:xfrm>
+          <a:prstGeom prst="rect">
+            <a:avLst/>
+          </a:prstGeom>
+          <a:noFill/>
+        </p:spPr>
+        <p:txBody>
+          <a:bodyPr wrap="none">
+            <a:spAutoFit/>
+          </a:bodyPr>
+          <a:lstStyle/>
+          <a:p>
+            <a:pPr algn="l"/>
+            <a:r>
+              <a:rPr sz="2000" b="1">
+                <a:solidFill>
+                  <a:srgbClr val="13233A"/>
+                </a:solidFill>
+                <a:latin typeface="Calibri"/>
+              </a:rPr>
+              <a:t>GitHub</a:t>
+            </a:r>
+          </a:p>
+        </p:txBody>
+      </p:sp>
+      <p:sp>
+        <p:nvSpPr>
+          <p:cNvPr id="15" name="TextBox 14"/>
+          <p:cNvSpPr txBox="1"/>
+          <p:nvPr/>
+        </p:nvSpPr>
+        <p:spPr>
+          <a:xfrm>
+            <a:off x="1051560" y="4636007"/>
+            <a:ext cx="10241280" cy="914399"/>
+          </a:xfrm>
+          <a:prstGeom prst="rect">
+            <a:avLst/>
+          </a:prstGeom>
+          <a:noFill/>
+        </p:spPr>
+        <p:txBody>
+          <a:bodyPr wrap="none">
+            <a:spAutoFit/>
+          </a:bodyPr>
+          <a:lstStyle/>
+          <a:p>
+            <a:pPr algn="l"/>
+            <a:r>
+              <a:rPr sz="1500" b="0">
+                <a:solidFill>
+                  <a:srgbClr val="13233A"/>
+                </a:solidFill>
+                <a:latin typeface="Calibri"/>
+              </a:rPr>
+              <a:t>https://github.com/RitwijParmar/SRE-Nidaan</a:t>
             </a:r>
           </a:p>
         </p:txBody>
